--- a/docs/presentations/EnzymeX_BLAST_HMMER_update.pptx
+++ b/docs/presentations/EnzymeX_BLAST_HMMER_update.pptx
@@ -16347,7 +16347,7 @@
                 </a:solidFill>
                 <a:latin typeface="Malgun Gothic"/>
               </a:rPr>
-              <a:t>•  Those 25 hits carry eight different EC annotations. None of them belong to GFP.</a:t>
+              <a:t>•  15 of the 25 carry an EC, spanning eight distinct values. None belong to GFP.</a:t>
             </a:r>
           </a:p>
         </p:txBody>

--- a/docs/presentations/EnzymeX_BLAST_HMMER_update.pptx
+++ b/docs/presentations/EnzymeX_BLAST_HMMER_update.pptx
@@ -13,6 +13,7 @@
     <p:sldId id="261" r:id="rId13"/>
     <p:sldId id="262" r:id="rId14"/>
     <p:sldId id="263" r:id="rId15"/>
+    <p:sldId id="264" r:id="rId16"/>
   </p:sldIdLst>
   <p:sldSz cx="12191695" cy="6858000" type="screen4x3"/>
   <p:notesSz cx="6858000" cy="9144000"/>
@@ -649,7 +650,7 @@
           <a:lstStyle/>
           <a:p>
             <a:r>
-              <a:t>The single structural decision. Everything expensive runs offline; a request only reads files, so a misconfigured credential is unreachable from the website.</a:t>
+              <a:t>Nothing here is exotic and nothing conflicts. The web layer I used is FastAPI only because it was a standalone test server; the search code itself imports no web framework, so the Pyramid side needs no rewrite. BLAST+, HMMER, MAFFT and MMseqs2 are binaries rather than pip packages, which is why the environment is micromamba.</a:t>
             </a:r>
           </a:p>
         </p:txBody>
@@ -719,7 +720,7 @@
           <a:lstStyle/>
           <a:p>
             <a:r>
-              <a:t>An E-value depends on search space size and statistical model. BLAST and phmmer search all references, hmmscan searches the profile set. Recommendation: BLAST always, profiles optional, phmmer off by default.</a:t>
+              <a:t>The single structural decision. Everything expensive runs offline; a request only reads files, so a misconfigured credential is unreachable from the website.</a:t>
             </a:r>
           </a:p>
         </p:txBody>
@@ -789,7 +790,7 @@
           <a:lstStyle/>
           <a:p>
             <a:r>
-              <a:t>Superoxide dismutase has Cu/Zn, Mn/Fe and Ni enzymes under EC 1.15.1.1. A single per-EC profile would merge unrelated folds into a model that still produces confident-looking scores.</a:t>
+              <a:t>An E-value depends on search space size and statistical model. BLAST and phmmer search all references, hmmscan searches the profile set. Recommendation: BLAST always, profiles optional, phmmer off by default.</a:t>
             </a:r>
           </a:p>
         </p:txBody>
@@ -859,7 +860,7 @@
           <a:lstStyle/>
           <a:p>
             <a:r>
-              <a:t>Two BLAST versions, his parameters, identical top hit on every comparable query. Full test suite passes. On the leakage-controlled slice blastp top-hit EC agreement was 87.7%, but that cohort is truth-selected and narrow.</a:t>
+              <a:t>Superoxide dismutase has Cu/Zn, Mn/Fe and Ni enzymes under EC 1.15.1.1. A single per-EC profile would merge unrelated folds into a model that still produces confident-looking scores.</a:t>
             </a:r>
           </a:p>
         </p:txBody>
@@ -929,7 +930,7 @@
           <a:lstStyle/>
           <a:p>
             <a:r>
-              <a:t>Public SwissProt_PDB_2022 set, a proxy for the real EnzymeX copy. Profiles were not built on this generation, so hmmscan figures come from the smaller fixture build. Without subject coverage the page would report a fusion partner's EC at near-perfect identity.</a:t>
+              <a:t>Two BLAST versions, his parameters, identical top hit on every comparable query. Full test suite passes. On the leakage-controlled slice blastp top-hit EC agreement was 87.7%, but that cohort is truth-selected and narrow.</a:t>
             </a:r>
           </a:p>
         </p:txBody>
@@ -955,6 +956,76 @@
 </file>
 
 <file path=ppt/notesSlides/notesSlide8.xml><?xml version="1.0" encoding="utf-8"?>
+<p:notes xmlns:a="http://schemas.openxmlformats.org/drawingml/2006/main" xmlns:p="http://schemas.openxmlformats.org/presentationml/2006/main" xmlns:r="http://schemas.openxmlformats.org/officeDocument/2006/relationships">
+  <p:cSld>
+    <p:spTree>
+      <p:nvGrpSpPr>
+        <p:cNvPr id="1" name=""/>
+        <p:cNvGrpSpPr/>
+        <p:nvPr/>
+      </p:nvGrpSpPr>
+      <p:grpSpPr>
+        <a:xfrm>
+          <a:off x="0" y="0"/>
+          <a:ext cx="0" cy="0"/>
+          <a:chOff x="0" y="0"/>
+          <a:chExt cx="0" cy="0"/>
+        </a:xfrm>
+      </p:grpSpPr>
+      <p:sp>
+        <p:nvSpPr>
+          <p:cNvPr id="2" name="Slide Image Placeholder 1"/>
+          <p:cNvSpPr>
+            <a:spLocks noGrp="1"/>
+          </p:cNvSpPr>
+          <p:nvPr>
+            <p:ph type="sldImg" idx="2"/>
+          </p:nvPr>
+        </p:nvSpPr>
+        <p:spPr/>
+      </p:sp>
+      <p:sp>
+        <p:nvSpPr>
+          <p:cNvPr id="3" name="Notes Placeholder 2"/>
+          <p:cNvSpPr>
+            <a:spLocks noGrp="1"/>
+          </p:cNvSpPr>
+          <p:nvPr>
+            <p:ph type="body" idx="3" sz="quarter"/>
+          </p:nvPr>
+        </p:nvSpPr>
+        <p:spPr/>
+        <p:txBody>
+          <a:bodyPr/>
+          <a:lstStyle/>
+          <a:p>
+            <a:r>
+              <a:t>Public SwissProt_PDB_2022 set, a proxy for the real EnzymeX copy. Profiles were not built on this generation, so hmmscan figures come from the smaller fixture build. Without subject coverage the page would report a fusion partner's EC at near-perfect identity.</a:t>
+            </a:r>
+          </a:p>
+        </p:txBody>
+      </p:sp>
+      <p:sp>
+        <p:nvSpPr>
+          <p:cNvPr id="4" name="Slide Number Placeholder 3"/>
+          <p:cNvSpPr>
+            <a:spLocks noGrp="1"/>
+          </p:cNvSpPr>
+          <p:nvPr>
+            <p:ph type="sldNum" idx="5" sz="quarter"/>
+          </p:nvPr>
+        </p:nvSpPr>
+        <p:spPr/>
+      </p:sp>
+    </p:spTree>
+  </p:cSld>
+  <p:clrMapOvr>
+    <a:masterClrMapping/>
+  </p:clrMapOvr>
+</p:notes>
+</file>
+
+<file path=ppt/notesSlides/notesSlide9.xml><?xml version="1.0" encoding="utf-8"?>
 <p:notes xmlns:a="http://schemas.openxmlformats.org/drawingml/2006/main" xmlns:p="http://schemas.openxmlformats.org/presentationml/2006/main" xmlns:r="http://schemas.openxmlformats.org/officeDocument/2006/relationships">
   <p:cSld>
     <p:spTree>
@@ -6050,7 +6121,7 @@
                 </a:solidFill>
                 <a:latin typeface="Malgun Gothic"/>
               </a:rPr>
-              <a:t>Build once, search many times</a:t>
+              <a:t>Tech stack</a:t>
             </a:r>
           </a:p>
         </p:txBody>
@@ -6099,384 +6170,7 @@
         <p:spPr>
           <a:xfrm>
             <a:off x="658368" y="1463040"/>
-            <a:ext cx="5285232" cy="3200400"/>
-          </a:xfrm>
-          <a:prstGeom prst="roundRect">
-            <a:avLst/>
-          </a:prstGeom>
-          <a:solidFill>
-            <a:srgbClr val="EAF4F7"/>
-          </a:solidFill>
-          <a:ln w="12700">
-            <a:solidFill>
-              <a:srgbClr val="EAF4F7"/>
-            </a:solidFill>
-          </a:ln>
-        </p:spPr>
-        <p:style>
-          <a:lnRef idx="1">
-            <a:schemeClr val="accent1"/>
-          </a:lnRef>
-          <a:fillRef idx="3">
-            <a:schemeClr val="accent1"/>
-          </a:fillRef>
-          <a:effectRef idx="2">
-            <a:schemeClr val="accent1"/>
-          </a:effectRef>
-          <a:fontRef idx="minor">
-            <a:schemeClr val="lt1"/>
-          </a:fontRef>
-        </p:style>
-        <p:txBody>
-          <a:bodyPr rtlCol="0" anchor="ctr"/>
-          <a:lstStyle/>
-          <a:p>
-            <a:pPr algn="ctr"/>
-          </a:p>
-        </p:txBody>
-      </p:sp>
-      <p:sp>
-        <p:nvSpPr>
-          <p:cNvPr id="6" name="TextBox 5"/>
-          <p:cNvSpPr txBox="1"/>
-          <p:nvPr/>
-        </p:nvSpPr>
-        <p:spPr>
-          <a:xfrm>
-            <a:off x="932688" y="1719072"/>
-            <a:ext cx="4736592" cy="365760"/>
-          </a:xfrm>
-          <a:prstGeom prst="rect">
-            <a:avLst/>
-          </a:prstGeom>
-          <a:noFill/>
-        </p:spPr>
-        <p:txBody>
-          <a:bodyPr wrap="square" lIns="0" rIns="0" tIns="0" bIns="0" anchor="t">
-            <a:noAutofit/>
-          </a:bodyPr>
-          <a:lstStyle/>
-          <a:p>
-            <a:pPr algn="l"/>
-            <a:r>
-              <a:rPr sz="2000" b="1">
-                <a:solidFill>
-                  <a:srgbClr val="176B87"/>
-                </a:solidFill>
-                <a:latin typeface="Malgun Gothic"/>
-              </a:rPr>
-              <a:t>Offline build</a:t>
-            </a:r>
-          </a:p>
-        </p:txBody>
-      </p:sp>
-      <p:sp>
-        <p:nvSpPr>
-          <p:cNvPr id="7" name="TextBox 6"/>
-          <p:cNvSpPr txBox="1"/>
-          <p:nvPr/>
-        </p:nvSpPr>
-        <p:spPr>
-          <a:xfrm>
-            <a:off x="932688" y="2240280"/>
-            <a:ext cx="4736592" cy="2194560"/>
-          </a:xfrm>
-          <a:prstGeom prst="rect">
-            <a:avLst/>
-          </a:prstGeom>
-          <a:noFill/>
-        </p:spPr>
-        <p:txBody>
-          <a:bodyPr wrap="square" lIns="18288" rIns="18288" tIns="18288" bIns="18288">
-            <a:noAutofit/>
-          </a:bodyPr>
-          <a:lstStyle/>
-          <a:p>
-            <a:pPr>
-              <a:lnSpc>
-                <a:spcPct val="105000"/>
-              </a:lnSpc>
-              <a:spcAft>
-                <a:spcPts val="1100"/>
-              </a:spcAft>
-            </a:pPr>
-            <a:r>
-              <a:rPr sz="1500">
-                <a:solidFill>
-                  <a:srgbClr val="18212B"/>
-                </a:solidFill>
-                <a:latin typeface="Malgun Gothic"/>
-              </a:rPr>
-              <a:t>•  The only step that opens the database</a:t>
-            </a:r>
-          </a:p>
-          <a:p>
-            <a:pPr>
-              <a:lnSpc>
-                <a:spcPct val="105000"/>
-              </a:lnSpc>
-              <a:spcAft>
-                <a:spcPts val="1100"/>
-              </a:spcAft>
-            </a:pPr>
-            <a:r>
-              <a:rPr sz="1500">
-                <a:solidFill>
-                  <a:srgbClr val="18212B"/>
-                </a:solidFill>
-                <a:latin typeface="Malgun Gothic"/>
-              </a:rPr>
-              <a:t>•  Filters, deduplicates, writes FASTA</a:t>
-            </a:r>
-          </a:p>
-          <a:p>
-            <a:pPr>
-              <a:lnSpc>
-                <a:spcPct val="105000"/>
-              </a:lnSpc>
-              <a:spcAft>
-                <a:spcPts val="1100"/>
-              </a:spcAft>
-            </a:pPr>
-            <a:r>
-              <a:rPr sz="1500">
-                <a:solidFill>
-                  <a:srgbClr val="18212B"/>
-                </a:solidFill>
-                <a:latin typeface="Malgun Gothic"/>
-              </a:rPr>
-              <a:t>•  Builds the BLAST index and the profiles</a:t>
-            </a:r>
-          </a:p>
-          <a:p>
-            <a:pPr>
-              <a:lnSpc>
-                <a:spcPct val="105000"/>
-              </a:lnSpc>
-              <a:spcAft>
-                <a:spcPts val="1100"/>
-              </a:spcAft>
-            </a:pPr>
-            <a:r>
-              <a:rPr sz="1500">
-                <a:solidFill>
-                  <a:srgbClr val="18212B"/>
-                </a:solidFill>
-                <a:latin typeface="Malgun Gothic"/>
-              </a:rPr>
-              <a:t>•  One build ID on every artifact</a:t>
-            </a:r>
-          </a:p>
-          <a:p>
-            <a:pPr>
-              <a:lnSpc>
-                <a:spcPct val="105000"/>
-              </a:lnSpc>
-              <a:spcAft>
-                <a:spcPts val="1100"/>
-              </a:spcAft>
-            </a:pPr>
-            <a:r>
-              <a:rPr sz="1500">
-                <a:solidFill>
-                  <a:srgbClr val="18212B"/>
-                </a:solidFill>
-                <a:latin typeface="Malgun Gothic"/>
-              </a:rPr>
-              <a:t>•  Minutes, on a schedule</a:t>
-            </a:r>
-          </a:p>
-        </p:txBody>
-      </p:sp>
-      <p:sp>
-        <p:nvSpPr>
-          <p:cNvPr id="8" name="Rounded Rectangle 7"/>
-          <p:cNvSpPr/>
-          <p:nvPr/>
-        </p:nvSpPr>
-        <p:spPr>
-          <a:xfrm>
-            <a:off x="6245352" y="1463040"/>
-            <a:ext cx="5294376" cy="3200400"/>
-          </a:xfrm>
-          <a:prstGeom prst="roundRect">
-            <a:avLst/>
-          </a:prstGeom>
-          <a:solidFill>
-            <a:srgbClr val="EAF6F1"/>
-          </a:solidFill>
-          <a:ln w="12700">
-            <a:solidFill>
-              <a:srgbClr val="EAF6F1"/>
-            </a:solidFill>
-          </a:ln>
-        </p:spPr>
-        <p:style>
-          <a:lnRef idx="1">
-            <a:schemeClr val="accent1"/>
-          </a:lnRef>
-          <a:fillRef idx="3">
-            <a:schemeClr val="accent1"/>
-          </a:fillRef>
-          <a:effectRef idx="2">
-            <a:schemeClr val="accent1"/>
-          </a:effectRef>
-          <a:fontRef idx="minor">
-            <a:schemeClr val="lt1"/>
-          </a:fontRef>
-        </p:style>
-        <p:txBody>
-          <a:bodyPr rtlCol="0" anchor="ctr"/>
-          <a:lstStyle/>
-          <a:p>
-            <a:pPr algn="ctr"/>
-          </a:p>
-        </p:txBody>
-      </p:sp>
-      <p:sp>
-        <p:nvSpPr>
-          <p:cNvPr id="9" name="TextBox 8"/>
-          <p:cNvSpPr txBox="1"/>
-          <p:nvPr/>
-        </p:nvSpPr>
-        <p:spPr>
-          <a:xfrm>
-            <a:off x="6519672" y="1719072"/>
-            <a:ext cx="4745736" cy="365760"/>
-          </a:xfrm>
-          <a:prstGeom prst="rect">
-            <a:avLst/>
-          </a:prstGeom>
-          <a:noFill/>
-        </p:spPr>
-        <p:txBody>
-          <a:bodyPr wrap="square" lIns="0" rIns="0" tIns="0" bIns="0" anchor="t">
-            <a:noAutofit/>
-          </a:bodyPr>
-          <a:lstStyle/>
-          <a:p>
-            <a:pPr algn="l"/>
-            <a:r>
-              <a:rPr sz="2000" b="1">
-                <a:solidFill>
-                  <a:srgbClr val="167C5A"/>
-                </a:solidFill>
-                <a:latin typeface="Malgun Gothic"/>
-              </a:rPr>
-              <a:t>Online search</a:t>
-            </a:r>
-          </a:p>
-        </p:txBody>
-      </p:sp>
-      <p:sp>
-        <p:nvSpPr>
-          <p:cNvPr id="10" name="TextBox 9"/>
-          <p:cNvSpPr txBox="1"/>
-          <p:nvPr/>
-        </p:nvSpPr>
-        <p:spPr>
-          <a:xfrm>
-            <a:off x="6519672" y="2240280"/>
-            <a:ext cx="4745736" cy="2194560"/>
-          </a:xfrm>
-          <a:prstGeom prst="rect">
-            <a:avLst/>
-          </a:prstGeom>
-          <a:noFill/>
-        </p:spPr>
-        <p:txBody>
-          <a:bodyPr wrap="square" lIns="18288" rIns="18288" tIns="18288" bIns="18288">
-            <a:noAutofit/>
-          </a:bodyPr>
-          <a:lstStyle/>
-          <a:p>
-            <a:pPr>
-              <a:lnSpc>
-                <a:spcPct val="105000"/>
-              </a:lnSpc>
-              <a:spcAft>
-                <a:spcPts val="1100"/>
-              </a:spcAft>
-            </a:pPr>
-            <a:r>
-              <a:rPr sz="1500">
-                <a:solidFill>
-                  <a:srgbClr val="18212B"/>
-                </a:solidFill>
-                <a:latin typeface="Malgun Gothic"/>
-              </a:rPr>
-              <a:t>•  Reads the built files only</a:t>
-            </a:r>
-          </a:p>
-          <a:p>
-            <a:pPr>
-              <a:lnSpc>
-                <a:spcPct val="105000"/>
-              </a:lnSpc>
-              <a:spcAft>
-                <a:spcPts val="1100"/>
-              </a:spcAft>
-            </a:pPr>
-            <a:r>
-              <a:rPr sz="1500">
-                <a:solidFill>
-                  <a:srgbClr val="18212B"/>
-                </a:solidFill>
-                <a:latin typeface="Malgun Gothic"/>
-              </a:rPr>
-              <a:t>•  No database connection</a:t>
-            </a:r>
-          </a:p>
-          <a:p>
-            <a:pPr>
-              <a:lnSpc>
-                <a:spcPct val="105000"/>
-              </a:lnSpc>
-              <a:spcAft>
-                <a:spcPts val="1100"/>
-              </a:spcAft>
-            </a:pPr>
-            <a:r>
-              <a:rPr sz="1500">
-                <a:solidFill>
-                  <a:srgbClr val="18212B"/>
-                </a:solidFill>
-                <a:latin typeface="Malgun Gothic"/>
-              </a:rPr>
-              <a:t>•  Metadata from the same build</a:t>
-            </a:r>
-          </a:p>
-          <a:p>
-            <a:pPr>
-              <a:lnSpc>
-                <a:spcPct val="105000"/>
-              </a:lnSpc>
-              <a:spcAft>
-                <a:spcPts val="1100"/>
-              </a:spcAft>
-            </a:pPr>
-            <a:r>
-              <a:rPr sz="1500">
-                <a:solidFill>
-                  <a:srgbClr val="18212B"/>
-                </a:solidFill>
-                <a:latin typeface="Malgun Gothic"/>
-              </a:rPr>
-              <a:t>•  Seconds per query</a:t>
-            </a:r>
-          </a:p>
-        </p:txBody>
-      </p:sp>
-      <p:sp>
-        <p:nvSpPr>
-          <p:cNvPr id="11" name="Rounded Rectangle 10"/>
-          <p:cNvSpPr/>
-          <p:nvPr/>
-        </p:nvSpPr>
-        <p:spPr>
-          <a:xfrm>
-            <a:off x="658368" y="4983480"/>
-            <a:ext cx="3474720" cy="914400"/>
+            <a:ext cx="5285232" cy="4315968"/>
           </a:xfrm>
           <a:prstGeom prst="roundRect">
             <a:avLst/>
@@ -6514,14 +6208,14 @@
       </p:sp>
       <p:sp>
         <p:nvSpPr>
-          <p:cNvPr id="12" name="Rectangle 11"/>
+          <p:cNvPr id="6" name="Rectangle 5"/>
           <p:cNvSpPr/>
           <p:nvPr/>
         </p:nvSpPr>
         <p:spPr>
           <a:xfrm>
-            <a:off x="658368" y="4983480"/>
-            <a:ext cx="82296" cy="914400"/>
+            <a:off x="658368" y="1463040"/>
+            <a:ext cx="5285232" cy="457200"/>
           </a:xfrm>
           <a:prstGeom prst="rect">
             <a:avLst/>
@@ -6559,14 +6253,14 @@
       </p:sp>
       <p:sp>
         <p:nvSpPr>
-          <p:cNvPr id="13" name="TextBox 12"/>
+          <p:cNvPr id="7" name="TextBox 6"/>
           <p:cNvSpPr txBox="1"/>
           <p:nvPr/>
         </p:nvSpPr>
         <p:spPr>
           <a:xfrm>
-            <a:off x="914400" y="5138928"/>
-            <a:ext cx="3017520" cy="274320"/>
+            <a:off x="914400" y="1572768"/>
+            <a:ext cx="4773168" cy="274320"/>
           </a:xfrm>
           <a:prstGeom prst="rect">
             <a:avLst/>
@@ -6581,27 +6275,72 @@
           <a:p>
             <a:pPr algn="l"/>
             <a:r>
-              <a:rPr sz="1400" b="1">
-                <a:solidFill>
-                  <a:srgbClr val="B71A1A"/>
-                </a:solidFill>
-                <a:latin typeface="Malgun Gothic"/>
-              </a:rPr>
-              <a:t>No DB at request time</a:t>
-            </a:r>
-          </a:p>
-        </p:txBody>
-      </p:sp>
-      <p:sp>
-        <p:nvSpPr>
-          <p:cNvPr id="14" name="TextBox 13"/>
+              <a:rPr sz="1600" b="1">
+                <a:solidFill>
+                  <a:srgbClr val="FFFFFF"/>
+                </a:solidFill>
+                <a:latin typeface="Malgun Gothic"/>
+              </a:rPr>
+              <a:t>This project</a:t>
+            </a:r>
+          </a:p>
+        </p:txBody>
+      </p:sp>
+      <p:sp>
+        <p:nvSpPr>
+          <p:cNvPr id="8" name="Rectangle 7"/>
+          <p:cNvSpPr/>
+          <p:nvPr/>
+        </p:nvSpPr>
+        <p:spPr>
+          <a:xfrm>
+            <a:off x="676656" y="1975104"/>
+            <a:ext cx="5248656" cy="420624"/>
+          </a:xfrm>
+          <a:prstGeom prst="rect">
+            <a:avLst/>
+          </a:prstGeom>
+          <a:solidFill>
+            <a:srgbClr val="FBECEC"/>
+          </a:solidFill>
+          <a:ln>
+            <a:solidFill>
+              <a:srgbClr val="FBECEC"/>
+            </a:solidFill>
+          </a:ln>
+        </p:spPr>
+        <p:style>
+          <a:lnRef idx="1">
+            <a:schemeClr val="accent1"/>
+          </a:lnRef>
+          <a:fillRef idx="3">
+            <a:schemeClr val="accent1"/>
+          </a:fillRef>
+          <a:effectRef idx="2">
+            <a:schemeClr val="accent1"/>
+          </a:effectRef>
+          <a:fontRef idx="minor">
+            <a:schemeClr val="lt1"/>
+          </a:fontRef>
+        </p:style>
+        <p:txBody>
+          <a:bodyPr rtlCol="0" anchor="ctr"/>
+          <a:lstStyle/>
+          <a:p>
+            <a:pPr algn="ctr"/>
+          </a:p>
+        </p:txBody>
+      </p:sp>
+      <p:sp>
+        <p:nvSpPr>
+          <p:cNvPr id="9" name="TextBox 8"/>
           <p:cNvSpPr txBox="1"/>
           <p:nvPr/>
         </p:nvSpPr>
         <p:spPr>
           <a:xfrm>
-            <a:off x="914400" y="5458968"/>
-            <a:ext cx="3017520" cy="274320"/>
+            <a:off x="914400" y="2029968"/>
+            <a:ext cx="1417320" cy="274320"/>
           </a:xfrm>
           <a:prstGeom prst="rect">
             <a:avLst/>
@@ -6616,27 +6355,687 @@
           <a:p>
             <a:pPr algn="l"/>
             <a:r>
-              <a:rPr sz="1200" b="0">
+              <a:rPr sz="1250" b="1">
                 <a:solidFill>
                   <a:srgbClr val="52565B"/>
                 </a:solidFill>
                 <a:latin typeface="Malgun Gothic"/>
               </a:rPr>
-              <a:t>cannot slow or leak the database</a:t>
-            </a:r>
-          </a:p>
-        </p:txBody>
-      </p:sp>
-      <p:sp>
-        <p:nvSpPr>
-          <p:cNvPr id="15" name="Rounded Rectangle 14"/>
+              <a:t>Language</a:t>
+            </a:r>
+          </a:p>
+        </p:txBody>
+      </p:sp>
+      <p:sp>
+        <p:nvSpPr>
+          <p:cNvPr id="10" name="TextBox 9"/>
+          <p:cNvSpPr txBox="1"/>
+          <p:nvPr/>
+        </p:nvSpPr>
+        <p:spPr>
+          <a:xfrm>
+            <a:off x="2441448" y="2029968"/>
+            <a:ext cx="3227832" cy="310896"/>
+          </a:xfrm>
+          <a:prstGeom prst="rect">
+            <a:avLst/>
+          </a:prstGeom>
+          <a:noFill/>
+        </p:spPr>
+        <p:txBody>
+          <a:bodyPr wrap="square" lIns="0" rIns="0" tIns="0" bIns="0" anchor="t">
+            <a:noAutofit/>
+          </a:bodyPr>
+          <a:lstStyle/>
+          <a:p>
+            <a:pPr algn="l"/>
+            <a:r>
+              <a:rPr sz="1250" b="0">
+                <a:solidFill>
+                  <a:srgbClr val="18212B"/>
+                </a:solidFill>
+                <a:latin typeface="Malgun Gothic"/>
+              </a:rPr>
+              <a:t>Python 3.11</a:t>
+            </a:r>
+          </a:p>
+        </p:txBody>
+      </p:sp>
+      <p:sp>
+        <p:nvSpPr>
+          <p:cNvPr id="11" name="TextBox 10"/>
+          <p:cNvSpPr txBox="1"/>
+          <p:nvPr/>
+        </p:nvSpPr>
+        <p:spPr>
+          <a:xfrm>
+            <a:off x="914400" y="2487168"/>
+            <a:ext cx="1417320" cy="274320"/>
+          </a:xfrm>
+          <a:prstGeom prst="rect">
+            <a:avLst/>
+          </a:prstGeom>
+          <a:noFill/>
+        </p:spPr>
+        <p:txBody>
+          <a:bodyPr wrap="square" lIns="0" rIns="0" tIns="0" bIns="0" anchor="t">
+            <a:noAutofit/>
+          </a:bodyPr>
+          <a:lstStyle/>
+          <a:p>
+            <a:pPr algn="l"/>
+            <a:r>
+              <a:rPr sz="1250" b="1">
+                <a:solidFill>
+                  <a:srgbClr val="52565B"/>
+                </a:solidFill>
+                <a:latin typeface="Malgun Gothic"/>
+              </a:rPr>
+              <a:t>Web</a:t>
+            </a:r>
+          </a:p>
+        </p:txBody>
+      </p:sp>
+      <p:sp>
+        <p:nvSpPr>
+          <p:cNvPr id="12" name="TextBox 11"/>
+          <p:cNvSpPr txBox="1"/>
+          <p:nvPr/>
+        </p:nvSpPr>
+        <p:spPr>
+          <a:xfrm>
+            <a:off x="2441448" y="2487168"/>
+            <a:ext cx="3227832" cy="310896"/>
+          </a:xfrm>
+          <a:prstGeom prst="rect">
+            <a:avLst/>
+          </a:prstGeom>
+          <a:noFill/>
+        </p:spPr>
+        <p:txBody>
+          <a:bodyPr wrap="square" lIns="0" rIns="0" tIns="0" bIns="0" anchor="t">
+            <a:noAutofit/>
+          </a:bodyPr>
+          <a:lstStyle/>
+          <a:p>
+            <a:pPr algn="l"/>
+            <a:r>
+              <a:rPr sz="1250" b="0">
+                <a:solidFill>
+                  <a:srgbClr val="18212B"/>
+                </a:solidFill>
+                <a:latin typeface="Malgun Gothic"/>
+              </a:rPr>
+              <a:t>FastAPI + Jinja2, served by uvicorn</a:t>
+            </a:r>
+          </a:p>
+        </p:txBody>
+      </p:sp>
+      <p:sp>
+        <p:nvSpPr>
+          <p:cNvPr id="13" name="Rectangle 12"/>
           <p:cNvSpPr/>
           <p:nvPr/>
         </p:nvSpPr>
         <p:spPr>
           <a:xfrm>
-            <a:off x="4334255" y="4983480"/>
-            <a:ext cx="3474720" cy="914400"/>
+            <a:off x="676656" y="2889504"/>
+            <a:ext cx="5248656" cy="420624"/>
+          </a:xfrm>
+          <a:prstGeom prst="rect">
+            <a:avLst/>
+          </a:prstGeom>
+          <a:solidFill>
+            <a:srgbClr val="FBECEC"/>
+          </a:solidFill>
+          <a:ln>
+            <a:solidFill>
+              <a:srgbClr val="FBECEC"/>
+            </a:solidFill>
+          </a:ln>
+        </p:spPr>
+        <p:style>
+          <a:lnRef idx="1">
+            <a:schemeClr val="accent1"/>
+          </a:lnRef>
+          <a:fillRef idx="3">
+            <a:schemeClr val="accent1"/>
+          </a:fillRef>
+          <a:effectRef idx="2">
+            <a:schemeClr val="accent1"/>
+          </a:effectRef>
+          <a:fontRef idx="minor">
+            <a:schemeClr val="lt1"/>
+          </a:fontRef>
+        </p:style>
+        <p:txBody>
+          <a:bodyPr rtlCol="0" anchor="ctr"/>
+          <a:lstStyle/>
+          <a:p>
+            <a:pPr algn="ctr"/>
+          </a:p>
+        </p:txBody>
+      </p:sp>
+      <p:sp>
+        <p:nvSpPr>
+          <p:cNvPr id="14" name="TextBox 13"/>
+          <p:cNvSpPr txBox="1"/>
+          <p:nvPr/>
+        </p:nvSpPr>
+        <p:spPr>
+          <a:xfrm>
+            <a:off x="914400" y="2944368"/>
+            <a:ext cx="1417320" cy="274320"/>
+          </a:xfrm>
+          <a:prstGeom prst="rect">
+            <a:avLst/>
+          </a:prstGeom>
+          <a:noFill/>
+        </p:spPr>
+        <p:txBody>
+          <a:bodyPr wrap="square" lIns="0" rIns="0" tIns="0" bIns="0" anchor="t">
+            <a:noAutofit/>
+          </a:bodyPr>
+          <a:lstStyle/>
+          <a:p>
+            <a:pPr algn="l"/>
+            <a:r>
+              <a:rPr sz="1250" b="1">
+                <a:solidFill>
+                  <a:srgbClr val="52565B"/>
+                </a:solidFill>
+                <a:latin typeface="Malgun Gothic"/>
+              </a:rPr>
+              <a:t>Validation</a:t>
+            </a:r>
+          </a:p>
+        </p:txBody>
+      </p:sp>
+      <p:sp>
+        <p:nvSpPr>
+          <p:cNvPr id="15" name="TextBox 14"/>
+          <p:cNvSpPr txBox="1"/>
+          <p:nvPr/>
+        </p:nvSpPr>
+        <p:spPr>
+          <a:xfrm>
+            <a:off x="2441448" y="2944368"/>
+            <a:ext cx="3227832" cy="310896"/>
+          </a:xfrm>
+          <a:prstGeom prst="rect">
+            <a:avLst/>
+          </a:prstGeom>
+          <a:noFill/>
+        </p:spPr>
+        <p:txBody>
+          <a:bodyPr wrap="square" lIns="0" rIns="0" tIns="0" bIns="0" anchor="t">
+            <a:noAutofit/>
+          </a:bodyPr>
+          <a:lstStyle/>
+          <a:p>
+            <a:pPr algn="l"/>
+            <a:r>
+              <a:rPr sz="1250" b="0">
+                <a:solidFill>
+                  <a:srgbClr val="18212B"/>
+                </a:solidFill>
+                <a:latin typeface="Malgun Gothic"/>
+              </a:rPr>
+              <a:t>Pydantic</a:t>
+            </a:r>
+          </a:p>
+        </p:txBody>
+      </p:sp>
+      <p:sp>
+        <p:nvSpPr>
+          <p:cNvPr id="16" name="TextBox 15"/>
+          <p:cNvSpPr txBox="1"/>
+          <p:nvPr/>
+        </p:nvSpPr>
+        <p:spPr>
+          <a:xfrm>
+            <a:off x="914400" y="3401568"/>
+            <a:ext cx="1417320" cy="274320"/>
+          </a:xfrm>
+          <a:prstGeom prst="rect">
+            <a:avLst/>
+          </a:prstGeom>
+          <a:noFill/>
+        </p:spPr>
+        <p:txBody>
+          <a:bodyPr wrap="square" lIns="0" rIns="0" tIns="0" bIns="0" anchor="t">
+            <a:noAutofit/>
+          </a:bodyPr>
+          <a:lstStyle/>
+          <a:p>
+            <a:pPr algn="l"/>
+            <a:r>
+              <a:rPr sz="1250" b="1">
+                <a:solidFill>
+                  <a:srgbClr val="52565B"/>
+                </a:solidFill>
+                <a:latin typeface="Malgun Gothic"/>
+              </a:rPr>
+              <a:t>Databases</a:t>
+            </a:r>
+          </a:p>
+        </p:txBody>
+      </p:sp>
+      <p:sp>
+        <p:nvSpPr>
+          <p:cNvPr id="17" name="TextBox 16"/>
+          <p:cNvSpPr txBox="1"/>
+          <p:nvPr/>
+        </p:nvSpPr>
+        <p:spPr>
+          <a:xfrm>
+            <a:off x="2441448" y="3401568"/>
+            <a:ext cx="3227832" cy="310896"/>
+          </a:xfrm>
+          <a:prstGeom prst="rect">
+            <a:avLst/>
+          </a:prstGeom>
+          <a:noFill/>
+        </p:spPr>
+        <p:txBody>
+          <a:bodyPr wrap="square" lIns="0" rIns="0" tIns="0" bIns="0" anchor="t">
+            <a:noAutofit/>
+          </a:bodyPr>
+          <a:lstStyle/>
+          <a:p>
+            <a:pPr algn="l"/>
+            <a:r>
+              <a:rPr sz="1250" b="0">
+                <a:solidFill>
+                  <a:srgbClr val="18212B"/>
+                </a:solidFill>
+                <a:latin typeface="Malgun Gothic"/>
+              </a:rPr>
+              <a:t>MySQL read-only for the build, SQLite for search metadata</a:t>
+            </a:r>
+          </a:p>
+        </p:txBody>
+      </p:sp>
+      <p:sp>
+        <p:nvSpPr>
+          <p:cNvPr id="18" name="Rectangle 17"/>
+          <p:cNvSpPr/>
+          <p:nvPr/>
+        </p:nvSpPr>
+        <p:spPr>
+          <a:xfrm>
+            <a:off x="676656" y="3803904"/>
+            <a:ext cx="5248656" cy="420624"/>
+          </a:xfrm>
+          <a:prstGeom prst="rect">
+            <a:avLst/>
+          </a:prstGeom>
+          <a:solidFill>
+            <a:srgbClr val="FBECEC"/>
+          </a:solidFill>
+          <a:ln>
+            <a:solidFill>
+              <a:srgbClr val="FBECEC"/>
+            </a:solidFill>
+          </a:ln>
+        </p:spPr>
+        <p:style>
+          <a:lnRef idx="1">
+            <a:schemeClr val="accent1"/>
+          </a:lnRef>
+          <a:fillRef idx="3">
+            <a:schemeClr val="accent1"/>
+          </a:fillRef>
+          <a:effectRef idx="2">
+            <a:schemeClr val="accent1"/>
+          </a:effectRef>
+          <a:fontRef idx="minor">
+            <a:schemeClr val="lt1"/>
+          </a:fontRef>
+        </p:style>
+        <p:txBody>
+          <a:bodyPr rtlCol="0" anchor="ctr"/>
+          <a:lstStyle/>
+          <a:p>
+            <a:pPr algn="ctr"/>
+          </a:p>
+        </p:txBody>
+      </p:sp>
+      <p:sp>
+        <p:nvSpPr>
+          <p:cNvPr id="19" name="TextBox 18"/>
+          <p:cNvSpPr txBox="1"/>
+          <p:nvPr/>
+        </p:nvSpPr>
+        <p:spPr>
+          <a:xfrm>
+            <a:off x="914400" y="3858768"/>
+            <a:ext cx="1417320" cy="274320"/>
+          </a:xfrm>
+          <a:prstGeom prst="rect">
+            <a:avLst/>
+          </a:prstGeom>
+          <a:noFill/>
+        </p:spPr>
+        <p:txBody>
+          <a:bodyPr wrap="square" lIns="0" rIns="0" tIns="0" bIns="0" anchor="t">
+            <a:noAutofit/>
+          </a:bodyPr>
+          <a:lstStyle/>
+          <a:p>
+            <a:pPr algn="l"/>
+            <a:r>
+              <a:rPr sz="1250" b="1">
+                <a:solidFill>
+                  <a:srgbClr val="52565B"/>
+                </a:solidFill>
+                <a:latin typeface="Malgun Gothic"/>
+              </a:rPr>
+              <a:t>Search</a:t>
+            </a:r>
+          </a:p>
+        </p:txBody>
+      </p:sp>
+      <p:sp>
+        <p:nvSpPr>
+          <p:cNvPr id="20" name="TextBox 19"/>
+          <p:cNvSpPr txBox="1"/>
+          <p:nvPr/>
+        </p:nvSpPr>
+        <p:spPr>
+          <a:xfrm>
+            <a:off x="2441448" y="3858768"/>
+            <a:ext cx="3227832" cy="310896"/>
+          </a:xfrm>
+          <a:prstGeom prst="rect">
+            <a:avLst/>
+          </a:prstGeom>
+          <a:noFill/>
+        </p:spPr>
+        <p:txBody>
+          <a:bodyPr wrap="square" lIns="0" rIns="0" tIns="0" bIns="0" anchor="t">
+            <a:noAutofit/>
+          </a:bodyPr>
+          <a:lstStyle/>
+          <a:p>
+            <a:pPr algn="l"/>
+            <a:r>
+              <a:rPr sz="1250" b="0">
+                <a:solidFill>
+                  <a:srgbClr val="18212B"/>
+                </a:solidFill>
+                <a:latin typeface="Malgun Gothic"/>
+              </a:rPr>
+              <a:t>BLAST+ 2.16.0, HMMER 3.4</a:t>
+            </a:r>
+          </a:p>
+        </p:txBody>
+      </p:sp>
+      <p:sp>
+        <p:nvSpPr>
+          <p:cNvPr id="21" name="TextBox 20"/>
+          <p:cNvSpPr txBox="1"/>
+          <p:nvPr/>
+        </p:nvSpPr>
+        <p:spPr>
+          <a:xfrm>
+            <a:off x="914400" y="4315968"/>
+            <a:ext cx="1417320" cy="274320"/>
+          </a:xfrm>
+          <a:prstGeom prst="rect">
+            <a:avLst/>
+          </a:prstGeom>
+          <a:noFill/>
+        </p:spPr>
+        <p:txBody>
+          <a:bodyPr wrap="square" lIns="0" rIns="0" tIns="0" bIns="0" anchor="t">
+            <a:noAutofit/>
+          </a:bodyPr>
+          <a:lstStyle/>
+          <a:p>
+            <a:pPr algn="l"/>
+            <a:r>
+              <a:rPr sz="1250" b="1">
+                <a:solidFill>
+                  <a:srgbClr val="52565B"/>
+                </a:solidFill>
+                <a:latin typeface="Malgun Gothic"/>
+              </a:rPr>
+              <a:t>Build tools</a:t>
+            </a:r>
+          </a:p>
+        </p:txBody>
+      </p:sp>
+      <p:sp>
+        <p:nvSpPr>
+          <p:cNvPr id="22" name="TextBox 21"/>
+          <p:cNvSpPr txBox="1"/>
+          <p:nvPr/>
+        </p:nvSpPr>
+        <p:spPr>
+          <a:xfrm>
+            <a:off x="2441448" y="4315968"/>
+            <a:ext cx="3227832" cy="310896"/>
+          </a:xfrm>
+          <a:prstGeom prst="rect">
+            <a:avLst/>
+          </a:prstGeom>
+          <a:noFill/>
+        </p:spPr>
+        <p:txBody>
+          <a:bodyPr wrap="square" lIns="0" rIns="0" tIns="0" bIns="0" anchor="t">
+            <a:noAutofit/>
+          </a:bodyPr>
+          <a:lstStyle/>
+          <a:p>
+            <a:pPr algn="l"/>
+            <a:r>
+              <a:rPr sz="1250" b="0">
+                <a:solidFill>
+                  <a:srgbClr val="18212B"/>
+                </a:solidFill>
+                <a:latin typeface="Malgun Gothic"/>
+              </a:rPr>
+              <a:t>MMseqs2, MAFFT</a:t>
+            </a:r>
+          </a:p>
+        </p:txBody>
+      </p:sp>
+      <p:sp>
+        <p:nvSpPr>
+          <p:cNvPr id="23" name="Rectangle 22"/>
+          <p:cNvSpPr/>
+          <p:nvPr/>
+        </p:nvSpPr>
+        <p:spPr>
+          <a:xfrm>
+            <a:off x="676656" y="4718304"/>
+            <a:ext cx="5248656" cy="420624"/>
+          </a:xfrm>
+          <a:prstGeom prst="rect">
+            <a:avLst/>
+          </a:prstGeom>
+          <a:solidFill>
+            <a:srgbClr val="FBECEC"/>
+          </a:solidFill>
+          <a:ln>
+            <a:solidFill>
+              <a:srgbClr val="FBECEC"/>
+            </a:solidFill>
+          </a:ln>
+        </p:spPr>
+        <p:style>
+          <a:lnRef idx="1">
+            <a:schemeClr val="accent1"/>
+          </a:lnRef>
+          <a:fillRef idx="3">
+            <a:schemeClr val="accent1"/>
+          </a:fillRef>
+          <a:effectRef idx="2">
+            <a:schemeClr val="accent1"/>
+          </a:effectRef>
+          <a:fontRef idx="minor">
+            <a:schemeClr val="lt1"/>
+          </a:fontRef>
+        </p:style>
+        <p:txBody>
+          <a:bodyPr rtlCol="0" anchor="ctr"/>
+          <a:lstStyle/>
+          <a:p>
+            <a:pPr algn="ctr"/>
+          </a:p>
+        </p:txBody>
+      </p:sp>
+      <p:sp>
+        <p:nvSpPr>
+          <p:cNvPr id="24" name="TextBox 23"/>
+          <p:cNvSpPr txBox="1"/>
+          <p:nvPr/>
+        </p:nvSpPr>
+        <p:spPr>
+          <a:xfrm>
+            <a:off x="914400" y="4773168"/>
+            <a:ext cx="1417320" cy="274320"/>
+          </a:xfrm>
+          <a:prstGeom prst="rect">
+            <a:avLst/>
+          </a:prstGeom>
+          <a:noFill/>
+        </p:spPr>
+        <p:txBody>
+          <a:bodyPr wrap="square" lIns="0" rIns="0" tIns="0" bIns="0" anchor="t">
+            <a:noAutofit/>
+          </a:bodyPr>
+          <a:lstStyle/>
+          <a:p>
+            <a:pPr algn="l"/>
+            <a:r>
+              <a:rPr sz="1250" b="1">
+                <a:solidFill>
+                  <a:srgbClr val="52565B"/>
+                </a:solidFill>
+                <a:latin typeface="Malgun Gothic"/>
+              </a:rPr>
+              <a:t>Tests</a:t>
+            </a:r>
+          </a:p>
+        </p:txBody>
+      </p:sp>
+      <p:sp>
+        <p:nvSpPr>
+          <p:cNvPr id="25" name="TextBox 24"/>
+          <p:cNvSpPr txBox="1"/>
+          <p:nvPr/>
+        </p:nvSpPr>
+        <p:spPr>
+          <a:xfrm>
+            <a:off x="2441448" y="4773168"/>
+            <a:ext cx="3227832" cy="310896"/>
+          </a:xfrm>
+          <a:prstGeom prst="rect">
+            <a:avLst/>
+          </a:prstGeom>
+          <a:noFill/>
+        </p:spPr>
+        <p:txBody>
+          <a:bodyPr wrap="square" lIns="0" rIns="0" tIns="0" bIns="0" anchor="t">
+            <a:noAutofit/>
+          </a:bodyPr>
+          <a:lstStyle/>
+          <a:p>
+            <a:pPr algn="l"/>
+            <a:r>
+              <a:rPr sz="1250" b="0">
+                <a:solidFill>
+                  <a:srgbClr val="18212B"/>
+                </a:solidFill>
+                <a:latin typeface="Malgun Gothic"/>
+              </a:rPr>
+              <a:t>pytest</a:t>
+            </a:r>
+          </a:p>
+        </p:txBody>
+      </p:sp>
+      <p:sp>
+        <p:nvSpPr>
+          <p:cNvPr id="26" name="TextBox 25"/>
+          <p:cNvSpPr txBox="1"/>
+          <p:nvPr/>
+        </p:nvSpPr>
+        <p:spPr>
+          <a:xfrm>
+            <a:off x="914400" y="5230368"/>
+            <a:ext cx="1417320" cy="274320"/>
+          </a:xfrm>
+          <a:prstGeom prst="rect">
+            <a:avLst/>
+          </a:prstGeom>
+          <a:noFill/>
+        </p:spPr>
+        <p:txBody>
+          <a:bodyPr wrap="square" lIns="0" rIns="0" tIns="0" bIns="0" anchor="t">
+            <a:noAutofit/>
+          </a:bodyPr>
+          <a:lstStyle/>
+          <a:p>
+            <a:pPr algn="l"/>
+            <a:r>
+              <a:rPr sz="1250" b="1">
+                <a:solidFill>
+                  <a:srgbClr val="52565B"/>
+                </a:solidFill>
+                <a:latin typeface="Malgun Gothic"/>
+              </a:rPr>
+              <a:t>Environment</a:t>
+            </a:r>
+          </a:p>
+        </p:txBody>
+      </p:sp>
+      <p:sp>
+        <p:nvSpPr>
+          <p:cNvPr id="27" name="TextBox 26"/>
+          <p:cNvSpPr txBox="1"/>
+          <p:nvPr/>
+        </p:nvSpPr>
+        <p:spPr>
+          <a:xfrm>
+            <a:off x="2441448" y="5230368"/>
+            <a:ext cx="3227832" cy="310896"/>
+          </a:xfrm>
+          <a:prstGeom prst="rect">
+            <a:avLst/>
+          </a:prstGeom>
+          <a:noFill/>
+        </p:spPr>
+        <p:txBody>
+          <a:bodyPr wrap="square" lIns="0" rIns="0" tIns="0" bIns="0" anchor="t">
+            <a:noAutofit/>
+          </a:bodyPr>
+          <a:lstStyle/>
+          <a:p>
+            <a:pPr algn="l"/>
+            <a:r>
+              <a:rPr sz="1250" b="0">
+                <a:solidFill>
+                  <a:srgbClr val="18212B"/>
+                </a:solidFill>
+                <a:latin typeface="Malgun Gothic"/>
+              </a:rPr>
+              <a:t>micromamba, Docker Compose or systemd</a:t>
+            </a:r>
+          </a:p>
+        </p:txBody>
+      </p:sp>
+      <p:sp>
+        <p:nvSpPr>
+          <p:cNvPr id="28" name="Rounded Rectangle 27"/>
+          <p:cNvSpPr/>
+          <p:nvPr/>
+        </p:nvSpPr>
+        <p:spPr>
+          <a:xfrm>
+            <a:off x="6245352" y="1463040"/>
+            <a:ext cx="5294376" cy="4315968"/>
           </a:xfrm>
           <a:prstGeom prst="roundRect">
             <a:avLst/>
@@ -6674,14 +7073,14 @@
       </p:sp>
       <p:sp>
         <p:nvSpPr>
-          <p:cNvPr id="16" name="Rectangle 15"/>
+          <p:cNvPr id="29" name="Rectangle 28"/>
           <p:cNvSpPr/>
           <p:nvPr/>
         </p:nvSpPr>
         <p:spPr>
           <a:xfrm>
-            <a:off x="4334255" y="4983480"/>
-            <a:ext cx="82296" cy="914400"/>
+            <a:off x="6245352" y="1463040"/>
+            <a:ext cx="5294376" cy="457200"/>
           </a:xfrm>
           <a:prstGeom prst="rect">
             <a:avLst/>
@@ -6719,14 +7118,14 @@
       </p:sp>
       <p:sp>
         <p:nvSpPr>
-          <p:cNvPr id="17" name="TextBox 16"/>
+          <p:cNvPr id="30" name="TextBox 29"/>
           <p:cNvSpPr txBox="1"/>
           <p:nvPr/>
         </p:nvSpPr>
         <p:spPr>
           <a:xfrm>
-            <a:off x="4590288" y="5138928"/>
-            <a:ext cx="3017520" cy="274320"/>
+            <a:off x="6501384" y="1572768"/>
+            <a:ext cx="4782312" cy="274320"/>
           </a:xfrm>
           <a:prstGeom prst="rect">
             <a:avLst/>
@@ -6741,27 +7140,72 @@
           <a:p>
             <a:pPr algn="l"/>
             <a:r>
-              <a:rPr sz="1400" b="1">
-                <a:solidFill>
-                  <a:srgbClr val="176B87"/>
-                </a:solidFill>
-                <a:latin typeface="Malgun Gothic"/>
-              </a:rPr>
-              <a:t>One build ID</a:t>
-            </a:r>
-          </a:p>
-        </p:txBody>
-      </p:sp>
-      <p:sp>
-        <p:nvSpPr>
-          <p:cNvPr id="18" name="TextBox 17"/>
+              <a:rPr sz="1600" b="1">
+                <a:solidFill>
+                  <a:srgbClr val="FFFFFF"/>
+                </a:solidFill>
+                <a:latin typeface="Malgun Gothic"/>
+              </a:rPr>
+              <a:t>EnzymeX, existing</a:t>
+            </a:r>
+          </a:p>
+        </p:txBody>
+      </p:sp>
+      <p:sp>
+        <p:nvSpPr>
+          <p:cNvPr id="31" name="Rectangle 30"/>
+          <p:cNvSpPr/>
+          <p:nvPr/>
+        </p:nvSpPr>
+        <p:spPr>
+          <a:xfrm>
+            <a:off x="6263640" y="1975104"/>
+            <a:ext cx="5257800" cy="420624"/>
+          </a:xfrm>
+          <a:prstGeom prst="rect">
+            <a:avLst/>
+          </a:prstGeom>
+          <a:solidFill>
+            <a:srgbClr val="EAF4F7"/>
+          </a:solidFill>
+          <a:ln>
+            <a:solidFill>
+              <a:srgbClr val="EAF4F7"/>
+            </a:solidFill>
+          </a:ln>
+        </p:spPr>
+        <p:style>
+          <a:lnRef idx="1">
+            <a:schemeClr val="accent1"/>
+          </a:lnRef>
+          <a:fillRef idx="3">
+            <a:schemeClr val="accent1"/>
+          </a:fillRef>
+          <a:effectRef idx="2">
+            <a:schemeClr val="accent1"/>
+          </a:effectRef>
+          <a:fontRef idx="minor">
+            <a:schemeClr val="lt1"/>
+          </a:fontRef>
+        </p:style>
+        <p:txBody>
+          <a:bodyPr rtlCol="0" anchor="ctr"/>
+          <a:lstStyle/>
+          <a:p>
+            <a:pPr algn="ctr"/>
+          </a:p>
+        </p:txBody>
+      </p:sp>
+      <p:sp>
+        <p:nvSpPr>
+          <p:cNvPr id="32" name="TextBox 31"/>
           <p:cNvSpPr txBox="1"/>
           <p:nvPr/>
         </p:nvSpPr>
         <p:spPr>
           <a:xfrm>
-            <a:off x="4590288" y="5458968"/>
-            <a:ext cx="3017520" cy="274320"/>
+            <a:off x="6501384" y="2029968"/>
+            <a:ext cx="1417320" cy="274320"/>
           </a:xfrm>
           <a:prstGeom prst="rect">
             <a:avLst/>
@@ -6776,33 +7220,693 @@
           <a:p>
             <a:pPr algn="l"/>
             <a:r>
-              <a:rPr sz="1200" b="0">
+              <a:rPr sz="1250" b="1">
                 <a:solidFill>
                   <a:srgbClr val="52565B"/>
                 </a:solidFill>
                 <a:latin typeface="Malgun Gothic"/>
               </a:rPr>
-              <a:t>hit and EC label from one snapshot</a:t>
-            </a:r>
-          </a:p>
-        </p:txBody>
-      </p:sp>
-      <p:sp>
-        <p:nvSpPr>
-          <p:cNvPr id="19" name="Rounded Rectangle 18"/>
+              <a:t>Language</a:t>
+            </a:r>
+          </a:p>
+        </p:txBody>
+      </p:sp>
+      <p:sp>
+        <p:nvSpPr>
+          <p:cNvPr id="33" name="TextBox 32"/>
+          <p:cNvSpPr txBox="1"/>
+          <p:nvPr/>
+        </p:nvSpPr>
+        <p:spPr>
+          <a:xfrm>
+            <a:off x="8028431" y="2029968"/>
+            <a:ext cx="3236976" cy="310896"/>
+          </a:xfrm>
+          <a:prstGeom prst="rect">
+            <a:avLst/>
+          </a:prstGeom>
+          <a:noFill/>
+        </p:spPr>
+        <p:txBody>
+          <a:bodyPr wrap="square" lIns="0" rIns="0" tIns="0" bIns="0" anchor="t">
+            <a:noAutofit/>
+          </a:bodyPr>
+          <a:lstStyle/>
+          <a:p>
+            <a:pPr algn="l"/>
+            <a:r>
+              <a:rPr sz="1250" b="0">
+                <a:solidFill>
+                  <a:srgbClr val="18212B"/>
+                </a:solidFill>
+                <a:latin typeface="Malgun Gothic"/>
+              </a:rPr>
+              <a:t>Python</a:t>
+            </a:r>
+          </a:p>
+        </p:txBody>
+      </p:sp>
+      <p:sp>
+        <p:nvSpPr>
+          <p:cNvPr id="34" name="TextBox 33"/>
+          <p:cNvSpPr txBox="1"/>
+          <p:nvPr/>
+        </p:nvSpPr>
+        <p:spPr>
+          <a:xfrm>
+            <a:off x="6501384" y="2487168"/>
+            <a:ext cx="1417320" cy="274320"/>
+          </a:xfrm>
+          <a:prstGeom prst="rect">
+            <a:avLst/>
+          </a:prstGeom>
+          <a:noFill/>
+        </p:spPr>
+        <p:txBody>
+          <a:bodyPr wrap="square" lIns="0" rIns="0" tIns="0" bIns="0" anchor="t">
+            <a:noAutofit/>
+          </a:bodyPr>
+          <a:lstStyle/>
+          <a:p>
+            <a:pPr algn="l"/>
+            <a:r>
+              <a:rPr sz="1250" b="1">
+                <a:solidFill>
+                  <a:srgbClr val="52565B"/>
+                </a:solidFill>
+                <a:latin typeface="Malgun Gothic"/>
+              </a:rPr>
+              <a:t>Web</a:t>
+            </a:r>
+          </a:p>
+        </p:txBody>
+      </p:sp>
+      <p:sp>
+        <p:nvSpPr>
+          <p:cNvPr id="35" name="TextBox 34"/>
+          <p:cNvSpPr txBox="1"/>
+          <p:nvPr/>
+        </p:nvSpPr>
+        <p:spPr>
+          <a:xfrm>
+            <a:off x="8028431" y="2487168"/>
+            <a:ext cx="3236976" cy="310896"/>
+          </a:xfrm>
+          <a:prstGeom prst="rect">
+            <a:avLst/>
+          </a:prstGeom>
+          <a:noFill/>
+        </p:spPr>
+        <p:txBody>
+          <a:bodyPr wrap="square" lIns="0" rIns="0" tIns="0" bIns="0" anchor="t">
+            <a:noAutofit/>
+          </a:bodyPr>
+          <a:lstStyle/>
+          <a:p>
+            <a:pPr algn="l"/>
+            <a:r>
+              <a:rPr sz="1250" b="0">
+                <a:solidFill>
+                  <a:srgbClr val="18212B"/>
+                </a:solidFill>
+                <a:latin typeface="Malgun Gothic"/>
+              </a:rPr>
+              <a:t>Pyramid, behind uWSGI and nginx</a:t>
+            </a:r>
+          </a:p>
+        </p:txBody>
+      </p:sp>
+      <p:sp>
+        <p:nvSpPr>
+          <p:cNvPr id="36" name="Rectangle 35"/>
           <p:cNvSpPr/>
           <p:nvPr/>
         </p:nvSpPr>
         <p:spPr>
           <a:xfrm>
-            <a:off x="8010144" y="4983480"/>
-            <a:ext cx="3474720" cy="914400"/>
+            <a:off x="6263640" y="2889504"/>
+            <a:ext cx="5257800" cy="420624"/>
+          </a:xfrm>
+          <a:prstGeom prst="rect">
+            <a:avLst/>
+          </a:prstGeom>
+          <a:solidFill>
+            <a:srgbClr val="EAF4F7"/>
+          </a:solidFill>
+          <a:ln>
+            <a:solidFill>
+              <a:srgbClr val="EAF4F7"/>
+            </a:solidFill>
+          </a:ln>
+        </p:spPr>
+        <p:style>
+          <a:lnRef idx="1">
+            <a:schemeClr val="accent1"/>
+          </a:lnRef>
+          <a:fillRef idx="3">
+            <a:schemeClr val="accent1"/>
+          </a:fillRef>
+          <a:effectRef idx="2">
+            <a:schemeClr val="accent1"/>
+          </a:effectRef>
+          <a:fontRef idx="minor">
+            <a:schemeClr val="lt1"/>
+          </a:fontRef>
+        </p:style>
+        <p:txBody>
+          <a:bodyPr rtlCol="0" anchor="ctr"/>
+          <a:lstStyle/>
+          <a:p>
+            <a:pPr algn="ctr"/>
+          </a:p>
+        </p:txBody>
+      </p:sp>
+      <p:sp>
+        <p:nvSpPr>
+          <p:cNvPr id="37" name="TextBox 36"/>
+          <p:cNvSpPr txBox="1"/>
+          <p:nvPr/>
+        </p:nvSpPr>
+        <p:spPr>
+          <a:xfrm>
+            <a:off x="6501384" y="2944368"/>
+            <a:ext cx="1417320" cy="274320"/>
+          </a:xfrm>
+          <a:prstGeom prst="rect">
+            <a:avLst/>
+          </a:prstGeom>
+          <a:noFill/>
+        </p:spPr>
+        <p:txBody>
+          <a:bodyPr wrap="square" lIns="0" rIns="0" tIns="0" bIns="0" anchor="t">
+            <a:noAutofit/>
+          </a:bodyPr>
+          <a:lstStyle/>
+          <a:p>
+            <a:pPr algn="l"/>
+            <a:r>
+              <a:rPr sz="1250" b="1">
+                <a:solidFill>
+                  <a:srgbClr val="52565B"/>
+                </a:solidFill>
+                <a:latin typeface="Malgun Gothic"/>
+              </a:rPr>
+              <a:t>Templates</a:t>
+            </a:r>
+          </a:p>
+        </p:txBody>
+      </p:sp>
+      <p:sp>
+        <p:nvSpPr>
+          <p:cNvPr id="38" name="TextBox 37"/>
+          <p:cNvSpPr txBox="1"/>
+          <p:nvPr/>
+        </p:nvSpPr>
+        <p:spPr>
+          <a:xfrm>
+            <a:off x="8028431" y="2944368"/>
+            <a:ext cx="3236976" cy="310896"/>
+          </a:xfrm>
+          <a:prstGeom prst="rect">
+            <a:avLst/>
+          </a:prstGeom>
+          <a:noFill/>
+        </p:spPr>
+        <p:txBody>
+          <a:bodyPr wrap="square" lIns="0" rIns="0" tIns="0" bIns="0" anchor="t">
+            <a:noAutofit/>
+          </a:bodyPr>
+          <a:lstStyle/>
+          <a:p>
+            <a:pPr algn="l"/>
+            <a:r>
+              <a:rPr sz="1250" b="0">
+                <a:solidFill>
+                  <a:srgbClr val="18212B"/>
+                </a:solidFill>
+                <a:latin typeface="Malgun Gothic"/>
+              </a:rPr>
+              <a:t>Jinja2</a:t>
+            </a:r>
+          </a:p>
+        </p:txBody>
+      </p:sp>
+      <p:sp>
+        <p:nvSpPr>
+          <p:cNvPr id="39" name="TextBox 38"/>
+          <p:cNvSpPr txBox="1"/>
+          <p:nvPr/>
+        </p:nvSpPr>
+        <p:spPr>
+          <a:xfrm>
+            <a:off x="6501384" y="3401568"/>
+            <a:ext cx="1417320" cy="274320"/>
+          </a:xfrm>
+          <a:prstGeom prst="rect">
+            <a:avLst/>
+          </a:prstGeom>
+          <a:noFill/>
+        </p:spPr>
+        <p:txBody>
+          <a:bodyPr wrap="square" lIns="0" rIns="0" tIns="0" bIns="0" anchor="t">
+            <a:noAutofit/>
+          </a:bodyPr>
+          <a:lstStyle/>
+          <a:p>
+            <a:pPr algn="l"/>
+            <a:r>
+              <a:rPr sz="1250" b="1">
+                <a:solidFill>
+                  <a:srgbClr val="52565B"/>
+                </a:solidFill>
+                <a:latin typeface="Malgun Gothic"/>
+              </a:rPr>
+              <a:t>Database</a:t>
+            </a:r>
+          </a:p>
+        </p:txBody>
+      </p:sp>
+      <p:sp>
+        <p:nvSpPr>
+          <p:cNvPr id="40" name="TextBox 39"/>
+          <p:cNvSpPr txBox="1"/>
+          <p:nvPr/>
+        </p:nvSpPr>
+        <p:spPr>
+          <a:xfrm>
+            <a:off x="8028431" y="3401568"/>
+            <a:ext cx="3236976" cy="310896"/>
+          </a:xfrm>
+          <a:prstGeom prst="rect">
+            <a:avLst/>
+          </a:prstGeom>
+          <a:noFill/>
+        </p:spPr>
+        <p:txBody>
+          <a:bodyPr wrap="square" lIns="0" rIns="0" tIns="0" bIns="0" anchor="t">
+            <a:noAutofit/>
+          </a:bodyPr>
+          <a:lstStyle/>
+          <a:p>
+            <a:pPr algn="l"/>
+            <a:r>
+              <a:rPr sz="1250" b="0">
+                <a:solidFill>
+                  <a:srgbClr val="18212B"/>
+                </a:solidFill>
+                <a:latin typeface="Malgun Gothic"/>
+              </a:rPr>
+              <a:t>MySQL</a:t>
+            </a:r>
+          </a:p>
+        </p:txBody>
+      </p:sp>
+      <p:sp>
+        <p:nvSpPr>
+          <p:cNvPr id="41" name="Rectangle 40"/>
+          <p:cNvSpPr/>
+          <p:nvPr/>
+        </p:nvSpPr>
+        <p:spPr>
+          <a:xfrm>
+            <a:off x="6263640" y="3803904"/>
+            <a:ext cx="5257800" cy="420624"/>
+          </a:xfrm>
+          <a:prstGeom prst="rect">
+            <a:avLst/>
+          </a:prstGeom>
+          <a:solidFill>
+            <a:srgbClr val="EAF4F7"/>
+          </a:solidFill>
+          <a:ln>
+            <a:solidFill>
+              <a:srgbClr val="EAF4F7"/>
+            </a:solidFill>
+          </a:ln>
+        </p:spPr>
+        <p:style>
+          <a:lnRef idx="1">
+            <a:schemeClr val="accent1"/>
+          </a:lnRef>
+          <a:fillRef idx="3">
+            <a:schemeClr val="accent1"/>
+          </a:fillRef>
+          <a:effectRef idx="2">
+            <a:schemeClr val="accent1"/>
+          </a:effectRef>
+          <a:fontRef idx="minor">
+            <a:schemeClr val="lt1"/>
+          </a:fontRef>
+        </p:style>
+        <p:txBody>
+          <a:bodyPr rtlCol="0" anchor="ctr"/>
+          <a:lstStyle/>
+          <a:p>
+            <a:pPr algn="ctr"/>
+          </a:p>
+        </p:txBody>
+      </p:sp>
+      <p:sp>
+        <p:nvSpPr>
+          <p:cNvPr id="42" name="TextBox 41"/>
+          <p:cNvSpPr txBox="1"/>
+          <p:nvPr/>
+        </p:nvSpPr>
+        <p:spPr>
+          <a:xfrm>
+            <a:off x="6501384" y="3858768"/>
+            <a:ext cx="1417320" cy="274320"/>
+          </a:xfrm>
+          <a:prstGeom prst="rect">
+            <a:avLst/>
+          </a:prstGeom>
+          <a:noFill/>
+        </p:spPr>
+        <p:txBody>
+          <a:bodyPr wrap="square" lIns="0" rIns="0" tIns="0" bIns="0" anchor="t">
+            <a:noAutofit/>
+          </a:bodyPr>
+          <a:lstStyle/>
+          <a:p>
+            <a:pPr algn="l"/>
+            <a:r>
+              <a:rPr sz="1250" b="1">
+                <a:solidFill>
+                  <a:srgbClr val="52565B"/>
+                </a:solidFill>
+                <a:latin typeface="Malgun Gothic"/>
+              </a:rPr>
+              <a:t>Models</a:t>
+            </a:r>
+          </a:p>
+        </p:txBody>
+      </p:sp>
+      <p:sp>
+        <p:nvSpPr>
+          <p:cNvPr id="43" name="TextBox 42"/>
+          <p:cNvSpPr txBox="1"/>
+          <p:nvPr/>
+        </p:nvSpPr>
+        <p:spPr>
+          <a:xfrm>
+            <a:off x="8028431" y="3858768"/>
+            <a:ext cx="3236976" cy="310896"/>
+          </a:xfrm>
+          <a:prstGeom prst="rect">
+            <a:avLst/>
+          </a:prstGeom>
+          <a:noFill/>
+        </p:spPr>
+        <p:txBody>
+          <a:bodyPr wrap="square" lIns="0" rIns="0" tIns="0" bIns="0" anchor="t">
+            <a:noAutofit/>
+          </a:bodyPr>
+          <a:lstStyle/>
+          <a:p>
+            <a:pPr algn="l"/>
+            <a:r>
+              <a:rPr sz="1250" b="0">
+                <a:solidFill>
+                  <a:srgbClr val="18212B"/>
+                </a:solidFill>
+                <a:latin typeface="Malgun Gothic"/>
+              </a:rPr>
+              <a:t>ECPICK, HIT-EC, CLEAN</a:t>
+            </a:r>
+          </a:p>
+        </p:txBody>
+      </p:sp>
+      <p:sp>
+        <p:nvSpPr>
+          <p:cNvPr id="44" name="TextBox 43"/>
+          <p:cNvSpPr txBox="1"/>
+          <p:nvPr/>
+        </p:nvSpPr>
+        <p:spPr>
+          <a:xfrm>
+            <a:off x="6501384" y="4315968"/>
+            <a:ext cx="1417320" cy="274320"/>
+          </a:xfrm>
+          <a:prstGeom prst="rect">
+            <a:avLst/>
+          </a:prstGeom>
+          <a:noFill/>
+        </p:spPr>
+        <p:txBody>
+          <a:bodyPr wrap="square" lIns="0" rIns="0" tIns="0" bIns="0" anchor="t">
+            <a:noAutofit/>
+          </a:bodyPr>
+          <a:lstStyle/>
+          <a:p>
+            <a:pPr algn="l"/>
+            <a:r>
+              <a:rPr sz="1250" b="1">
+                <a:solidFill>
+                  <a:srgbClr val="52565B"/>
+                </a:solidFill>
+                <a:latin typeface="Malgun Gothic"/>
+              </a:rPr>
+              <a:t>Similarity</a:t>
+            </a:r>
+          </a:p>
+        </p:txBody>
+      </p:sp>
+      <p:sp>
+        <p:nvSpPr>
+          <p:cNvPr id="45" name="TextBox 44"/>
+          <p:cNvSpPr txBox="1"/>
+          <p:nvPr/>
+        </p:nvSpPr>
+        <p:spPr>
+          <a:xfrm>
+            <a:off x="8028431" y="4315968"/>
+            <a:ext cx="3236976" cy="310896"/>
+          </a:xfrm>
+          <a:prstGeom prst="rect">
+            <a:avLst/>
+          </a:prstGeom>
+          <a:noFill/>
+        </p:spPr>
+        <p:txBody>
+          <a:bodyPr wrap="square" lIns="0" rIns="0" tIns="0" bIns="0" anchor="t">
+            <a:noAutofit/>
+          </a:bodyPr>
+          <a:lstStyle/>
+          <a:p>
+            <a:pPr algn="l"/>
+            <a:r>
+              <a:rPr sz="1250" b="0">
+                <a:solidFill>
+                  <a:srgbClr val="18212B"/>
+                </a:solidFill>
+                <a:latin typeface="Malgun Gothic"/>
+              </a:rPr>
+              <a:t>DIAMOND, Clustal Omega</a:t>
+            </a:r>
+          </a:p>
+        </p:txBody>
+      </p:sp>
+      <p:sp>
+        <p:nvSpPr>
+          <p:cNvPr id="46" name="Rectangle 45"/>
+          <p:cNvSpPr/>
+          <p:nvPr/>
+        </p:nvSpPr>
+        <p:spPr>
+          <a:xfrm>
+            <a:off x="6263640" y="4718304"/>
+            <a:ext cx="5257800" cy="420624"/>
+          </a:xfrm>
+          <a:prstGeom prst="rect">
+            <a:avLst/>
+          </a:prstGeom>
+          <a:solidFill>
+            <a:srgbClr val="EAF4F7"/>
+          </a:solidFill>
+          <a:ln>
+            <a:solidFill>
+              <a:srgbClr val="EAF4F7"/>
+            </a:solidFill>
+          </a:ln>
+        </p:spPr>
+        <p:style>
+          <a:lnRef idx="1">
+            <a:schemeClr val="accent1"/>
+          </a:lnRef>
+          <a:fillRef idx="3">
+            <a:schemeClr val="accent1"/>
+          </a:fillRef>
+          <a:effectRef idx="2">
+            <a:schemeClr val="accent1"/>
+          </a:effectRef>
+          <a:fontRef idx="minor">
+            <a:schemeClr val="lt1"/>
+          </a:fontRef>
+        </p:style>
+        <p:txBody>
+          <a:bodyPr rtlCol="0" anchor="ctr"/>
+          <a:lstStyle/>
+          <a:p>
+            <a:pPr algn="ctr"/>
+          </a:p>
+        </p:txBody>
+      </p:sp>
+      <p:sp>
+        <p:nvSpPr>
+          <p:cNvPr id="47" name="TextBox 46"/>
+          <p:cNvSpPr txBox="1"/>
+          <p:nvPr/>
+        </p:nvSpPr>
+        <p:spPr>
+          <a:xfrm>
+            <a:off x="6501384" y="4773168"/>
+            <a:ext cx="1417320" cy="274320"/>
+          </a:xfrm>
+          <a:prstGeom prst="rect">
+            <a:avLst/>
+          </a:prstGeom>
+          <a:noFill/>
+        </p:spPr>
+        <p:txBody>
+          <a:bodyPr wrap="square" lIns="0" rIns="0" tIns="0" bIns="0" anchor="t">
+            <a:noAutofit/>
+          </a:bodyPr>
+          <a:lstStyle/>
+          <a:p>
+            <a:pPr algn="l"/>
+            <a:r>
+              <a:rPr sz="1250" b="1">
+                <a:solidFill>
+                  <a:srgbClr val="52565B"/>
+                </a:solidFill>
+                <a:latin typeface="Malgun Gothic"/>
+              </a:rPr>
+              <a:t>Jobs</a:t>
+            </a:r>
+          </a:p>
+        </p:txBody>
+      </p:sp>
+      <p:sp>
+        <p:nvSpPr>
+          <p:cNvPr id="48" name="TextBox 47"/>
+          <p:cNvSpPr txBox="1"/>
+          <p:nvPr/>
+        </p:nvSpPr>
+        <p:spPr>
+          <a:xfrm>
+            <a:off x="8028431" y="4773168"/>
+            <a:ext cx="3236976" cy="310896"/>
+          </a:xfrm>
+          <a:prstGeom prst="rect">
+            <a:avLst/>
+          </a:prstGeom>
+          <a:noFill/>
+        </p:spPr>
+        <p:txBody>
+          <a:bodyPr wrap="square" lIns="0" rIns="0" tIns="0" bIns="0" anchor="t">
+            <a:noAutofit/>
+          </a:bodyPr>
+          <a:lstStyle/>
+          <a:p>
+            <a:pPr algn="l"/>
+            <a:r>
+              <a:rPr sz="1250" b="0">
+                <a:solidFill>
+                  <a:srgbClr val="18212B"/>
+                </a:solidFill>
+                <a:latin typeface="Malgun Gothic"/>
+              </a:rPr>
+              <a:t>scheduler with a runner table</a:t>
+            </a:r>
+          </a:p>
+        </p:txBody>
+      </p:sp>
+      <p:sp>
+        <p:nvSpPr>
+          <p:cNvPr id="49" name="TextBox 48"/>
+          <p:cNvSpPr txBox="1"/>
+          <p:nvPr/>
+        </p:nvSpPr>
+        <p:spPr>
+          <a:xfrm>
+            <a:off x="6501384" y="5230368"/>
+            <a:ext cx="1417320" cy="274320"/>
+          </a:xfrm>
+          <a:prstGeom prst="rect">
+            <a:avLst/>
+          </a:prstGeom>
+          <a:noFill/>
+        </p:spPr>
+        <p:txBody>
+          <a:bodyPr wrap="square" lIns="0" rIns="0" tIns="0" bIns="0" anchor="t">
+            <a:noAutofit/>
+          </a:bodyPr>
+          <a:lstStyle/>
+          <a:p>
+            <a:pPr algn="l"/>
+            <a:r>
+              <a:rPr sz="1250" b="1">
+                <a:solidFill>
+                  <a:srgbClr val="52565B"/>
+                </a:solidFill>
+                <a:latin typeface="Malgun Gothic"/>
+              </a:rPr>
+              <a:t>Data pulling</a:t>
+            </a:r>
+          </a:p>
+        </p:txBody>
+      </p:sp>
+      <p:sp>
+        <p:nvSpPr>
+          <p:cNvPr id="50" name="TextBox 49"/>
+          <p:cNvSpPr txBox="1"/>
+          <p:nvPr/>
+        </p:nvSpPr>
+        <p:spPr>
+          <a:xfrm>
+            <a:off x="8028431" y="5230368"/>
+            <a:ext cx="3236976" cy="310896"/>
+          </a:xfrm>
+          <a:prstGeom prst="rect">
+            <a:avLst/>
+          </a:prstGeom>
+          <a:noFill/>
+        </p:spPr>
+        <p:txBody>
+          <a:bodyPr wrap="square" lIns="0" rIns="0" tIns="0" bIns="0" anchor="t">
+            <a:noAutofit/>
+          </a:bodyPr>
+          <a:lstStyle/>
+          <a:p>
+            <a:pPr algn="l"/>
+            <a:r>
+              <a:rPr sz="1250" b="0">
+                <a:solidFill>
+                  <a:srgbClr val="18212B"/>
+                </a:solidFill>
+                <a:latin typeface="Malgun Gothic"/>
+              </a:rPr>
+              <a:t>cron, quarterly</a:t>
+            </a:r>
+          </a:p>
+        </p:txBody>
+      </p:sp>
+      <p:sp>
+        <p:nvSpPr>
+          <p:cNvPr id="51" name="Rounded Rectangle 50"/>
+          <p:cNvSpPr/>
+          <p:nvPr/>
+        </p:nvSpPr>
+        <p:spPr>
+          <a:xfrm>
+            <a:off x="658368" y="5806440"/>
+            <a:ext cx="10881360" cy="566928"/>
           </a:xfrm>
           <a:prstGeom prst="roundRect">
             <a:avLst/>
           </a:prstGeom>
           <a:solidFill>
-            <a:srgbClr val="FFFFFF"/>
+            <a:srgbClr val="F5F7FA"/>
           </a:solidFill>
           <a:ln w="12700">
             <a:solidFill>
@@ -6834,59 +7938,14 @@
       </p:sp>
       <p:sp>
         <p:nvSpPr>
-          <p:cNvPr id="20" name="Rectangle 19"/>
-          <p:cNvSpPr/>
-          <p:nvPr/>
-        </p:nvSpPr>
-        <p:spPr>
-          <a:xfrm>
-            <a:off x="8010144" y="4983480"/>
-            <a:ext cx="82296" cy="914400"/>
-          </a:xfrm>
-          <a:prstGeom prst="rect">
-            <a:avLst/>
-          </a:prstGeom>
-          <a:solidFill>
-            <a:srgbClr val="167C5A"/>
-          </a:solidFill>
-          <a:ln>
-            <a:solidFill>
-              <a:srgbClr val="167C5A"/>
-            </a:solidFill>
-          </a:ln>
-        </p:spPr>
-        <p:style>
-          <a:lnRef idx="1">
-            <a:schemeClr val="accent1"/>
-          </a:lnRef>
-          <a:fillRef idx="3">
-            <a:schemeClr val="accent1"/>
-          </a:fillRef>
-          <a:effectRef idx="2">
-            <a:schemeClr val="accent1"/>
-          </a:effectRef>
-          <a:fontRef idx="minor">
-            <a:schemeClr val="lt1"/>
-          </a:fontRef>
-        </p:style>
-        <p:txBody>
-          <a:bodyPr rtlCol="0" anchor="ctr"/>
-          <a:lstStyle/>
-          <a:p>
-            <a:pPr algn="ctr"/>
-          </a:p>
-        </p:txBody>
-      </p:sp>
-      <p:sp>
-        <p:nvSpPr>
-          <p:cNvPr id="21" name="TextBox 20"/>
+          <p:cNvPr id="52" name="TextBox 51"/>
           <p:cNvSpPr txBox="1"/>
           <p:nvPr/>
         </p:nvSpPr>
         <p:spPr>
           <a:xfrm>
-            <a:off x="8266175" y="5138928"/>
-            <a:ext cx="3017520" cy="274320"/>
+            <a:off x="658368" y="5971032"/>
+            <a:ext cx="10881360" cy="274320"/>
           </a:xfrm>
           <a:prstGeom prst="rect">
             <a:avLst/>
@@ -6899,50 +7958,15 @@
           </a:bodyPr>
           <a:lstStyle/>
           <a:p>
-            <a:pPr algn="l"/>
-            <a:r>
-              <a:rPr sz="1400" b="1">
-                <a:solidFill>
-                  <a:srgbClr val="167C5A"/>
-                </a:solidFill>
-                <a:latin typeface="Malgun Gothic"/>
-              </a:rPr>
-              <a:t>Slow work done once</a:t>
-            </a:r>
-          </a:p>
-        </p:txBody>
-      </p:sp>
-      <p:sp>
-        <p:nvSpPr>
-          <p:cNvPr id="22" name="TextBox 21"/>
-          <p:cNvSpPr txBox="1"/>
-          <p:nvPr/>
-        </p:nvSpPr>
-        <p:spPr>
-          <a:xfrm>
-            <a:off x="8266175" y="5458968"/>
-            <a:ext cx="3017520" cy="274320"/>
-          </a:xfrm>
-          <a:prstGeom prst="rect">
-            <a:avLst/>
-          </a:prstGeom>
-          <a:noFill/>
-        </p:spPr>
-        <p:txBody>
-          <a:bodyPr wrap="square" lIns="0" rIns="0" tIns="0" bIns="0" anchor="t">
-            <a:noAutofit/>
-          </a:bodyPr>
-          <a:lstStyle/>
-          <a:p>
-            <a:pPr algn="l"/>
-            <a:r>
-              <a:rPr sz="1200" b="0">
+            <a:pPr algn="ctr"/>
+            <a:r>
+              <a:rPr sz="1350" b="1">
                 <a:solidFill>
                   <a:srgbClr val="52565B"/>
                 </a:solidFill>
                 <a:latin typeface="Malgun Gothic"/>
               </a:rPr>
-              <a:t>indexing off the request path</a:t>
+              <a:t>Same language, same database engine. The integration point is one function call from the existing scheduler.</a:t>
             </a:r>
           </a:p>
         </p:txBody>
@@ -7040,7 +8064,7 @@
                 </a:solidFill>
                 <a:latin typeface="Malgun Gothic"/>
               </a:rPr>
-              <a:t>Three searches</a:t>
+              <a:t>Build once, search many times</a:t>
             </a:r>
           </a:p>
         </p:txBody>
@@ -7088,8 +8112,385 @@
         </p:nvSpPr>
         <p:spPr>
           <a:xfrm>
-            <a:off x="658368" y="1508760"/>
-            <a:ext cx="3520440" cy="3246120"/>
+            <a:off x="658368" y="1463040"/>
+            <a:ext cx="5285232" cy="3200400"/>
+          </a:xfrm>
+          <a:prstGeom prst="roundRect">
+            <a:avLst/>
+          </a:prstGeom>
+          <a:solidFill>
+            <a:srgbClr val="EAF4F7"/>
+          </a:solidFill>
+          <a:ln w="12700">
+            <a:solidFill>
+              <a:srgbClr val="EAF4F7"/>
+            </a:solidFill>
+          </a:ln>
+        </p:spPr>
+        <p:style>
+          <a:lnRef idx="1">
+            <a:schemeClr val="accent1"/>
+          </a:lnRef>
+          <a:fillRef idx="3">
+            <a:schemeClr val="accent1"/>
+          </a:fillRef>
+          <a:effectRef idx="2">
+            <a:schemeClr val="accent1"/>
+          </a:effectRef>
+          <a:fontRef idx="minor">
+            <a:schemeClr val="lt1"/>
+          </a:fontRef>
+        </p:style>
+        <p:txBody>
+          <a:bodyPr rtlCol="0" anchor="ctr"/>
+          <a:lstStyle/>
+          <a:p>
+            <a:pPr algn="ctr"/>
+          </a:p>
+        </p:txBody>
+      </p:sp>
+      <p:sp>
+        <p:nvSpPr>
+          <p:cNvPr id="6" name="TextBox 5"/>
+          <p:cNvSpPr txBox="1"/>
+          <p:nvPr/>
+        </p:nvSpPr>
+        <p:spPr>
+          <a:xfrm>
+            <a:off x="932688" y="1719072"/>
+            <a:ext cx="4736592" cy="365760"/>
+          </a:xfrm>
+          <a:prstGeom prst="rect">
+            <a:avLst/>
+          </a:prstGeom>
+          <a:noFill/>
+        </p:spPr>
+        <p:txBody>
+          <a:bodyPr wrap="square" lIns="0" rIns="0" tIns="0" bIns="0" anchor="t">
+            <a:noAutofit/>
+          </a:bodyPr>
+          <a:lstStyle/>
+          <a:p>
+            <a:pPr algn="l"/>
+            <a:r>
+              <a:rPr sz="2000" b="1">
+                <a:solidFill>
+                  <a:srgbClr val="176B87"/>
+                </a:solidFill>
+                <a:latin typeface="Malgun Gothic"/>
+              </a:rPr>
+              <a:t>Offline build</a:t>
+            </a:r>
+          </a:p>
+        </p:txBody>
+      </p:sp>
+      <p:sp>
+        <p:nvSpPr>
+          <p:cNvPr id="7" name="TextBox 6"/>
+          <p:cNvSpPr txBox="1"/>
+          <p:nvPr/>
+        </p:nvSpPr>
+        <p:spPr>
+          <a:xfrm>
+            <a:off x="932688" y="2240280"/>
+            <a:ext cx="4736592" cy="2194560"/>
+          </a:xfrm>
+          <a:prstGeom prst="rect">
+            <a:avLst/>
+          </a:prstGeom>
+          <a:noFill/>
+        </p:spPr>
+        <p:txBody>
+          <a:bodyPr wrap="square" lIns="18288" rIns="18288" tIns="18288" bIns="18288">
+            <a:noAutofit/>
+          </a:bodyPr>
+          <a:lstStyle/>
+          <a:p>
+            <a:pPr>
+              <a:lnSpc>
+                <a:spcPct val="105000"/>
+              </a:lnSpc>
+              <a:spcAft>
+                <a:spcPts val="1100"/>
+              </a:spcAft>
+            </a:pPr>
+            <a:r>
+              <a:rPr sz="1500">
+                <a:solidFill>
+                  <a:srgbClr val="18212B"/>
+                </a:solidFill>
+                <a:latin typeface="Malgun Gothic"/>
+              </a:rPr>
+              <a:t>•  The only step that opens the database</a:t>
+            </a:r>
+          </a:p>
+          <a:p>
+            <a:pPr>
+              <a:lnSpc>
+                <a:spcPct val="105000"/>
+              </a:lnSpc>
+              <a:spcAft>
+                <a:spcPts val="1100"/>
+              </a:spcAft>
+            </a:pPr>
+            <a:r>
+              <a:rPr sz="1500">
+                <a:solidFill>
+                  <a:srgbClr val="18212B"/>
+                </a:solidFill>
+                <a:latin typeface="Malgun Gothic"/>
+              </a:rPr>
+              <a:t>•  Filters, deduplicates, writes FASTA</a:t>
+            </a:r>
+          </a:p>
+          <a:p>
+            <a:pPr>
+              <a:lnSpc>
+                <a:spcPct val="105000"/>
+              </a:lnSpc>
+              <a:spcAft>
+                <a:spcPts val="1100"/>
+              </a:spcAft>
+            </a:pPr>
+            <a:r>
+              <a:rPr sz="1500">
+                <a:solidFill>
+                  <a:srgbClr val="18212B"/>
+                </a:solidFill>
+                <a:latin typeface="Malgun Gothic"/>
+              </a:rPr>
+              <a:t>•  Builds the BLAST index and the profiles</a:t>
+            </a:r>
+          </a:p>
+          <a:p>
+            <a:pPr>
+              <a:lnSpc>
+                <a:spcPct val="105000"/>
+              </a:lnSpc>
+              <a:spcAft>
+                <a:spcPts val="1100"/>
+              </a:spcAft>
+            </a:pPr>
+            <a:r>
+              <a:rPr sz="1500">
+                <a:solidFill>
+                  <a:srgbClr val="18212B"/>
+                </a:solidFill>
+                <a:latin typeface="Malgun Gothic"/>
+              </a:rPr>
+              <a:t>•  One build ID on every artifact</a:t>
+            </a:r>
+          </a:p>
+          <a:p>
+            <a:pPr>
+              <a:lnSpc>
+                <a:spcPct val="105000"/>
+              </a:lnSpc>
+              <a:spcAft>
+                <a:spcPts val="1100"/>
+              </a:spcAft>
+            </a:pPr>
+            <a:r>
+              <a:rPr sz="1500">
+                <a:solidFill>
+                  <a:srgbClr val="18212B"/>
+                </a:solidFill>
+                <a:latin typeface="Malgun Gothic"/>
+              </a:rPr>
+              <a:t>•  Minutes, on a schedule</a:t>
+            </a:r>
+          </a:p>
+        </p:txBody>
+      </p:sp>
+      <p:sp>
+        <p:nvSpPr>
+          <p:cNvPr id="8" name="Rounded Rectangle 7"/>
+          <p:cNvSpPr/>
+          <p:nvPr/>
+        </p:nvSpPr>
+        <p:spPr>
+          <a:xfrm>
+            <a:off x="6245352" y="1463040"/>
+            <a:ext cx="5294376" cy="3200400"/>
+          </a:xfrm>
+          <a:prstGeom prst="roundRect">
+            <a:avLst/>
+          </a:prstGeom>
+          <a:solidFill>
+            <a:srgbClr val="EAF6F1"/>
+          </a:solidFill>
+          <a:ln w="12700">
+            <a:solidFill>
+              <a:srgbClr val="EAF6F1"/>
+            </a:solidFill>
+          </a:ln>
+        </p:spPr>
+        <p:style>
+          <a:lnRef idx="1">
+            <a:schemeClr val="accent1"/>
+          </a:lnRef>
+          <a:fillRef idx="3">
+            <a:schemeClr val="accent1"/>
+          </a:fillRef>
+          <a:effectRef idx="2">
+            <a:schemeClr val="accent1"/>
+          </a:effectRef>
+          <a:fontRef idx="minor">
+            <a:schemeClr val="lt1"/>
+          </a:fontRef>
+        </p:style>
+        <p:txBody>
+          <a:bodyPr rtlCol="0" anchor="ctr"/>
+          <a:lstStyle/>
+          <a:p>
+            <a:pPr algn="ctr"/>
+          </a:p>
+        </p:txBody>
+      </p:sp>
+      <p:sp>
+        <p:nvSpPr>
+          <p:cNvPr id="9" name="TextBox 8"/>
+          <p:cNvSpPr txBox="1"/>
+          <p:nvPr/>
+        </p:nvSpPr>
+        <p:spPr>
+          <a:xfrm>
+            <a:off x="6519672" y="1719072"/>
+            <a:ext cx="4745736" cy="365760"/>
+          </a:xfrm>
+          <a:prstGeom prst="rect">
+            <a:avLst/>
+          </a:prstGeom>
+          <a:noFill/>
+        </p:spPr>
+        <p:txBody>
+          <a:bodyPr wrap="square" lIns="0" rIns="0" tIns="0" bIns="0" anchor="t">
+            <a:noAutofit/>
+          </a:bodyPr>
+          <a:lstStyle/>
+          <a:p>
+            <a:pPr algn="l"/>
+            <a:r>
+              <a:rPr sz="2000" b="1">
+                <a:solidFill>
+                  <a:srgbClr val="167C5A"/>
+                </a:solidFill>
+                <a:latin typeface="Malgun Gothic"/>
+              </a:rPr>
+              <a:t>Online search</a:t>
+            </a:r>
+          </a:p>
+        </p:txBody>
+      </p:sp>
+      <p:sp>
+        <p:nvSpPr>
+          <p:cNvPr id="10" name="TextBox 9"/>
+          <p:cNvSpPr txBox="1"/>
+          <p:nvPr/>
+        </p:nvSpPr>
+        <p:spPr>
+          <a:xfrm>
+            <a:off x="6519672" y="2240280"/>
+            <a:ext cx="4745736" cy="2194560"/>
+          </a:xfrm>
+          <a:prstGeom prst="rect">
+            <a:avLst/>
+          </a:prstGeom>
+          <a:noFill/>
+        </p:spPr>
+        <p:txBody>
+          <a:bodyPr wrap="square" lIns="18288" rIns="18288" tIns="18288" bIns="18288">
+            <a:noAutofit/>
+          </a:bodyPr>
+          <a:lstStyle/>
+          <a:p>
+            <a:pPr>
+              <a:lnSpc>
+                <a:spcPct val="105000"/>
+              </a:lnSpc>
+              <a:spcAft>
+                <a:spcPts val="1100"/>
+              </a:spcAft>
+            </a:pPr>
+            <a:r>
+              <a:rPr sz="1500">
+                <a:solidFill>
+                  <a:srgbClr val="18212B"/>
+                </a:solidFill>
+                <a:latin typeface="Malgun Gothic"/>
+              </a:rPr>
+              <a:t>•  Reads the built files only</a:t>
+            </a:r>
+          </a:p>
+          <a:p>
+            <a:pPr>
+              <a:lnSpc>
+                <a:spcPct val="105000"/>
+              </a:lnSpc>
+              <a:spcAft>
+                <a:spcPts val="1100"/>
+              </a:spcAft>
+            </a:pPr>
+            <a:r>
+              <a:rPr sz="1500">
+                <a:solidFill>
+                  <a:srgbClr val="18212B"/>
+                </a:solidFill>
+                <a:latin typeface="Malgun Gothic"/>
+              </a:rPr>
+              <a:t>•  No database connection</a:t>
+            </a:r>
+          </a:p>
+          <a:p>
+            <a:pPr>
+              <a:lnSpc>
+                <a:spcPct val="105000"/>
+              </a:lnSpc>
+              <a:spcAft>
+                <a:spcPts val="1100"/>
+              </a:spcAft>
+            </a:pPr>
+            <a:r>
+              <a:rPr sz="1500">
+                <a:solidFill>
+                  <a:srgbClr val="18212B"/>
+                </a:solidFill>
+                <a:latin typeface="Malgun Gothic"/>
+              </a:rPr>
+              <a:t>•  Metadata from the same build</a:t>
+            </a:r>
+          </a:p>
+          <a:p>
+            <a:pPr>
+              <a:lnSpc>
+                <a:spcPct val="105000"/>
+              </a:lnSpc>
+              <a:spcAft>
+                <a:spcPts val="1100"/>
+              </a:spcAft>
+            </a:pPr>
+            <a:r>
+              <a:rPr sz="1500">
+                <a:solidFill>
+                  <a:srgbClr val="18212B"/>
+                </a:solidFill>
+                <a:latin typeface="Malgun Gothic"/>
+              </a:rPr>
+              <a:t>•  Seconds per query</a:t>
+            </a:r>
+          </a:p>
+        </p:txBody>
+      </p:sp>
+      <p:sp>
+        <p:nvSpPr>
+          <p:cNvPr id="11" name="Rounded Rectangle 10"/>
+          <p:cNvSpPr/>
+          <p:nvPr/>
+        </p:nvSpPr>
+        <p:spPr>
+          <a:xfrm>
+            <a:off x="658368" y="4983480"/>
+            <a:ext cx="3474720" cy="914400"/>
           </a:xfrm>
           <a:prstGeom prst="roundRect">
             <a:avLst/>
@@ -7127,14 +8528,174 @@
       </p:sp>
       <p:sp>
         <p:nvSpPr>
-          <p:cNvPr id="6" name="Rectangle 5"/>
+          <p:cNvPr id="12" name="Rectangle 11"/>
           <p:cNvSpPr/>
           <p:nvPr/>
         </p:nvSpPr>
         <p:spPr>
           <a:xfrm>
-            <a:off x="658368" y="1508760"/>
-            <a:ext cx="3520440" cy="109728"/>
+            <a:off x="658368" y="4983480"/>
+            <a:ext cx="82296" cy="914400"/>
+          </a:xfrm>
+          <a:prstGeom prst="rect">
+            <a:avLst/>
+          </a:prstGeom>
+          <a:solidFill>
+            <a:srgbClr val="B71A1A"/>
+          </a:solidFill>
+          <a:ln>
+            <a:solidFill>
+              <a:srgbClr val="B71A1A"/>
+            </a:solidFill>
+          </a:ln>
+        </p:spPr>
+        <p:style>
+          <a:lnRef idx="1">
+            <a:schemeClr val="accent1"/>
+          </a:lnRef>
+          <a:fillRef idx="3">
+            <a:schemeClr val="accent1"/>
+          </a:fillRef>
+          <a:effectRef idx="2">
+            <a:schemeClr val="accent1"/>
+          </a:effectRef>
+          <a:fontRef idx="minor">
+            <a:schemeClr val="lt1"/>
+          </a:fontRef>
+        </p:style>
+        <p:txBody>
+          <a:bodyPr rtlCol="0" anchor="ctr"/>
+          <a:lstStyle/>
+          <a:p>
+            <a:pPr algn="ctr"/>
+          </a:p>
+        </p:txBody>
+      </p:sp>
+      <p:sp>
+        <p:nvSpPr>
+          <p:cNvPr id="13" name="TextBox 12"/>
+          <p:cNvSpPr txBox="1"/>
+          <p:nvPr/>
+        </p:nvSpPr>
+        <p:spPr>
+          <a:xfrm>
+            <a:off x="914400" y="5138928"/>
+            <a:ext cx="3017520" cy="274320"/>
+          </a:xfrm>
+          <a:prstGeom prst="rect">
+            <a:avLst/>
+          </a:prstGeom>
+          <a:noFill/>
+        </p:spPr>
+        <p:txBody>
+          <a:bodyPr wrap="square" lIns="0" rIns="0" tIns="0" bIns="0" anchor="t">
+            <a:noAutofit/>
+          </a:bodyPr>
+          <a:lstStyle/>
+          <a:p>
+            <a:pPr algn="l"/>
+            <a:r>
+              <a:rPr sz="1400" b="1">
+                <a:solidFill>
+                  <a:srgbClr val="B71A1A"/>
+                </a:solidFill>
+                <a:latin typeface="Malgun Gothic"/>
+              </a:rPr>
+              <a:t>No DB at request time</a:t>
+            </a:r>
+          </a:p>
+        </p:txBody>
+      </p:sp>
+      <p:sp>
+        <p:nvSpPr>
+          <p:cNvPr id="14" name="TextBox 13"/>
+          <p:cNvSpPr txBox="1"/>
+          <p:nvPr/>
+        </p:nvSpPr>
+        <p:spPr>
+          <a:xfrm>
+            <a:off x="914400" y="5458968"/>
+            <a:ext cx="3017520" cy="274320"/>
+          </a:xfrm>
+          <a:prstGeom prst="rect">
+            <a:avLst/>
+          </a:prstGeom>
+          <a:noFill/>
+        </p:spPr>
+        <p:txBody>
+          <a:bodyPr wrap="square" lIns="0" rIns="0" tIns="0" bIns="0" anchor="t">
+            <a:noAutofit/>
+          </a:bodyPr>
+          <a:lstStyle/>
+          <a:p>
+            <a:pPr algn="l"/>
+            <a:r>
+              <a:rPr sz="1200" b="0">
+                <a:solidFill>
+                  <a:srgbClr val="52565B"/>
+                </a:solidFill>
+                <a:latin typeface="Malgun Gothic"/>
+              </a:rPr>
+              <a:t>cannot slow or leak the database</a:t>
+            </a:r>
+          </a:p>
+        </p:txBody>
+      </p:sp>
+      <p:sp>
+        <p:nvSpPr>
+          <p:cNvPr id="15" name="Rounded Rectangle 14"/>
+          <p:cNvSpPr/>
+          <p:nvPr/>
+        </p:nvSpPr>
+        <p:spPr>
+          <a:xfrm>
+            <a:off x="4334255" y="4983480"/>
+            <a:ext cx="3474720" cy="914400"/>
+          </a:xfrm>
+          <a:prstGeom prst="roundRect">
+            <a:avLst/>
+          </a:prstGeom>
+          <a:solidFill>
+            <a:srgbClr val="FFFFFF"/>
+          </a:solidFill>
+          <a:ln w="12700">
+            <a:solidFill>
+              <a:srgbClr val="D9DEE7"/>
+            </a:solidFill>
+          </a:ln>
+        </p:spPr>
+        <p:style>
+          <a:lnRef idx="1">
+            <a:schemeClr val="accent1"/>
+          </a:lnRef>
+          <a:fillRef idx="3">
+            <a:schemeClr val="accent1"/>
+          </a:fillRef>
+          <a:effectRef idx="2">
+            <a:schemeClr val="accent1"/>
+          </a:effectRef>
+          <a:fontRef idx="minor">
+            <a:schemeClr val="lt1"/>
+          </a:fontRef>
+        </p:style>
+        <p:txBody>
+          <a:bodyPr rtlCol="0" anchor="ctr"/>
+          <a:lstStyle/>
+          <a:p>
+            <a:pPr algn="ctr"/>
+          </a:p>
+        </p:txBody>
+      </p:sp>
+      <p:sp>
+        <p:nvSpPr>
+          <p:cNvPr id="16" name="Rectangle 15"/>
+          <p:cNvSpPr/>
+          <p:nvPr/>
+        </p:nvSpPr>
+        <p:spPr>
+          <a:xfrm>
+            <a:off x="4334255" y="4983480"/>
+            <a:ext cx="82296" cy="914400"/>
           </a:xfrm>
           <a:prstGeom prst="rect">
             <a:avLst/>
@@ -7172,14 +8733,14 @@
       </p:sp>
       <p:sp>
         <p:nvSpPr>
-          <p:cNvPr id="7" name="TextBox 6"/>
+          <p:cNvPr id="17" name="TextBox 16"/>
           <p:cNvSpPr txBox="1"/>
           <p:nvPr/>
         </p:nvSpPr>
         <p:spPr>
           <a:xfrm>
-            <a:off x="914400" y="1810512"/>
-            <a:ext cx="3017520" cy="384048"/>
+            <a:off x="4590288" y="5138928"/>
+            <a:ext cx="3017520" cy="274320"/>
           </a:xfrm>
           <a:prstGeom prst="rect">
             <a:avLst/>
@@ -7194,26 +8755,26 @@
           <a:p>
             <a:pPr algn="l"/>
             <a:r>
-              <a:rPr sz="2400" b="1">
+              <a:rPr sz="1400" b="1">
                 <a:solidFill>
                   <a:srgbClr val="176B87"/>
                 </a:solidFill>
                 <a:latin typeface="Malgun Gothic"/>
               </a:rPr>
-              <a:t>blastp</a:t>
-            </a:r>
-          </a:p>
-        </p:txBody>
-      </p:sp>
-      <p:sp>
-        <p:nvSpPr>
-          <p:cNvPr id="8" name="TextBox 7"/>
+              <a:t>One build ID</a:t>
+            </a:r>
+          </a:p>
+        </p:txBody>
+      </p:sp>
+      <p:sp>
+        <p:nvSpPr>
+          <p:cNvPr id="18" name="TextBox 17"/>
           <p:cNvSpPr txBox="1"/>
           <p:nvPr/>
         </p:nvSpPr>
         <p:spPr>
           <a:xfrm>
-            <a:off x="914400" y="2240280"/>
+            <a:off x="4590288" y="5458968"/>
             <a:ext cx="3017520" cy="274320"/>
           </a:xfrm>
           <a:prstGeom prst="rect">
@@ -7229,107 +8790,27 @@
           <a:p>
             <a:pPr algn="l"/>
             <a:r>
-              <a:rPr sz="1250" b="0">
-                <a:solidFill>
-                  <a:srgbClr val="667085"/>
-                </a:solidFill>
-                <a:latin typeface="Malgun Gothic"/>
-              </a:rPr>
-              <a:t>pairwise alignment</a:t>
-            </a:r>
-          </a:p>
-        </p:txBody>
-      </p:sp>
-      <p:sp>
-        <p:nvSpPr>
-          <p:cNvPr id="9" name="TextBox 8"/>
-          <p:cNvSpPr txBox="1"/>
-          <p:nvPr/>
-        </p:nvSpPr>
-        <p:spPr>
-          <a:xfrm>
-            <a:off x="914400" y="2697480"/>
-            <a:ext cx="3017520" cy="1737360"/>
-          </a:xfrm>
-          <a:prstGeom prst="rect">
-            <a:avLst/>
-          </a:prstGeom>
-          <a:noFill/>
-        </p:spPr>
-        <p:txBody>
-          <a:bodyPr wrap="square" lIns="18288" rIns="18288" tIns="18288" bIns="18288">
-            <a:noAutofit/>
-          </a:bodyPr>
-          <a:lstStyle/>
-          <a:p>
-            <a:pPr>
-              <a:lnSpc>
-                <a:spcPct val="105000"/>
-              </a:lnSpc>
-              <a:spcAft>
-                <a:spcPts val="1200"/>
-              </a:spcAft>
-            </a:pPr>
-            <a:r>
-              <a:rPr sz="1400">
-                <a:solidFill>
-                  <a:srgbClr val="18212B"/>
-                </a:solidFill>
-                <a:latin typeface="Malgun Gothic"/>
-              </a:rPr>
-              <a:t>•  Every reference</a:t>
-            </a:r>
-          </a:p>
-          <a:p>
-            <a:pPr>
-              <a:lnSpc>
-                <a:spcPct val="105000"/>
-              </a:lnSpc>
-              <a:spcAft>
-                <a:spcPts val="1200"/>
-              </a:spcAft>
-            </a:pPr>
-            <a:r>
-              <a:rPr sz="1400">
-                <a:solidFill>
-                  <a:srgbClr val="18212B"/>
-                </a:solidFill>
-                <a:latin typeface="Malgun Gothic"/>
-              </a:rPr>
-              <a:t>•  Identity and coverage</a:t>
-            </a:r>
-          </a:p>
-          <a:p>
-            <a:pPr>
-              <a:lnSpc>
-                <a:spcPct val="105000"/>
-              </a:lnSpc>
-              <a:spcAft>
-                <a:spcPts val="1200"/>
-              </a:spcAft>
-            </a:pPr>
-            <a:r>
-              <a:rPr sz="1400">
-                <a:solidFill>
-                  <a:srgbClr val="18212B"/>
-                </a:solidFill>
-                <a:latin typeface="Malgun Gothic"/>
-              </a:rPr>
-              <a:t>•  Default method</a:t>
-            </a:r>
-          </a:p>
-        </p:txBody>
-      </p:sp>
-      <p:sp>
-        <p:nvSpPr>
-          <p:cNvPr id="10" name="Rounded Rectangle 9"/>
+              <a:rPr sz="1200" b="0">
+                <a:solidFill>
+                  <a:srgbClr val="52565B"/>
+                </a:solidFill>
+                <a:latin typeface="Malgun Gothic"/>
+              </a:rPr>
+              <a:t>hit and EC label from one snapshot</a:t>
+            </a:r>
+          </a:p>
+        </p:txBody>
+      </p:sp>
+      <p:sp>
+        <p:nvSpPr>
+          <p:cNvPr id="19" name="Rounded Rectangle 18"/>
           <p:cNvSpPr/>
           <p:nvPr/>
         </p:nvSpPr>
         <p:spPr>
           <a:xfrm>
-            <a:off x="4334256" y="1508760"/>
-            <a:ext cx="3520440" cy="3246120"/>
+            <a:off x="8010144" y="4983480"/>
+            <a:ext cx="3474720" cy="914400"/>
           </a:xfrm>
           <a:prstGeom prst="roundRect">
             <a:avLst/>
@@ -7367,14 +8848,14 @@
       </p:sp>
       <p:sp>
         <p:nvSpPr>
-          <p:cNvPr id="11" name="Rectangle 10"/>
+          <p:cNvPr id="20" name="Rectangle 19"/>
           <p:cNvSpPr/>
           <p:nvPr/>
         </p:nvSpPr>
         <p:spPr>
           <a:xfrm>
-            <a:off x="4334256" y="1508760"/>
-            <a:ext cx="3520440" cy="109728"/>
+            <a:off x="8010144" y="4983480"/>
+            <a:ext cx="82296" cy="914400"/>
           </a:xfrm>
           <a:prstGeom prst="rect">
             <a:avLst/>
@@ -7412,14 +8893,14 @@
       </p:sp>
       <p:sp>
         <p:nvSpPr>
-          <p:cNvPr id="12" name="TextBox 11"/>
+          <p:cNvPr id="21" name="TextBox 20"/>
           <p:cNvSpPr txBox="1"/>
           <p:nvPr/>
         </p:nvSpPr>
         <p:spPr>
           <a:xfrm>
-            <a:off x="4590288" y="1810512"/>
-            <a:ext cx="3017520" cy="384048"/>
+            <a:off x="8266175" y="5138928"/>
+            <a:ext cx="3017520" cy="274320"/>
           </a:xfrm>
           <a:prstGeom prst="rect">
             <a:avLst/>
@@ -7434,26 +8915,26 @@
           <a:p>
             <a:pPr algn="l"/>
             <a:r>
-              <a:rPr sz="2400" b="1">
+              <a:rPr sz="1400" b="1">
                 <a:solidFill>
                   <a:srgbClr val="167C5A"/>
                 </a:solidFill>
                 <a:latin typeface="Malgun Gothic"/>
               </a:rPr>
-              <a:t>phmmer</a:t>
-            </a:r>
-          </a:p>
-        </p:txBody>
-      </p:sp>
-      <p:sp>
-        <p:nvSpPr>
-          <p:cNvPr id="13" name="TextBox 12"/>
+              <a:t>Slow work done once</a:t>
+            </a:r>
+          </a:p>
+        </p:txBody>
+      </p:sp>
+      <p:sp>
+        <p:nvSpPr>
+          <p:cNvPr id="22" name="TextBox 21"/>
           <p:cNvSpPr txBox="1"/>
           <p:nvPr/>
         </p:nvSpPr>
         <p:spPr>
           <a:xfrm>
-            <a:off x="4590288" y="2240280"/>
+            <a:off x="8266175" y="5458968"/>
             <a:ext cx="3017520" cy="274320"/>
           </a:xfrm>
           <a:prstGeom prst="rect">
@@ -7469,448 +8950,13 @@
           <a:p>
             <a:pPr algn="l"/>
             <a:r>
-              <a:rPr sz="1250" b="0">
-                <a:solidFill>
-                  <a:srgbClr val="667085"/>
-                </a:solidFill>
-                <a:latin typeface="Malgun Gothic"/>
-              </a:rPr>
-              <a:t>query profile</a:t>
-            </a:r>
-          </a:p>
-        </p:txBody>
-      </p:sp>
-      <p:sp>
-        <p:nvSpPr>
-          <p:cNvPr id="14" name="TextBox 13"/>
-          <p:cNvSpPr txBox="1"/>
-          <p:nvPr/>
-        </p:nvSpPr>
-        <p:spPr>
-          <a:xfrm>
-            <a:off x="4590288" y="2697480"/>
-            <a:ext cx="3017520" cy="1737360"/>
-          </a:xfrm>
-          <a:prstGeom prst="rect">
-            <a:avLst/>
-          </a:prstGeom>
-          <a:noFill/>
-        </p:spPr>
-        <p:txBody>
-          <a:bodyPr wrap="square" lIns="18288" rIns="18288" tIns="18288" bIns="18288">
-            <a:noAutofit/>
-          </a:bodyPr>
-          <a:lstStyle/>
-          <a:p>
-            <a:pPr>
-              <a:lnSpc>
-                <a:spcPct val="105000"/>
-              </a:lnSpc>
-              <a:spcAft>
-                <a:spcPts val="1200"/>
-              </a:spcAft>
-            </a:pPr>
-            <a:r>
-              <a:rPr sz="1400">
-                <a:solidFill>
-                  <a:srgbClr val="18212B"/>
-                </a:solidFill>
-                <a:latin typeface="Malgun Gothic"/>
-              </a:rPr>
-              <a:t>•  Every reference</a:t>
-            </a:r>
-          </a:p>
-          <a:p>
-            <a:pPr>
-              <a:lnSpc>
-                <a:spcPct val="105000"/>
-              </a:lnSpc>
-              <a:spcAft>
-                <a:spcPts val="1200"/>
-              </a:spcAft>
-            </a:pPr>
-            <a:r>
-              <a:rPr sz="1400">
-                <a:solidFill>
-                  <a:srgbClr val="18212B"/>
-                </a:solidFill>
-                <a:latin typeface="Malgun Gothic"/>
-              </a:rPr>
-              <a:t>•  Different statistics</a:t>
-            </a:r>
-          </a:p>
-          <a:p>
-            <a:pPr>
-              <a:lnSpc>
-                <a:spcPct val="105000"/>
-              </a:lnSpc>
-              <a:spcAft>
-                <a:spcPts val="1200"/>
-              </a:spcAft>
-            </a:pPr>
-            <a:r>
-              <a:rPr sz="1400">
-                <a:solidFill>
-                  <a:srgbClr val="18212B"/>
-                </a:solidFill>
-                <a:latin typeface="Malgun Gothic"/>
-              </a:rPr>
-              <a:t>•  4-5x slower</a:t>
-            </a:r>
-          </a:p>
-        </p:txBody>
-      </p:sp>
-      <p:sp>
-        <p:nvSpPr>
-          <p:cNvPr id="15" name="Rounded Rectangle 14"/>
-          <p:cNvSpPr/>
-          <p:nvPr/>
-        </p:nvSpPr>
-        <p:spPr>
-          <a:xfrm>
-            <a:off x="8010144" y="1508760"/>
-            <a:ext cx="3520440" cy="3246120"/>
-          </a:xfrm>
-          <a:prstGeom prst="roundRect">
-            <a:avLst/>
-          </a:prstGeom>
-          <a:solidFill>
-            <a:srgbClr val="FFFFFF"/>
-          </a:solidFill>
-          <a:ln w="12700">
-            <a:solidFill>
-              <a:srgbClr val="D9DEE7"/>
-            </a:solidFill>
-          </a:ln>
-        </p:spPr>
-        <p:style>
-          <a:lnRef idx="1">
-            <a:schemeClr val="accent1"/>
-          </a:lnRef>
-          <a:fillRef idx="3">
-            <a:schemeClr val="accent1"/>
-          </a:fillRef>
-          <a:effectRef idx="2">
-            <a:schemeClr val="accent1"/>
-          </a:effectRef>
-          <a:fontRef idx="minor">
-            <a:schemeClr val="lt1"/>
-          </a:fontRef>
-        </p:style>
-        <p:txBody>
-          <a:bodyPr rtlCol="0" anchor="ctr"/>
-          <a:lstStyle/>
-          <a:p>
-            <a:pPr algn="ctr"/>
-          </a:p>
-        </p:txBody>
-      </p:sp>
-      <p:sp>
-        <p:nvSpPr>
-          <p:cNvPr id="16" name="Rectangle 15"/>
-          <p:cNvSpPr/>
-          <p:nvPr/>
-        </p:nvSpPr>
-        <p:spPr>
-          <a:xfrm>
-            <a:off x="8010144" y="1508760"/>
-            <a:ext cx="3520440" cy="109728"/>
-          </a:xfrm>
-          <a:prstGeom prst="rect">
-            <a:avLst/>
-          </a:prstGeom>
-          <a:solidFill>
-            <a:srgbClr val="6554A4"/>
-          </a:solidFill>
-          <a:ln>
-            <a:solidFill>
-              <a:srgbClr val="6554A4"/>
-            </a:solidFill>
-          </a:ln>
-        </p:spPr>
-        <p:style>
-          <a:lnRef idx="1">
-            <a:schemeClr val="accent1"/>
-          </a:lnRef>
-          <a:fillRef idx="3">
-            <a:schemeClr val="accent1"/>
-          </a:fillRef>
-          <a:effectRef idx="2">
-            <a:schemeClr val="accent1"/>
-          </a:effectRef>
-          <a:fontRef idx="minor">
-            <a:schemeClr val="lt1"/>
-          </a:fontRef>
-        </p:style>
-        <p:txBody>
-          <a:bodyPr rtlCol="0" anchor="ctr"/>
-          <a:lstStyle/>
-          <a:p>
-            <a:pPr algn="ctr"/>
-          </a:p>
-        </p:txBody>
-      </p:sp>
-      <p:sp>
-        <p:nvSpPr>
-          <p:cNvPr id="17" name="TextBox 16"/>
-          <p:cNvSpPr txBox="1"/>
-          <p:nvPr/>
-        </p:nvSpPr>
-        <p:spPr>
-          <a:xfrm>
-            <a:off x="8266175" y="1810512"/>
-            <a:ext cx="3017520" cy="384048"/>
-          </a:xfrm>
-          <a:prstGeom prst="rect">
-            <a:avLst/>
-          </a:prstGeom>
-          <a:noFill/>
-        </p:spPr>
-        <p:txBody>
-          <a:bodyPr wrap="square" lIns="0" rIns="0" tIns="0" bIns="0" anchor="t">
-            <a:noAutofit/>
-          </a:bodyPr>
-          <a:lstStyle/>
-          <a:p>
-            <a:pPr algn="l"/>
-            <a:r>
-              <a:rPr sz="2400" b="1">
-                <a:solidFill>
-                  <a:srgbClr val="6554A4"/>
-                </a:solidFill>
-                <a:latin typeface="Malgun Gothic"/>
-              </a:rPr>
-              <a:t>hmmscan</a:t>
-            </a:r>
-          </a:p>
-        </p:txBody>
-      </p:sp>
-      <p:sp>
-        <p:nvSpPr>
-          <p:cNvPr id="18" name="TextBox 17"/>
-          <p:cNvSpPr txBox="1"/>
-          <p:nvPr/>
-        </p:nvSpPr>
-        <p:spPr>
-          <a:xfrm>
-            <a:off x="8266175" y="2240280"/>
-            <a:ext cx="3017520" cy="274320"/>
-          </a:xfrm>
-          <a:prstGeom prst="rect">
-            <a:avLst/>
-          </a:prstGeom>
-          <a:noFill/>
-        </p:spPr>
-        <p:txBody>
-          <a:bodyPr wrap="square" lIns="0" rIns="0" tIns="0" bIns="0" anchor="t">
-            <a:noAutofit/>
-          </a:bodyPr>
-          <a:lstStyle/>
-          <a:p>
-            <a:pPr algn="l"/>
-            <a:r>
-              <a:rPr sz="1250" b="0">
-                <a:solidFill>
-                  <a:srgbClr val="667085"/>
-                </a:solidFill>
-                <a:latin typeface="Malgun Gothic"/>
-              </a:rPr>
-              <a:t>family profiles</a:t>
-            </a:r>
-          </a:p>
-        </p:txBody>
-      </p:sp>
-      <p:sp>
-        <p:nvSpPr>
-          <p:cNvPr id="19" name="TextBox 18"/>
-          <p:cNvSpPr txBox="1"/>
-          <p:nvPr/>
-        </p:nvSpPr>
-        <p:spPr>
-          <a:xfrm>
-            <a:off x="8266175" y="2697480"/>
-            <a:ext cx="3017520" cy="1737360"/>
-          </a:xfrm>
-          <a:prstGeom prst="rect">
-            <a:avLst/>
-          </a:prstGeom>
-          <a:noFill/>
-        </p:spPr>
-        <p:txBody>
-          <a:bodyPr wrap="square" lIns="18288" rIns="18288" tIns="18288" bIns="18288">
-            <a:noAutofit/>
-          </a:bodyPr>
-          <a:lstStyle/>
-          <a:p>
-            <a:pPr>
-              <a:lnSpc>
-                <a:spcPct val="105000"/>
-              </a:lnSpc>
-              <a:spcAft>
-                <a:spcPts val="1200"/>
-              </a:spcAft>
-            </a:pPr>
-            <a:r>
-              <a:rPr sz="1400">
-                <a:solidFill>
-                  <a:srgbClr val="18212B"/>
-                </a:solidFill>
-                <a:latin typeface="Malgun Gothic"/>
-              </a:rPr>
-              <a:t>•  QC-passing families only</a:t>
-            </a:r>
-          </a:p>
-          <a:p>
-            <a:pPr>
-              <a:lnSpc>
-                <a:spcPct val="105000"/>
-              </a:lnSpc>
-              <a:spcAft>
-                <a:spcPts val="1200"/>
-              </a:spcAft>
-            </a:pPr>
-            <a:r>
-              <a:rPr sz="1400">
-                <a:solidFill>
-                  <a:srgbClr val="18212B"/>
-                </a:solidFill>
-                <a:latin typeface="Malgun Gothic"/>
-              </a:rPr>
-              <a:t>•  Finds distant relatives</a:t>
-            </a:r>
-          </a:p>
-          <a:p>
-            <a:pPr>
-              <a:lnSpc>
-                <a:spcPct val="105000"/>
-              </a:lnSpc>
-              <a:spcAft>
-                <a:spcPts val="1200"/>
-              </a:spcAft>
-            </a:pPr>
-            <a:r>
-              <a:rPr sz="1400">
-                <a:solidFill>
-                  <a:srgbClr val="18212B"/>
-                </a:solidFill>
-                <a:latin typeface="Malgun Gothic"/>
-              </a:rPr>
-              <a:t>•  Returns a family</a:t>
-            </a:r>
-          </a:p>
-        </p:txBody>
-      </p:sp>
-      <p:sp>
-        <p:nvSpPr>
-          <p:cNvPr id="20" name="Rounded Rectangle 19"/>
-          <p:cNvSpPr/>
-          <p:nvPr/>
-        </p:nvSpPr>
-        <p:spPr>
-          <a:xfrm>
-            <a:off x="658368" y="5029200"/>
-            <a:ext cx="10881360" cy="914400"/>
-          </a:xfrm>
-          <a:prstGeom prst="roundRect">
-            <a:avLst/>
-          </a:prstGeom>
-          <a:solidFill>
-            <a:srgbClr val="FFF5DF"/>
-          </a:solidFill>
-          <a:ln w="12700">
-            <a:solidFill>
-              <a:srgbClr val="FFF5DF"/>
-            </a:solidFill>
-          </a:ln>
-        </p:spPr>
-        <p:style>
-          <a:lnRef idx="1">
-            <a:schemeClr val="accent1"/>
-          </a:lnRef>
-          <a:fillRef idx="3">
-            <a:schemeClr val="accent1"/>
-          </a:fillRef>
-          <a:effectRef idx="2">
-            <a:schemeClr val="accent1"/>
-          </a:effectRef>
-          <a:fontRef idx="minor">
-            <a:schemeClr val="lt1"/>
-          </a:fontRef>
-        </p:style>
-        <p:txBody>
-          <a:bodyPr rtlCol="0" anchor="ctr"/>
-          <a:lstStyle/>
-          <a:p>
-            <a:pPr algn="ctr"/>
-          </a:p>
-        </p:txBody>
-      </p:sp>
-      <p:sp>
-        <p:nvSpPr>
-          <p:cNvPr id="21" name="TextBox 20"/>
-          <p:cNvSpPr txBox="1"/>
-          <p:nvPr/>
-        </p:nvSpPr>
-        <p:spPr>
-          <a:xfrm>
-            <a:off x="658368" y="5230368"/>
-            <a:ext cx="10881360" cy="310896"/>
-          </a:xfrm>
-          <a:prstGeom prst="rect">
-            <a:avLst/>
-          </a:prstGeom>
-          <a:noFill/>
-        </p:spPr>
-        <p:txBody>
-          <a:bodyPr wrap="square" lIns="0" rIns="0" tIns="0" bIns="0" anchor="t">
-            <a:noAutofit/>
-          </a:bodyPr>
-          <a:lstStyle/>
-          <a:p>
-            <a:pPr algn="ctr"/>
-            <a:r>
-              <a:rPr sz="1700" b="1">
-                <a:solidFill>
-                  <a:srgbClr val="A76500"/>
-                </a:solidFill>
-                <a:latin typeface="Malgun Gothic"/>
-              </a:rPr>
-              <a:t>Three separate tables, never merged</a:t>
-            </a:r>
-          </a:p>
-        </p:txBody>
-      </p:sp>
-      <p:sp>
-        <p:nvSpPr>
-          <p:cNvPr id="22" name="TextBox 21"/>
-          <p:cNvSpPr txBox="1"/>
-          <p:nvPr/>
-        </p:nvSpPr>
-        <p:spPr>
-          <a:xfrm>
-            <a:off x="658368" y="5577840"/>
-            <a:ext cx="10881360" cy="274320"/>
-          </a:xfrm>
-          <a:prstGeom prst="rect">
-            <a:avLst/>
-          </a:prstGeom>
-          <a:noFill/>
-        </p:spPr>
-        <p:txBody>
-          <a:bodyPr wrap="square" lIns="0" rIns="0" tIns="0" bIns="0" anchor="t">
-            <a:noAutofit/>
-          </a:bodyPr>
-          <a:lstStyle/>
-          <a:p>
-            <a:pPr algn="ctr"/>
-            <a:r>
-              <a:rPr sz="1350" b="0">
-                <a:solidFill>
-                  <a:srgbClr val="A76500"/>
-                </a:solidFill>
-                <a:latin typeface="Malgun Gothic"/>
-              </a:rPr>
-              <a:t>E-values are not comparable across methods</a:t>
+              <a:rPr sz="1200" b="0">
+                <a:solidFill>
+                  <a:srgbClr val="52565B"/>
+                </a:solidFill>
+                <a:latin typeface="Malgun Gothic"/>
+              </a:rPr>
+              <a:t>indexing off the request path</a:t>
             </a:r>
           </a:p>
         </p:txBody>
@@ -8008,7 +9054,7 @@
                 </a:solidFill>
                 <a:latin typeface="Malgun Gothic"/>
               </a:rPr>
-              <a:t>Profile HMMs are built by sequence, not by EC</a:t>
+              <a:t>Three searches</a:t>
             </a:r>
           </a:p>
         </p:txBody>
@@ -8056,363 +9102,8 @@
         </p:nvSpPr>
         <p:spPr>
           <a:xfrm>
-            <a:off x="658368" y="1463040"/>
-            <a:ext cx="5285232" cy="2377440"/>
-          </a:xfrm>
-          <a:prstGeom prst="roundRect">
-            <a:avLst/>
-          </a:prstGeom>
-          <a:solidFill>
-            <a:srgbClr val="FBECEC"/>
-          </a:solidFill>
-          <a:ln w="12700">
-            <a:solidFill>
-              <a:srgbClr val="FBECEC"/>
-            </a:solidFill>
-          </a:ln>
-        </p:spPr>
-        <p:style>
-          <a:lnRef idx="1">
-            <a:schemeClr val="accent1"/>
-          </a:lnRef>
-          <a:fillRef idx="3">
-            <a:schemeClr val="accent1"/>
-          </a:fillRef>
-          <a:effectRef idx="2">
-            <a:schemeClr val="accent1"/>
-          </a:effectRef>
-          <a:fontRef idx="minor">
-            <a:schemeClr val="lt1"/>
-          </a:fontRef>
-        </p:style>
-        <p:txBody>
-          <a:bodyPr rtlCol="0" anchor="ctr"/>
-          <a:lstStyle/>
-          <a:p>
-            <a:pPr algn="ctr"/>
-          </a:p>
-        </p:txBody>
-      </p:sp>
-      <p:sp>
-        <p:nvSpPr>
-          <p:cNvPr id="6" name="TextBox 5"/>
-          <p:cNvSpPr txBox="1"/>
-          <p:nvPr/>
-        </p:nvSpPr>
-        <p:spPr>
-          <a:xfrm>
-            <a:off x="932688" y="1719072"/>
-            <a:ext cx="4736592" cy="365760"/>
-          </a:xfrm>
-          <a:prstGeom prst="rect">
-            <a:avLst/>
-          </a:prstGeom>
-          <a:noFill/>
-        </p:spPr>
-        <p:txBody>
-          <a:bodyPr wrap="square" lIns="0" rIns="0" tIns="0" bIns="0" anchor="t">
-            <a:noAutofit/>
-          </a:bodyPr>
-          <a:lstStyle/>
-          <a:p>
-            <a:pPr algn="l"/>
-            <a:r>
-              <a:rPr sz="2000" b="1">
-                <a:solidFill>
-                  <a:srgbClr val="B71A1A"/>
-                </a:solidFill>
-                <a:latin typeface="Malgun Gothic"/>
-              </a:rPr>
-              <a:t>Not one profile per EC</a:t>
-            </a:r>
-          </a:p>
-        </p:txBody>
-      </p:sp>
-      <p:sp>
-        <p:nvSpPr>
-          <p:cNvPr id="7" name="TextBox 6"/>
-          <p:cNvSpPr txBox="1"/>
-          <p:nvPr/>
-        </p:nvSpPr>
-        <p:spPr>
-          <a:xfrm>
-            <a:off x="932688" y="2240280"/>
-            <a:ext cx="4736592" cy="1371600"/>
-          </a:xfrm>
-          <a:prstGeom prst="rect">
-            <a:avLst/>
-          </a:prstGeom>
-          <a:noFill/>
-        </p:spPr>
-        <p:txBody>
-          <a:bodyPr wrap="square" lIns="18288" rIns="18288" tIns="18288" bIns="18288">
-            <a:noAutofit/>
-          </a:bodyPr>
-          <a:lstStyle/>
-          <a:p>
-            <a:pPr>
-              <a:lnSpc>
-                <a:spcPct val="105000"/>
-              </a:lnSpc>
-              <a:spcAft>
-                <a:spcPts val="1100"/>
-              </a:spcAft>
-            </a:pPr>
-            <a:r>
-              <a:rPr sz="1500">
-                <a:solidFill>
-                  <a:srgbClr val="18212B"/>
-                </a:solidFill>
-                <a:latin typeface="Malgun Gothic"/>
-              </a:rPr>
-              <a:t>•  An EC names a reaction, not a family</a:t>
-            </a:r>
-          </a:p>
-          <a:p>
-            <a:pPr>
-              <a:lnSpc>
-                <a:spcPct val="105000"/>
-              </a:lnSpc>
-              <a:spcAft>
-                <a:spcPts val="1100"/>
-              </a:spcAft>
-            </a:pPr>
-            <a:r>
-              <a:rPr sz="1500">
-                <a:solidFill>
-                  <a:srgbClr val="18212B"/>
-                </a:solidFill>
-                <a:latin typeface="Malgun Gothic"/>
-              </a:rPr>
-              <a:t>•  Same reaction, unrelated folds</a:t>
-            </a:r>
-          </a:p>
-          <a:p>
-            <a:pPr>
-              <a:lnSpc>
-                <a:spcPct val="105000"/>
-              </a:lnSpc>
-              <a:spcAft>
-                <a:spcPts val="1100"/>
-              </a:spcAft>
-            </a:pPr>
-            <a:r>
-              <a:rPr sz="1500">
-                <a:solidFill>
-                  <a:srgbClr val="18212B"/>
-                </a:solidFill>
-                <a:latin typeface="Malgun Gothic"/>
-              </a:rPr>
-              <a:t>•  Merging them models nothing</a:t>
-            </a:r>
-          </a:p>
-        </p:txBody>
-      </p:sp>
-      <p:sp>
-        <p:nvSpPr>
-          <p:cNvPr id="8" name="Rounded Rectangle 7"/>
-          <p:cNvSpPr/>
-          <p:nvPr/>
-        </p:nvSpPr>
-        <p:spPr>
-          <a:xfrm>
-            <a:off x="6245352" y="1463040"/>
-            <a:ext cx="5294376" cy="2377440"/>
-          </a:xfrm>
-          <a:prstGeom prst="roundRect">
-            <a:avLst/>
-          </a:prstGeom>
-          <a:solidFill>
-            <a:srgbClr val="F1EEFA"/>
-          </a:solidFill>
-          <a:ln w="12700">
-            <a:solidFill>
-              <a:srgbClr val="F1EEFA"/>
-            </a:solidFill>
-          </a:ln>
-        </p:spPr>
-        <p:style>
-          <a:lnRef idx="1">
-            <a:schemeClr val="accent1"/>
-          </a:lnRef>
-          <a:fillRef idx="3">
-            <a:schemeClr val="accent1"/>
-          </a:fillRef>
-          <a:effectRef idx="2">
-            <a:schemeClr val="accent1"/>
-          </a:effectRef>
-          <a:fontRef idx="minor">
-            <a:schemeClr val="lt1"/>
-          </a:fontRef>
-        </p:style>
-        <p:txBody>
-          <a:bodyPr rtlCol="0" anchor="ctr"/>
-          <a:lstStyle/>
-          <a:p>
-            <a:pPr algn="ctr"/>
-          </a:p>
-        </p:txBody>
-      </p:sp>
-      <p:sp>
-        <p:nvSpPr>
-          <p:cNvPr id="9" name="TextBox 8"/>
-          <p:cNvSpPr txBox="1"/>
-          <p:nvPr/>
-        </p:nvSpPr>
-        <p:spPr>
-          <a:xfrm>
-            <a:off x="6519672" y="1719072"/>
-            <a:ext cx="4745736" cy="365760"/>
-          </a:xfrm>
-          <a:prstGeom prst="rect">
-            <a:avLst/>
-          </a:prstGeom>
-          <a:noFill/>
-        </p:spPr>
-        <p:txBody>
-          <a:bodyPr wrap="square" lIns="0" rIns="0" tIns="0" bIns="0" anchor="t">
-            <a:noAutofit/>
-          </a:bodyPr>
-          <a:lstStyle/>
-          <a:p>
-            <a:pPr algn="l"/>
-            <a:r>
-              <a:rPr sz="2000" b="1">
-                <a:solidFill>
-                  <a:srgbClr val="6554A4"/>
-                </a:solidFill>
-                <a:latin typeface="Malgun Gothic"/>
-              </a:rPr>
-              <a:t>One profile per cluster</a:t>
-            </a:r>
-          </a:p>
-        </p:txBody>
-      </p:sp>
-      <p:sp>
-        <p:nvSpPr>
-          <p:cNvPr id="10" name="TextBox 9"/>
-          <p:cNvSpPr txBox="1"/>
-          <p:nvPr/>
-        </p:nvSpPr>
-        <p:spPr>
-          <a:xfrm>
-            <a:off x="6519672" y="2240280"/>
-            <a:ext cx="4745736" cy="1371600"/>
-          </a:xfrm>
-          <a:prstGeom prst="rect">
-            <a:avLst/>
-          </a:prstGeom>
-          <a:noFill/>
-        </p:spPr>
-        <p:txBody>
-          <a:bodyPr wrap="square" lIns="18288" rIns="18288" tIns="18288" bIns="18288">
-            <a:noAutofit/>
-          </a:bodyPr>
-          <a:lstStyle/>
-          <a:p>
-            <a:pPr>
-              <a:lnSpc>
-                <a:spcPct val="105000"/>
-              </a:lnSpc>
-              <a:spcAft>
-                <a:spcPts val="1100"/>
-              </a:spcAft>
-            </a:pPr>
-            <a:r>
-              <a:rPr sz="1500">
-                <a:solidFill>
-                  <a:srgbClr val="18212B"/>
-                </a:solidFill>
-                <a:latin typeface="Malgun Gothic"/>
-              </a:rPr>
-              <a:t>•  MMseqs2, 35% identity / 80% coverage</a:t>
-            </a:r>
-          </a:p>
-          <a:p>
-            <a:pPr>
-              <a:lnSpc>
-                <a:spcPct val="105000"/>
-              </a:lnSpc>
-              <a:spcAft>
-                <a:spcPts val="1100"/>
-              </a:spcAft>
-            </a:pPr>
-            <a:r>
-              <a:rPr sz="1500">
-                <a:solidFill>
-                  <a:srgbClr val="18212B"/>
-                </a:solidFill>
-                <a:latin typeface="Malgun Gothic"/>
-              </a:rPr>
-              <a:t>•  QC gates, then MAFFT and hmmbuild</a:t>
-            </a:r>
-          </a:p>
-          <a:p>
-            <a:pPr>
-              <a:lnSpc>
-                <a:spcPct val="105000"/>
-              </a:lnSpc>
-              <a:spcAft>
-                <a:spcPts val="1100"/>
-              </a:spcAft>
-            </a:pPr>
-            <a:r>
-              <a:rPr sz="1500">
-                <a:solidFill>
-                  <a:srgbClr val="18212B"/>
-                </a:solidFill>
-                <a:latin typeface="Malgun Gothic"/>
-              </a:rPr>
-              <a:t>•  EC attached after, purity reported</a:t>
-            </a:r>
-          </a:p>
-        </p:txBody>
-      </p:sp>
-      <p:sp>
-        <p:nvSpPr>
-          <p:cNvPr id="11" name="TextBox 10"/>
-          <p:cNvSpPr txBox="1"/>
-          <p:nvPr/>
-        </p:nvSpPr>
-        <p:spPr>
-          <a:xfrm>
-            <a:off x="658368" y="4114800"/>
-            <a:ext cx="10881360" cy="310896"/>
-          </a:xfrm>
-          <a:prstGeom prst="rect">
-            <a:avLst/>
-          </a:prstGeom>
-          <a:noFill/>
-        </p:spPr>
-        <p:txBody>
-          <a:bodyPr wrap="square" lIns="0" rIns="0" tIns="0" bIns="0" anchor="t">
-            <a:noAutofit/>
-          </a:bodyPr>
-          <a:lstStyle/>
-          <a:p>
-            <a:pPr algn="l"/>
-            <a:r>
-              <a:rPr sz="1700" b="1">
-                <a:solidFill>
-                  <a:srgbClr val="18212B"/>
-                </a:solidFill>
-                <a:latin typeface="Malgun Gothic"/>
-              </a:rPr>
-              <a:t>One EC number, many sequence families</a:t>
-            </a:r>
-          </a:p>
-        </p:txBody>
-      </p:sp>
-      <p:sp>
-        <p:nvSpPr>
-          <p:cNvPr id="12" name="Rounded Rectangle 11"/>
-          <p:cNvSpPr/>
-          <p:nvPr/>
-        </p:nvSpPr>
-        <p:spPr>
-          <a:xfrm>
-            <a:off x="658368" y="4526280"/>
-            <a:ext cx="3520440" cy="960120"/>
+            <a:off x="658368" y="1508760"/>
+            <a:ext cx="3520440" cy="3246120"/>
           </a:xfrm>
           <a:prstGeom prst="roundRect">
             <a:avLst/>
@@ -8450,14 +9141,494 @@
       </p:sp>
       <p:sp>
         <p:nvSpPr>
-          <p:cNvPr id="13" name="Rectangle 12"/>
+          <p:cNvPr id="6" name="Rectangle 5"/>
           <p:cNvSpPr/>
           <p:nvPr/>
         </p:nvSpPr>
         <p:spPr>
           <a:xfrm>
-            <a:off x="658368" y="4526280"/>
-            <a:ext cx="82296" cy="960120"/>
+            <a:off x="658368" y="1508760"/>
+            <a:ext cx="3520440" cy="109728"/>
+          </a:xfrm>
+          <a:prstGeom prst="rect">
+            <a:avLst/>
+          </a:prstGeom>
+          <a:solidFill>
+            <a:srgbClr val="176B87"/>
+          </a:solidFill>
+          <a:ln>
+            <a:solidFill>
+              <a:srgbClr val="176B87"/>
+            </a:solidFill>
+          </a:ln>
+        </p:spPr>
+        <p:style>
+          <a:lnRef idx="1">
+            <a:schemeClr val="accent1"/>
+          </a:lnRef>
+          <a:fillRef idx="3">
+            <a:schemeClr val="accent1"/>
+          </a:fillRef>
+          <a:effectRef idx="2">
+            <a:schemeClr val="accent1"/>
+          </a:effectRef>
+          <a:fontRef idx="minor">
+            <a:schemeClr val="lt1"/>
+          </a:fontRef>
+        </p:style>
+        <p:txBody>
+          <a:bodyPr rtlCol="0" anchor="ctr"/>
+          <a:lstStyle/>
+          <a:p>
+            <a:pPr algn="ctr"/>
+          </a:p>
+        </p:txBody>
+      </p:sp>
+      <p:sp>
+        <p:nvSpPr>
+          <p:cNvPr id="7" name="TextBox 6"/>
+          <p:cNvSpPr txBox="1"/>
+          <p:nvPr/>
+        </p:nvSpPr>
+        <p:spPr>
+          <a:xfrm>
+            <a:off x="914400" y="1810512"/>
+            <a:ext cx="3017520" cy="384048"/>
+          </a:xfrm>
+          <a:prstGeom prst="rect">
+            <a:avLst/>
+          </a:prstGeom>
+          <a:noFill/>
+        </p:spPr>
+        <p:txBody>
+          <a:bodyPr wrap="square" lIns="0" rIns="0" tIns="0" bIns="0" anchor="t">
+            <a:noAutofit/>
+          </a:bodyPr>
+          <a:lstStyle/>
+          <a:p>
+            <a:pPr algn="l"/>
+            <a:r>
+              <a:rPr sz="2400" b="1">
+                <a:solidFill>
+                  <a:srgbClr val="176B87"/>
+                </a:solidFill>
+                <a:latin typeface="Malgun Gothic"/>
+              </a:rPr>
+              <a:t>blastp</a:t>
+            </a:r>
+          </a:p>
+        </p:txBody>
+      </p:sp>
+      <p:sp>
+        <p:nvSpPr>
+          <p:cNvPr id="8" name="TextBox 7"/>
+          <p:cNvSpPr txBox="1"/>
+          <p:nvPr/>
+        </p:nvSpPr>
+        <p:spPr>
+          <a:xfrm>
+            <a:off x="914400" y="2240280"/>
+            <a:ext cx="3017520" cy="274320"/>
+          </a:xfrm>
+          <a:prstGeom prst="rect">
+            <a:avLst/>
+          </a:prstGeom>
+          <a:noFill/>
+        </p:spPr>
+        <p:txBody>
+          <a:bodyPr wrap="square" lIns="0" rIns="0" tIns="0" bIns="0" anchor="t">
+            <a:noAutofit/>
+          </a:bodyPr>
+          <a:lstStyle/>
+          <a:p>
+            <a:pPr algn="l"/>
+            <a:r>
+              <a:rPr sz="1250" b="0">
+                <a:solidFill>
+                  <a:srgbClr val="667085"/>
+                </a:solidFill>
+                <a:latin typeface="Malgun Gothic"/>
+              </a:rPr>
+              <a:t>pairwise alignment</a:t>
+            </a:r>
+          </a:p>
+        </p:txBody>
+      </p:sp>
+      <p:sp>
+        <p:nvSpPr>
+          <p:cNvPr id="9" name="TextBox 8"/>
+          <p:cNvSpPr txBox="1"/>
+          <p:nvPr/>
+        </p:nvSpPr>
+        <p:spPr>
+          <a:xfrm>
+            <a:off x="914400" y="2697480"/>
+            <a:ext cx="3017520" cy="1737360"/>
+          </a:xfrm>
+          <a:prstGeom prst="rect">
+            <a:avLst/>
+          </a:prstGeom>
+          <a:noFill/>
+        </p:spPr>
+        <p:txBody>
+          <a:bodyPr wrap="square" lIns="18288" rIns="18288" tIns="18288" bIns="18288">
+            <a:noAutofit/>
+          </a:bodyPr>
+          <a:lstStyle/>
+          <a:p>
+            <a:pPr>
+              <a:lnSpc>
+                <a:spcPct val="105000"/>
+              </a:lnSpc>
+              <a:spcAft>
+                <a:spcPts val="1200"/>
+              </a:spcAft>
+            </a:pPr>
+            <a:r>
+              <a:rPr sz="1400">
+                <a:solidFill>
+                  <a:srgbClr val="18212B"/>
+                </a:solidFill>
+                <a:latin typeface="Malgun Gothic"/>
+              </a:rPr>
+              <a:t>•  Every reference</a:t>
+            </a:r>
+          </a:p>
+          <a:p>
+            <a:pPr>
+              <a:lnSpc>
+                <a:spcPct val="105000"/>
+              </a:lnSpc>
+              <a:spcAft>
+                <a:spcPts val="1200"/>
+              </a:spcAft>
+            </a:pPr>
+            <a:r>
+              <a:rPr sz="1400">
+                <a:solidFill>
+                  <a:srgbClr val="18212B"/>
+                </a:solidFill>
+                <a:latin typeface="Malgun Gothic"/>
+              </a:rPr>
+              <a:t>•  Identity and coverage</a:t>
+            </a:r>
+          </a:p>
+          <a:p>
+            <a:pPr>
+              <a:lnSpc>
+                <a:spcPct val="105000"/>
+              </a:lnSpc>
+              <a:spcAft>
+                <a:spcPts val="1200"/>
+              </a:spcAft>
+            </a:pPr>
+            <a:r>
+              <a:rPr sz="1400">
+                <a:solidFill>
+                  <a:srgbClr val="18212B"/>
+                </a:solidFill>
+                <a:latin typeface="Malgun Gothic"/>
+              </a:rPr>
+              <a:t>•  Default method</a:t>
+            </a:r>
+          </a:p>
+        </p:txBody>
+      </p:sp>
+      <p:sp>
+        <p:nvSpPr>
+          <p:cNvPr id="10" name="Rounded Rectangle 9"/>
+          <p:cNvSpPr/>
+          <p:nvPr/>
+        </p:nvSpPr>
+        <p:spPr>
+          <a:xfrm>
+            <a:off x="4334256" y="1508760"/>
+            <a:ext cx="3520440" cy="3246120"/>
+          </a:xfrm>
+          <a:prstGeom prst="roundRect">
+            <a:avLst/>
+          </a:prstGeom>
+          <a:solidFill>
+            <a:srgbClr val="FFFFFF"/>
+          </a:solidFill>
+          <a:ln w="12700">
+            <a:solidFill>
+              <a:srgbClr val="D9DEE7"/>
+            </a:solidFill>
+          </a:ln>
+        </p:spPr>
+        <p:style>
+          <a:lnRef idx="1">
+            <a:schemeClr val="accent1"/>
+          </a:lnRef>
+          <a:fillRef idx="3">
+            <a:schemeClr val="accent1"/>
+          </a:fillRef>
+          <a:effectRef idx="2">
+            <a:schemeClr val="accent1"/>
+          </a:effectRef>
+          <a:fontRef idx="minor">
+            <a:schemeClr val="lt1"/>
+          </a:fontRef>
+        </p:style>
+        <p:txBody>
+          <a:bodyPr rtlCol="0" anchor="ctr"/>
+          <a:lstStyle/>
+          <a:p>
+            <a:pPr algn="ctr"/>
+          </a:p>
+        </p:txBody>
+      </p:sp>
+      <p:sp>
+        <p:nvSpPr>
+          <p:cNvPr id="11" name="Rectangle 10"/>
+          <p:cNvSpPr/>
+          <p:nvPr/>
+        </p:nvSpPr>
+        <p:spPr>
+          <a:xfrm>
+            <a:off x="4334256" y="1508760"/>
+            <a:ext cx="3520440" cy="109728"/>
+          </a:xfrm>
+          <a:prstGeom prst="rect">
+            <a:avLst/>
+          </a:prstGeom>
+          <a:solidFill>
+            <a:srgbClr val="167C5A"/>
+          </a:solidFill>
+          <a:ln>
+            <a:solidFill>
+              <a:srgbClr val="167C5A"/>
+            </a:solidFill>
+          </a:ln>
+        </p:spPr>
+        <p:style>
+          <a:lnRef idx="1">
+            <a:schemeClr val="accent1"/>
+          </a:lnRef>
+          <a:fillRef idx="3">
+            <a:schemeClr val="accent1"/>
+          </a:fillRef>
+          <a:effectRef idx="2">
+            <a:schemeClr val="accent1"/>
+          </a:effectRef>
+          <a:fontRef idx="minor">
+            <a:schemeClr val="lt1"/>
+          </a:fontRef>
+        </p:style>
+        <p:txBody>
+          <a:bodyPr rtlCol="0" anchor="ctr"/>
+          <a:lstStyle/>
+          <a:p>
+            <a:pPr algn="ctr"/>
+          </a:p>
+        </p:txBody>
+      </p:sp>
+      <p:sp>
+        <p:nvSpPr>
+          <p:cNvPr id="12" name="TextBox 11"/>
+          <p:cNvSpPr txBox="1"/>
+          <p:nvPr/>
+        </p:nvSpPr>
+        <p:spPr>
+          <a:xfrm>
+            <a:off x="4590288" y="1810512"/>
+            <a:ext cx="3017520" cy="384048"/>
+          </a:xfrm>
+          <a:prstGeom prst="rect">
+            <a:avLst/>
+          </a:prstGeom>
+          <a:noFill/>
+        </p:spPr>
+        <p:txBody>
+          <a:bodyPr wrap="square" lIns="0" rIns="0" tIns="0" bIns="0" anchor="t">
+            <a:noAutofit/>
+          </a:bodyPr>
+          <a:lstStyle/>
+          <a:p>
+            <a:pPr algn="l"/>
+            <a:r>
+              <a:rPr sz="2400" b="1">
+                <a:solidFill>
+                  <a:srgbClr val="167C5A"/>
+                </a:solidFill>
+                <a:latin typeface="Malgun Gothic"/>
+              </a:rPr>
+              <a:t>phmmer</a:t>
+            </a:r>
+          </a:p>
+        </p:txBody>
+      </p:sp>
+      <p:sp>
+        <p:nvSpPr>
+          <p:cNvPr id="13" name="TextBox 12"/>
+          <p:cNvSpPr txBox="1"/>
+          <p:nvPr/>
+        </p:nvSpPr>
+        <p:spPr>
+          <a:xfrm>
+            <a:off x="4590288" y="2240280"/>
+            <a:ext cx="3017520" cy="274320"/>
+          </a:xfrm>
+          <a:prstGeom prst="rect">
+            <a:avLst/>
+          </a:prstGeom>
+          <a:noFill/>
+        </p:spPr>
+        <p:txBody>
+          <a:bodyPr wrap="square" lIns="0" rIns="0" tIns="0" bIns="0" anchor="t">
+            <a:noAutofit/>
+          </a:bodyPr>
+          <a:lstStyle/>
+          <a:p>
+            <a:pPr algn="l"/>
+            <a:r>
+              <a:rPr sz="1250" b="0">
+                <a:solidFill>
+                  <a:srgbClr val="667085"/>
+                </a:solidFill>
+                <a:latin typeface="Malgun Gothic"/>
+              </a:rPr>
+              <a:t>query profile</a:t>
+            </a:r>
+          </a:p>
+        </p:txBody>
+      </p:sp>
+      <p:sp>
+        <p:nvSpPr>
+          <p:cNvPr id="14" name="TextBox 13"/>
+          <p:cNvSpPr txBox="1"/>
+          <p:nvPr/>
+        </p:nvSpPr>
+        <p:spPr>
+          <a:xfrm>
+            <a:off x="4590288" y="2697480"/>
+            <a:ext cx="3017520" cy="1737360"/>
+          </a:xfrm>
+          <a:prstGeom prst="rect">
+            <a:avLst/>
+          </a:prstGeom>
+          <a:noFill/>
+        </p:spPr>
+        <p:txBody>
+          <a:bodyPr wrap="square" lIns="18288" rIns="18288" tIns="18288" bIns="18288">
+            <a:noAutofit/>
+          </a:bodyPr>
+          <a:lstStyle/>
+          <a:p>
+            <a:pPr>
+              <a:lnSpc>
+                <a:spcPct val="105000"/>
+              </a:lnSpc>
+              <a:spcAft>
+                <a:spcPts val="1200"/>
+              </a:spcAft>
+            </a:pPr>
+            <a:r>
+              <a:rPr sz="1400">
+                <a:solidFill>
+                  <a:srgbClr val="18212B"/>
+                </a:solidFill>
+                <a:latin typeface="Malgun Gothic"/>
+              </a:rPr>
+              <a:t>•  Every reference</a:t>
+            </a:r>
+          </a:p>
+          <a:p>
+            <a:pPr>
+              <a:lnSpc>
+                <a:spcPct val="105000"/>
+              </a:lnSpc>
+              <a:spcAft>
+                <a:spcPts val="1200"/>
+              </a:spcAft>
+            </a:pPr>
+            <a:r>
+              <a:rPr sz="1400">
+                <a:solidFill>
+                  <a:srgbClr val="18212B"/>
+                </a:solidFill>
+                <a:latin typeface="Malgun Gothic"/>
+              </a:rPr>
+              <a:t>•  Different statistics</a:t>
+            </a:r>
+          </a:p>
+          <a:p>
+            <a:pPr>
+              <a:lnSpc>
+                <a:spcPct val="105000"/>
+              </a:lnSpc>
+              <a:spcAft>
+                <a:spcPts val="1200"/>
+              </a:spcAft>
+            </a:pPr>
+            <a:r>
+              <a:rPr sz="1400">
+                <a:solidFill>
+                  <a:srgbClr val="18212B"/>
+                </a:solidFill>
+                <a:latin typeface="Malgun Gothic"/>
+              </a:rPr>
+              <a:t>•  4-5x slower</a:t>
+            </a:r>
+          </a:p>
+        </p:txBody>
+      </p:sp>
+      <p:sp>
+        <p:nvSpPr>
+          <p:cNvPr id="15" name="Rounded Rectangle 14"/>
+          <p:cNvSpPr/>
+          <p:nvPr/>
+        </p:nvSpPr>
+        <p:spPr>
+          <a:xfrm>
+            <a:off x="8010144" y="1508760"/>
+            <a:ext cx="3520440" cy="3246120"/>
+          </a:xfrm>
+          <a:prstGeom prst="roundRect">
+            <a:avLst/>
+          </a:prstGeom>
+          <a:solidFill>
+            <a:srgbClr val="FFFFFF"/>
+          </a:solidFill>
+          <a:ln w="12700">
+            <a:solidFill>
+              <a:srgbClr val="D9DEE7"/>
+            </a:solidFill>
+          </a:ln>
+        </p:spPr>
+        <p:style>
+          <a:lnRef idx="1">
+            <a:schemeClr val="accent1"/>
+          </a:lnRef>
+          <a:fillRef idx="3">
+            <a:schemeClr val="accent1"/>
+          </a:fillRef>
+          <a:effectRef idx="2">
+            <a:schemeClr val="accent1"/>
+          </a:effectRef>
+          <a:fontRef idx="minor">
+            <a:schemeClr val="lt1"/>
+          </a:fontRef>
+        </p:style>
+        <p:txBody>
+          <a:bodyPr rtlCol="0" anchor="ctr"/>
+          <a:lstStyle/>
+          <a:p>
+            <a:pPr algn="ctr"/>
+          </a:p>
+        </p:txBody>
+      </p:sp>
+      <p:sp>
+        <p:nvSpPr>
+          <p:cNvPr id="16" name="Rectangle 15"/>
+          <p:cNvSpPr/>
+          <p:nvPr/>
+        </p:nvSpPr>
+        <p:spPr>
+          <a:xfrm>
+            <a:off x="8010144" y="1508760"/>
+            <a:ext cx="3520440" cy="109728"/>
           </a:xfrm>
           <a:prstGeom prst="rect">
             <a:avLst/>
@@ -8495,14 +9666,14 @@
       </p:sp>
       <p:sp>
         <p:nvSpPr>
-          <p:cNvPr id="14" name="TextBox 13"/>
+          <p:cNvPr id="17" name="TextBox 16"/>
           <p:cNvSpPr txBox="1"/>
           <p:nvPr/>
         </p:nvSpPr>
         <p:spPr>
           <a:xfrm>
-            <a:off x="886968" y="4672584"/>
-            <a:ext cx="3154680" cy="402336"/>
+            <a:off x="8266175" y="1810512"/>
+            <a:ext cx="3017520" cy="384048"/>
           </a:xfrm>
           <a:prstGeom prst="rect">
             <a:avLst/>
@@ -8517,27 +9688,27 @@
           <a:p>
             <a:pPr algn="l"/>
             <a:r>
-              <a:rPr sz="2600" b="1">
+              <a:rPr sz="2400" b="1">
                 <a:solidFill>
                   <a:srgbClr val="6554A4"/>
                 </a:solidFill>
                 <a:latin typeface="Malgun Gothic"/>
               </a:rPr>
-              <a:t>13</a:t>
-            </a:r>
-          </a:p>
-        </p:txBody>
-      </p:sp>
-      <p:sp>
-        <p:nvSpPr>
-          <p:cNvPr id="15" name="TextBox 14"/>
+              <a:t>hmmscan</a:t>
+            </a:r>
+          </a:p>
+        </p:txBody>
+      </p:sp>
+      <p:sp>
+        <p:nvSpPr>
+          <p:cNvPr id="18" name="TextBox 17"/>
           <p:cNvSpPr txBox="1"/>
           <p:nvPr/>
         </p:nvSpPr>
         <p:spPr>
           <a:xfrm>
-            <a:off x="886968" y="5129784"/>
-            <a:ext cx="3154680" cy="237744"/>
+            <a:off x="8266175" y="2240280"/>
+            <a:ext cx="3017520" cy="274320"/>
           </a:xfrm>
           <a:prstGeom prst="rect">
             <a:avLst/>
@@ -8552,37 +9723,117 @@
           <a:p>
             <a:pPr algn="l"/>
             <a:r>
-              <a:rPr sz="1150" b="0">
-                <a:solidFill>
-                  <a:srgbClr val="52565B"/>
-                </a:solidFill>
-                <a:latin typeface="Malgun Gothic"/>
-              </a:rPr>
-              <a:t>glutathione transferase</a:t>
-            </a:r>
-          </a:p>
-        </p:txBody>
-      </p:sp>
-      <p:sp>
-        <p:nvSpPr>
-          <p:cNvPr id="16" name="Rounded Rectangle 15"/>
+              <a:rPr sz="1250" b="0">
+                <a:solidFill>
+                  <a:srgbClr val="667085"/>
+                </a:solidFill>
+                <a:latin typeface="Malgun Gothic"/>
+              </a:rPr>
+              <a:t>family profiles</a:t>
+            </a:r>
+          </a:p>
+        </p:txBody>
+      </p:sp>
+      <p:sp>
+        <p:nvSpPr>
+          <p:cNvPr id="19" name="TextBox 18"/>
+          <p:cNvSpPr txBox="1"/>
+          <p:nvPr/>
+        </p:nvSpPr>
+        <p:spPr>
+          <a:xfrm>
+            <a:off x="8266175" y="2697480"/>
+            <a:ext cx="3017520" cy="1737360"/>
+          </a:xfrm>
+          <a:prstGeom prst="rect">
+            <a:avLst/>
+          </a:prstGeom>
+          <a:noFill/>
+        </p:spPr>
+        <p:txBody>
+          <a:bodyPr wrap="square" lIns="18288" rIns="18288" tIns="18288" bIns="18288">
+            <a:noAutofit/>
+          </a:bodyPr>
+          <a:lstStyle/>
+          <a:p>
+            <a:pPr>
+              <a:lnSpc>
+                <a:spcPct val="105000"/>
+              </a:lnSpc>
+              <a:spcAft>
+                <a:spcPts val="1200"/>
+              </a:spcAft>
+            </a:pPr>
+            <a:r>
+              <a:rPr sz="1400">
+                <a:solidFill>
+                  <a:srgbClr val="18212B"/>
+                </a:solidFill>
+                <a:latin typeface="Malgun Gothic"/>
+              </a:rPr>
+              <a:t>•  QC-passing families only</a:t>
+            </a:r>
+          </a:p>
+          <a:p>
+            <a:pPr>
+              <a:lnSpc>
+                <a:spcPct val="105000"/>
+              </a:lnSpc>
+              <a:spcAft>
+                <a:spcPts val="1200"/>
+              </a:spcAft>
+            </a:pPr>
+            <a:r>
+              <a:rPr sz="1400">
+                <a:solidFill>
+                  <a:srgbClr val="18212B"/>
+                </a:solidFill>
+                <a:latin typeface="Malgun Gothic"/>
+              </a:rPr>
+              <a:t>•  Finds distant relatives</a:t>
+            </a:r>
+          </a:p>
+          <a:p>
+            <a:pPr>
+              <a:lnSpc>
+                <a:spcPct val="105000"/>
+              </a:lnSpc>
+              <a:spcAft>
+                <a:spcPts val="1200"/>
+              </a:spcAft>
+            </a:pPr>
+            <a:r>
+              <a:rPr sz="1400">
+                <a:solidFill>
+                  <a:srgbClr val="18212B"/>
+                </a:solidFill>
+                <a:latin typeface="Malgun Gothic"/>
+              </a:rPr>
+              <a:t>•  Returns a family</a:t>
+            </a:r>
+          </a:p>
+        </p:txBody>
+      </p:sp>
+      <p:sp>
+        <p:nvSpPr>
+          <p:cNvPr id="20" name="Rounded Rectangle 19"/>
           <p:cNvSpPr/>
           <p:nvPr/>
         </p:nvSpPr>
         <p:spPr>
           <a:xfrm>
-            <a:off x="4334256" y="4526280"/>
-            <a:ext cx="3520440" cy="960120"/>
+            <a:off x="658368" y="5029200"/>
+            <a:ext cx="10881360" cy="914400"/>
           </a:xfrm>
           <a:prstGeom prst="roundRect">
             <a:avLst/>
           </a:prstGeom>
           <a:solidFill>
-            <a:srgbClr val="FFFFFF"/>
+            <a:srgbClr val="FFF5DF"/>
           </a:solidFill>
           <a:ln w="12700">
             <a:solidFill>
-              <a:srgbClr val="D9DEE7"/>
+              <a:srgbClr val="FFF5DF"/>
             </a:solidFill>
           </a:ln>
         </p:spPr>
@@ -8610,59 +9861,14 @@
       </p:sp>
       <p:sp>
         <p:nvSpPr>
-          <p:cNvPr id="17" name="Rectangle 16"/>
-          <p:cNvSpPr/>
-          <p:nvPr/>
-        </p:nvSpPr>
-        <p:spPr>
-          <a:xfrm>
-            <a:off x="4334256" y="4526280"/>
-            <a:ext cx="82296" cy="960120"/>
-          </a:xfrm>
-          <a:prstGeom prst="rect">
-            <a:avLst/>
-          </a:prstGeom>
-          <a:solidFill>
-            <a:srgbClr val="6554A4"/>
-          </a:solidFill>
-          <a:ln>
-            <a:solidFill>
-              <a:srgbClr val="6554A4"/>
-            </a:solidFill>
-          </a:ln>
-        </p:spPr>
-        <p:style>
-          <a:lnRef idx="1">
-            <a:schemeClr val="accent1"/>
-          </a:lnRef>
-          <a:fillRef idx="3">
-            <a:schemeClr val="accent1"/>
-          </a:fillRef>
-          <a:effectRef idx="2">
-            <a:schemeClr val="accent1"/>
-          </a:effectRef>
-          <a:fontRef idx="minor">
-            <a:schemeClr val="lt1"/>
-          </a:fontRef>
-        </p:style>
-        <p:txBody>
-          <a:bodyPr rtlCol="0" anchor="ctr"/>
-          <a:lstStyle/>
-          <a:p>
-            <a:pPr algn="ctr"/>
-          </a:p>
-        </p:txBody>
-      </p:sp>
-      <p:sp>
-        <p:nvSpPr>
-          <p:cNvPr id="18" name="TextBox 17"/>
+          <p:cNvPr id="21" name="TextBox 20"/>
           <p:cNvSpPr txBox="1"/>
           <p:nvPr/>
         </p:nvSpPr>
         <p:spPr>
           <a:xfrm>
-            <a:off x="4562856" y="4672584"/>
-            <a:ext cx="3154680" cy="402336"/>
+            <a:off x="658368" y="5230368"/>
+            <a:ext cx="10881360" cy="310896"/>
           </a:xfrm>
           <a:prstGeom prst="rect">
             <a:avLst/>
@@ -8675,29 +9881,29 @@
           </a:bodyPr>
           <a:lstStyle/>
           <a:p>
-            <a:pPr algn="l"/>
-            <a:r>
-              <a:rPr sz="2600" b="1">
-                <a:solidFill>
-                  <a:srgbClr val="6554A4"/>
-                </a:solidFill>
-                <a:latin typeface="Malgun Gothic"/>
-              </a:rPr>
-              <a:t>4</a:t>
-            </a:r>
-          </a:p>
-        </p:txBody>
-      </p:sp>
-      <p:sp>
-        <p:nvSpPr>
-          <p:cNvPr id="19" name="TextBox 18"/>
+            <a:pPr algn="ctr"/>
+            <a:r>
+              <a:rPr sz="1700" b="1">
+                <a:solidFill>
+                  <a:srgbClr val="A76500"/>
+                </a:solidFill>
+                <a:latin typeface="Malgun Gothic"/>
+              </a:rPr>
+              <a:t>Three separate tables, never merged</a:t>
+            </a:r>
+          </a:p>
+        </p:txBody>
+      </p:sp>
+      <p:sp>
+        <p:nvSpPr>
+          <p:cNvPr id="22" name="TextBox 21"/>
           <p:cNvSpPr txBox="1"/>
           <p:nvPr/>
         </p:nvSpPr>
         <p:spPr>
           <a:xfrm>
-            <a:off x="4562856" y="5129784"/>
-            <a:ext cx="3154680" cy="237744"/>
+            <a:off x="658368" y="5577840"/>
+            <a:ext cx="10881360" cy="274320"/>
           </a:xfrm>
           <a:prstGeom prst="rect">
             <a:avLst/>
@@ -8710,255 +9916,15 @@
           </a:bodyPr>
           <a:lstStyle/>
           <a:p>
-            <a:pPr algn="l"/>
-            <a:r>
-              <a:rPr sz="1150" b="0">
-                <a:solidFill>
-                  <a:srgbClr val="52565B"/>
-                </a:solidFill>
-                <a:latin typeface="Malgun Gothic"/>
-              </a:rPr>
-              <a:t>carbonic anhydrase</a:t>
-            </a:r>
-          </a:p>
-        </p:txBody>
-      </p:sp>
-      <p:sp>
-        <p:nvSpPr>
-          <p:cNvPr id="20" name="Rounded Rectangle 19"/>
-          <p:cNvSpPr/>
-          <p:nvPr/>
-        </p:nvSpPr>
-        <p:spPr>
-          <a:xfrm>
-            <a:off x="8010144" y="4526280"/>
-            <a:ext cx="3520440" cy="960120"/>
-          </a:xfrm>
-          <a:prstGeom prst="roundRect">
-            <a:avLst/>
-          </a:prstGeom>
-          <a:solidFill>
-            <a:srgbClr val="FFFFFF"/>
-          </a:solidFill>
-          <a:ln w="12700">
-            <a:solidFill>
-              <a:srgbClr val="D9DEE7"/>
-            </a:solidFill>
-          </a:ln>
-        </p:spPr>
-        <p:style>
-          <a:lnRef idx="1">
-            <a:schemeClr val="accent1"/>
-          </a:lnRef>
-          <a:fillRef idx="3">
-            <a:schemeClr val="accent1"/>
-          </a:fillRef>
-          <a:effectRef idx="2">
-            <a:schemeClr val="accent1"/>
-          </a:effectRef>
-          <a:fontRef idx="minor">
-            <a:schemeClr val="lt1"/>
-          </a:fontRef>
-        </p:style>
-        <p:txBody>
-          <a:bodyPr rtlCol="0" anchor="ctr"/>
-          <a:lstStyle/>
-          <a:p>
             <a:pPr algn="ctr"/>
-          </a:p>
-        </p:txBody>
-      </p:sp>
-      <p:sp>
-        <p:nvSpPr>
-          <p:cNvPr id="21" name="Rectangle 20"/>
-          <p:cNvSpPr/>
-          <p:nvPr/>
-        </p:nvSpPr>
-        <p:spPr>
-          <a:xfrm>
-            <a:off x="8010144" y="4526280"/>
-            <a:ext cx="82296" cy="960120"/>
-          </a:xfrm>
-          <a:prstGeom prst="rect">
-            <a:avLst/>
-          </a:prstGeom>
-          <a:solidFill>
-            <a:srgbClr val="6554A4"/>
-          </a:solidFill>
-          <a:ln>
-            <a:solidFill>
-              <a:srgbClr val="6554A4"/>
-            </a:solidFill>
-          </a:ln>
-        </p:spPr>
-        <p:style>
-          <a:lnRef idx="1">
-            <a:schemeClr val="accent1"/>
-          </a:lnRef>
-          <a:fillRef idx="3">
-            <a:schemeClr val="accent1"/>
-          </a:fillRef>
-          <a:effectRef idx="2">
-            <a:schemeClr val="accent1"/>
-          </a:effectRef>
-          <a:fontRef idx="minor">
-            <a:schemeClr val="lt1"/>
-          </a:fontRef>
-        </p:style>
-        <p:txBody>
-          <a:bodyPr rtlCol="0" anchor="ctr"/>
-          <a:lstStyle/>
-          <a:p>
-            <a:pPr algn="ctr"/>
-          </a:p>
-        </p:txBody>
-      </p:sp>
-      <p:sp>
-        <p:nvSpPr>
-          <p:cNvPr id="22" name="TextBox 21"/>
-          <p:cNvSpPr txBox="1"/>
-          <p:nvPr/>
-        </p:nvSpPr>
-        <p:spPr>
-          <a:xfrm>
-            <a:off x="8238744" y="4672584"/>
-            <a:ext cx="3154680" cy="402336"/>
-          </a:xfrm>
-          <a:prstGeom prst="rect">
-            <a:avLst/>
-          </a:prstGeom>
-          <a:noFill/>
-        </p:spPr>
-        <p:txBody>
-          <a:bodyPr wrap="square" lIns="0" rIns="0" tIns="0" bIns="0" anchor="t">
-            <a:noAutofit/>
-          </a:bodyPr>
-          <a:lstStyle/>
-          <a:p>
-            <a:pPr algn="l"/>
-            <a:r>
-              <a:rPr sz="2600" b="1">
-                <a:solidFill>
-                  <a:srgbClr val="6554A4"/>
-                </a:solidFill>
-                <a:latin typeface="Malgun Gothic"/>
-              </a:rPr>
-              <a:t>5</a:t>
-            </a:r>
-          </a:p>
-        </p:txBody>
-      </p:sp>
-      <p:sp>
-        <p:nvSpPr>
-          <p:cNvPr id="23" name="TextBox 22"/>
-          <p:cNvSpPr txBox="1"/>
-          <p:nvPr/>
-        </p:nvSpPr>
-        <p:spPr>
-          <a:xfrm>
-            <a:off x="8238744" y="5129784"/>
-            <a:ext cx="3154680" cy="237744"/>
-          </a:xfrm>
-          <a:prstGeom prst="rect">
-            <a:avLst/>
-          </a:prstGeom>
-          <a:noFill/>
-        </p:spPr>
-        <p:txBody>
-          <a:bodyPr wrap="square" lIns="0" rIns="0" tIns="0" bIns="0" anchor="t">
-            <a:noAutofit/>
-          </a:bodyPr>
-          <a:lstStyle/>
-          <a:p>
-            <a:pPr algn="l"/>
-            <a:r>
-              <a:rPr sz="1150" b="0">
-                <a:solidFill>
-                  <a:srgbClr val="52565B"/>
-                </a:solidFill>
-                <a:latin typeface="Malgun Gothic"/>
-              </a:rPr>
-              <a:t>superoxide dismutase</a:t>
-            </a:r>
-          </a:p>
-        </p:txBody>
-      </p:sp>
-      <p:sp>
-        <p:nvSpPr>
-          <p:cNvPr id="24" name="Rounded Rectangle 23"/>
-          <p:cNvSpPr/>
-          <p:nvPr/>
-        </p:nvSpPr>
-        <p:spPr>
-          <a:xfrm>
-            <a:off x="658368" y="5715000"/>
-            <a:ext cx="10881360" cy="502920"/>
-          </a:xfrm>
-          <a:prstGeom prst="roundRect">
-            <a:avLst/>
-          </a:prstGeom>
-          <a:solidFill>
-            <a:srgbClr val="EAF6F1"/>
-          </a:solidFill>
-          <a:ln w="12700">
-            <a:solidFill>
-              <a:srgbClr val="EAF6F1"/>
-            </a:solidFill>
-          </a:ln>
-        </p:spPr>
-        <p:style>
-          <a:lnRef idx="1">
-            <a:schemeClr val="accent1"/>
-          </a:lnRef>
-          <a:fillRef idx="3">
-            <a:schemeClr val="accent1"/>
-          </a:fillRef>
-          <a:effectRef idx="2">
-            <a:schemeClr val="accent1"/>
-          </a:effectRef>
-          <a:fontRef idx="minor">
-            <a:schemeClr val="lt1"/>
-          </a:fontRef>
-        </p:style>
-        <p:txBody>
-          <a:bodyPr rtlCol="0" anchor="ctr"/>
-          <a:lstStyle/>
-          <a:p>
-            <a:pPr algn="ctr"/>
-          </a:p>
-        </p:txBody>
-      </p:sp>
-      <p:sp>
-        <p:nvSpPr>
-          <p:cNvPr id="25" name="TextBox 24"/>
-          <p:cNvSpPr txBox="1"/>
-          <p:nvPr/>
-        </p:nvSpPr>
-        <p:spPr>
-          <a:xfrm>
-            <a:off x="658368" y="5852160"/>
-            <a:ext cx="10881360" cy="274320"/>
-          </a:xfrm>
-          <a:prstGeom prst="rect">
-            <a:avLst/>
-          </a:prstGeom>
-          <a:noFill/>
-        </p:spPr>
-        <p:txBody>
-          <a:bodyPr wrap="square" lIns="0" rIns="0" tIns="0" bIns="0" anchor="t">
-            <a:noAutofit/>
-          </a:bodyPr>
-          <a:lstStyle/>
-          <a:p>
-            <a:pPr algn="ctr"/>
-            <a:r>
-              <a:rPr sz="1350" b="1">
-                <a:solidFill>
-                  <a:srgbClr val="167C5A"/>
-                </a:solidFill>
-                <a:latin typeface="Malgun Gothic"/>
-              </a:rPr>
-              <a:t>A human Mn-SOD query matches only the Mn/Fe families, none of the Cu/Zn ones</a:t>
+            <a:r>
+              <a:rPr sz="1350" b="0">
+                <a:solidFill>
+                  <a:srgbClr val="A76500"/>
+                </a:solidFill>
+                <a:latin typeface="Malgun Gothic"/>
+              </a:rPr>
+              <a:t>E-values are not comparable across methods</a:t>
             </a:r>
           </a:p>
         </p:txBody>
@@ -9056,7 +10022,7 @@
                 </a:solidFill>
                 <a:latin typeface="Malgun Gothic"/>
               </a:rPr>
-              <a:t>Validation against the existing BLAST run</a:t>
+              <a:t>Profile HMMs are built by sequence, not by EC</a:t>
             </a:r>
           </a:p>
         </p:txBody>
@@ -9104,18 +10070,18 @@
         </p:nvSpPr>
         <p:spPr>
           <a:xfrm>
-            <a:off x="658368" y="1554480"/>
-            <a:ext cx="10881360" cy="1691640"/>
+            <a:off x="658368" y="1463040"/>
+            <a:ext cx="5285232" cy="2377440"/>
           </a:xfrm>
           <a:prstGeom prst="roundRect">
             <a:avLst/>
           </a:prstGeom>
           <a:solidFill>
-            <a:srgbClr val="EAF4F7"/>
+            <a:srgbClr val="FBECEC"/>
           </a:solidFill>
           <a:ln w="12700">
             <a:solidFill>
-              <a:srgbClr val="EAF4F7"/>
+              <a:srgbClr val="FBECEC"/>
             </a:solidFill>
           </a:ln>
         </p:spPr>
@@ -9149,8 +10115,8 @@
         </p:nvSpPr>
         <p:spPr>
           <a:xfrm>
-            <a:off x="1005840" y="1828800"/>
-            <a:ext cx="3840480" cy="822960"/>
+            <a:off x="932688" y="1719072"/>
+            <a:ext cx="4736592" cy="365760"/>
           </a:xfrm>
           <a:prstGeom prst="rect">
             <a:avLst/>
@@ -9165,13 +10131,13 @@
           <a:p>
             <a:pPr algn="l"/>
             <a:r>
-              <a:rPr sz="5400" b="1">
-                <a:solidFill>
-                  <a:srgbClr val="176B87"/>
-                </a:solidFill>
-                <a:latin typeface="Malgun Gothic"/>
-              </a:rPr>
-              <a:t>452 / 452</a:t>
+              <a:rPr sz="2000" b="1">
+                <a:solidFill>
+                  <a:srgbClr val="B71A1A"/>
+                </a:solidFill>
+                <a:latin typeface="Malgun Gothic"/>
+              </a:rPr>
+              <a:t>Not one profile per EC</a:t>
             </a:r>
           </a:p>
         </p:txBody>
@@ -9184,43 +10150,8 @@
         </p:nvSpPr>
         <p:spPr>
           <a:xfrm>
-            <a:off x="1051560" y="2670048"/>
-            <a:ext cx="3840480" cy="365760"/>
-          </a:xfrm>
-          <a:prstGeom prst="rect">
-            <a:avLst/>
-          </a:prstGeom>
-          <a:noFill/>
-        </p:spPr>
-        <p:txBody>
-          <a:bodyPr wrap="square" lIns="0" rIns="0" tIns="0" bIns="0" anchor="t">
-            <a:noAutofit/>
-          </a:bodyPr>
-          <a:lstStyle/>
-          <a:p>
-            <a:pPr algn="l"/>
-            <a:r>
-              <a:rPr sz="1700" b="1">
-                <a:solidFill>
-                  <a:srgbClr val="176B87"/>
-                </a:solidFill>
-                <a:latin typeface="Malgun Gothic"/>
-              </a:rPr>
-              <a:t>identical top hit</a:t>
-            </a:r>
-          </a:p>
-        </p:txBody>
-      </p:sp>
-      <p:sp>
-        <p:nvSpPr>
-          <p:cNvPr id="8" name="TextBox 7"/>
-          <p:cNvSpPr txBox="1"/>
-          <p:nvPr/>
-        </p:nvSpPr>
-        <p:spPr>
-          <a:xfrm>
-            <a:off x="5120640" y="1965960"/>
-            <a:ext cx="6217920" cy="1188720"/>
+            <a:off x="932688" y="2240280"/>
+            <a:ext cx="4736592" cy="1371600"/>
           </a:xfrm>
           <a:prstGeom prst="rect">
             <a:avLst/>
@@ -9238,7 +10169,7 @@
                 <a:spcPct val="105000"/>
               </a:lnSpc>
               <a:spcAft>
-                <a:spcPts val="1000"/>
+                <a:spcPts val="1100"/>
               </a:spcAft>
             </a:pPr>
             <a:r>
@@ -9248,7 +10179,7 @@
                 </a:solidFill>
                 <a:latin typeface="Malgun Gothic"/>
               </a:rPr>
-              <a:t>•  Beomsu's query set, his parameters</a:t>
+              <a:t>•  An EC names a reaction, not a family</a:t>
             </a:r>
           </a:p>
           <a:p>
@@ -9257,7 +10188,7 @@
                 <a:spcPct val="105000"/>
               </a:lnSpc>
               <a:spcAft>
-                <a:spcPts val="1000"/>
+                <a:spcPts val="1100"/>
               </a:spcAft>
             </a:pPr>
             <a:r>
@@ -9267,7 +10198,7 @@
                 </a:solidFill>
                 <a:latin typeface="Malgun Gothic"/>
               </a:rPr>
-              <a:t>•  BLAST+ 2.5, evalue 1e-5, max_target_seqs 100</a:t>
+              <a:t>•  Same reaction, unrelated folds</a:t>
             </a:r>
           </a:p>
           <a:p>
@@ -9276,7 +10207,7 @@
                 <a:spcPct val="105000"/>
               </a:lnSpc>
               <a:spcAft>
-                <a:spcPts val="1000"/>
+                <a:spcPts val="1100"/>
               </a:spcAft>
             </a:pPr>
             <a:r>
@@ -9286,20 +10217,215 @@
                 </a:solidFill>
                 <a:latin typeface="Malgun Gothic"/>
               </a:rPr>
-              <a:t>•  Confirms the pipeline reproduces the existing result</a:t>
-            </a:r>
-          </a:p>
-        </p:txBody>
-      </p:sp>
-      <p:sp>
-        <p:nvSpPr>
-          <p:cNvPr id="9" name="Rounded Rectangle 8"/>
+              <a:t>•  Merging them models nothing</a:t>
+            </a:r>
+          </a:p>
+        </p:txBody>
+      </p:sp>
+      <p:sp>
+        <p:nvSpPr>
+          <p:cNvPr id="8" name="Rounded Rectangle 7"/>
           <p:cNvSpPr/>
           <p:nvPr/>
         </p:nvSpPr>
         <p:spPr>
           <a:xfrm>
-            <a:off x="658368" y="3611880"/>
+            <a:off x="6245352" y="1463040"/>
+            <a:ext cx="5294376" cy="2377440"/>
+          </a:xfrm>
+          <a:prstGeom prst="roundRect">
+            <a:avLst/>
+          </a:prstGeom>
+          <a:solidFill>
+            <a:srgbClr val="F1EEFA"/>
+          </a:solidFill>
+          <a:ln w="12700">
+            <a:solidFill>
+              <a:srgbClr val="F1EEFA"/>
+            </a:solidFill>
+          </a:ln>
+        </p:spPr>
+        <p:style>
+          <a:lnRef idx="1">
+            <a:schemeClr val="accent1"/>
+          </a:lnRef>
+          <a:fillRef idx="3">
+            <a:schemeClr val="accent1"/>
+          </a:fillRef>
+          <a:effectRef idx="2">
+            <a:schemeClr val="accent1"/>
+          </a:effectRef>
+          <a:fontRef idx="minor">
+            <a:schemeClr val="lt1"/>
+          </a:fontRef>
+        </p:style>
+        <p:txBody>
+          <a:bodyPr rtlCol="0" anchor="ctr"/>
+          <a:lstStyle/>
+          <a:p>
+            <a:pPr algn="ctr"/>
+          </a:p>
+        </p:txBody>
+      </p:sp>
+      <p:sp>
+        <p:nvSpPr>
+          <p:cNvPr id="9" name="TextBox 8"/>
+          <p:cNvSpPr txBox="1"/>
+          <p:nvPr/>
+        </p:nvSpPr>
+        <p:spPr>
+          <a:xfrm>
+            <a:off x="6519672" y="1719072"/>
+            <a:ext cx="4745736" cy="365760"/>
+          </a:xfrm>
+          <a:prstGeom prst="rect">
+            <a:avLst/>
+          </a:prstGeom>
+          <a:noFill/>
+        </p:spPr>
+        <p:txBody>
+          <a:bodyPr wrap="square" lIns="0" rIns="0" tIns="0" bIns="0" anchor="t">
+            <a:noAutofit/>
+          </a:bodyPr>
+          <a:lstStyle/>
+          <a:p>
+            <a:pPr algn="l"/>
+            <a:r>
+              <a:rPr sz="2000" b="1">
+                <a:solidFill>
+                  <a:srgbClr val="6554A4"/>
+                </a:solidFill>
+                <a:latin typeface="Malgun Gothic"/>
+              </a:rPr>
+              <a:t>One profile per cluster</a:t>
+            </a:r>
+          </a:p>
+        </p:txBody>
+      </p:sp>
+      <p:sp>
+        <p:nvSpPr>
+          <p:cNvPr id="10" name="TextBox 9"/>
+          <p:cNvSpPr txBox="1"/>
+          <p:nvPr/>
+        </p:nvSpPr>
+        <p:spPr>
+          <a:xfrm>
+            <a:off x="6519672" y="2240280"/>
+            <a:ext cx="4745736" cy="1371600"/>
+          </a:xfrm>
+          <a:prstGeom prst="rect">
+            <a:avLst/>
+          </a:prstGeom>
+          <a:noFill/>
+        </p:spPr>
+        <p:txBody>
+          <a:bodyPr wrap="square" lIns="18288" rIns="18288" tIns="18288" bIns="18288">
+            <a:noAutofit/>
+          </a:bodyPr>
+          <a:lstStyle/>
+          <a:p>
+            <a:pPr>
+              <a:lnSpc>
+                <a:spcPct val="105000"/>
+              </a:lnSpc>
+              <a:spcAft>
+                <a:spcPts val="1100"/>
+              </a:spcAft>
+            </a:pPr>
+            <a:r>
+              <a:rPr sz="1500">
+                <a:solidFill>
+                  <a:srgbClr val="18212B"/>
+                </a:solidFill>
+                <a:latin typeface="Malgun Gothic"/>
+              </a:rPr>
+              <a:t>•  MMseqs2, 35% identity / 80% coverage</a:t>
+            </a:r>
+          </a:p>
+          <a:p>
+            <a:pPr>
+              <a:lnSpc>
+                <a:spcPct val="105000"/>
+              </a:lnSpc>
+              <a:spcAft>
+                <a:spcPts val="1100"/>
+              </a:spcAft>
+            </a:pPr>
+            <a:r>
+              <a:rPr sz="1500">
+                <a:solidFill>
+                  <a:srgbClr val="18212B"/>
+                </a:solidFill>
+                <a:latin typeface="Malgun Gothic"/>
+              </a:rPr>
+              <a:t>•  QC gates, then MAFFT and hmmbuild</a:t>
+            </a:r>
+          </a:p>
+          <a:p>
+            <a:pPr>
+              <a:lnSpc>
+                <a:spcPct val="105000"/>
+              </a:lnSpc>
+              <a:spcAft>
+                <a:spcPts val="1100"/>
+              </a:spcAft>
+            </a:pPr>
+            <a:r>
+              <a:rPr sz="1500">
+                <a:solidFill>
+                  <a:srgbClr val="18212B"/>
+                </a:solidFill>
+                <a:latin typeface="Malgun Gothic"/>
+              </a:rPr>
+              <a:t>•  EC attached after, purity reported</a:t>
+            </a:r>
+          </a:p>
+        </p:txBody>
+      </p:sp>
+      <p:sp>
+        <p:nvSpPr>
+          <p:cNvPr id="11" name="TextBox 10"/>
+          <p:cNvSpPr txBox="1"/>
+          <p:nvPr/>
+        </p:nvSpPr>
+        <p:spPr>
+          <a:xfrm>
+            <a:off x="658368" y="4114800"/>
+            <a:ext cx="10881360" cy="310896"/>
+          </a:xfrm>
+          <a:prstGeom prst="rect">
+            <a:avLst/>
+          </a:prstGeom>
+          <a:noFill/>
+        </p:spPr>
+        <p:txBody>
+          <a:bodyPr wrap="square" lIns="0" rIns="0" tIns="0" bIns="0" anchor="t">
+            <a:noAutofit/>
+          </a:bodyPr>
+          <a:lstStyle/>
+          <a:p>
+            <a:pPr algn="l"/>
+            <a:r>
+              <a:rPr sz="1700" b="1">
+                <a:solidFill>
+                  <a:srgbClr val="18212B"/>
+                </a:solidFill>
+                <a:latin typeface="Malgun Gothic"/>
+              </a:rPr>
+              <a:t>One EC number, many sequence families</a:t>
+            </a:r>
+          </a:p>
+        </p:txBody>
+      </p:sp>
+      <p:sp>
+        <p:nvSpPr>
+          <p:cNvPr id="12" name="Rounded Rectangle 11"/>
+          <p:cNvSpPr/>
+          <p:nvPr/>
+        </p:nvSpPr>
+        <p:spPr>
+          <a:xfrm>
+            <a:off x="658368" y="4526280"/>
             <a:ext cx="3520440" cy="960120"/>
           </a:xfrm>
           <a:prstGeom prst="roundRect">
@@ -9338,24 +10464,24 @@
       </p:sp>
       <p:sp>
         <p:nvSpPr>
-          <p:cNvPr id="10" name="Rectangle 9"/>
+          <p:cNvPr id="13" name="Rectangle 12"/>
           <p:cNvSpPr/>
           <p:nvPr/>
         </p:nvSpPr>
         <p:spPr>
           <a:xfrm>
-            <a:off x="658368" y="3611880"/>
+            <a:off x="658368" y="4526280"/>
             <a:ext cx="82296" cy="960120"/>
           </a:xfrm>
           <a:prstGeom prst="rect">
             <a:avLst/>
           </a:prstGeom>
           <a:solidFill>
-            <a:srgbClr val="52565B"/>
+            <a:srgbClr val="6554A4"/>
           </a:solidFill>
           <a:ln>
             <a:solidFill>
-              <a:srgbClr val="52565B"/>
+              <a:srgbClr val="6554A4"/>
             </a:solidFill>
           </a:ln>
         </p:spPr>
@@ -9383,13 +10509,13 @@
       </p:sp>
       <p:sp>
         <p:nvSpPr>
-          <p:cNvPr id="11" name="TextBox 10"/>
+          <p:cNvPr id="14" name="TextBox 13"/>
           <p:cNvSpPr txBox="1"/>
           <p:nvPr/>
         </p:nvSpPr>
         <p:spPr>
           <a:xfrm>
-            <a:off x="886968" y="3758184"/>
+            <a:off x="886968" y="4672584"/>
             <a:ext cx="3154680" cy="402336"/>
           </a:xfrm>
           <a:prstGeom prst="rect">
@@ -9407,24 +10533,24 @@
             <a:r>
               <a:rPr sz="2600" b="1">
                 <a:solidFill>
-                  <a:srgbClr val="52565B"/>
-                </a:solidFill>
-                <a:latin typeface="Malgun Gothic"/>
-              </a:rPr>
-              <a:t>450 / 452</a:t>
-            </a:r>
-          </a:p>
-        </p:txBody>
-      </p:sp>
-      <p:sp>
-        <p:nvSpPr>
-          <p:cNvPr id="12" name="TextBox 11"/>
+                  <a:srgbClr val="6554A4"/>
+                </a:solidFill>
+                <a:latin typeface="Malgun Gothic"/>
+              </a:rPr>
+              <a:t>13</a:t>
+            </a:r>
+          </a:p>
+        </p:txBody>
+      </p:sp>
+      <p:sp>
+        <p:nvSpPr>
+          <p:cNvPr id="15" name="TextBox 14"/>
           <p:cNvSpPr txBox="1"/>
           <p:nvPr/>
         </p:nvSpPr>
         <p:spPr>
           <a:xfrm>
-            <a:off x="886968" y="4215384"/>
+            <a:off x="886968" y="5129784"/>
             <a:ext cx="3154680" cy="237744"/>
           </a:xfrm>
           <a:prstGeom prst="rect">
@@ -9446,20 +10572,20 @@
                 </a:solidFill>
                 <a:latin typeface="Malgun Gothic"/>
               </a:rPr>
-              <a:t>same top-25 subject set</a:t>
-            </a:r>
-          </a:p>
-        </p:txBody>
-      </p:sp>
-      <p:sp>
-        <p:nvSpPr>
-          <p:cNvPr id="13" name="Rounded Rectangle 12"/>
+              <a:t>glutathione transferase</a:t>
+            </a:r>
+          </a:p>
+        </p:txBody>
+      </p:sp>
+      <p:sp>
+        <p:nvSpPr>
+          <p:cNvPr id="16" name="Rounded Rectangle 15"/>
           <p:cNvSpPr/>
           <p:nvPr/>
         </p:nvSpPr>
         <p:spPr>
           <a:xfrm>
-            <a:off x="4334256" y="3611880"/>
+            <a:off x="4334256" y="4526280"/>
             <a:ext cx="3520440" cy="960120"/>
           </a:xfrm>
           <a:prstGeom prst="roundRect">
@@ -9498,24 +10624,24 @@
       </p:sp>
       <p:sp>
         <p:nvSpPr>
-          <p:cNvPr id="14" name="Rectangle 13"/>
+          <p:cNvPr id="17" name="Rectangle 16"/>
           <p:cNvSpPr/>
           <p:nvPr/>
         </p:nvSpPr>
         <p:spPr>
           <a:xfrm>
-            <a:off x="4334256" y="3611880"/>
+            <a:off x="4334256" y="4526280"/>
             <a:ext cx="82296" cy="960120"/>
           </a:xfrm>
           <a:prstGeom prst="rect">
             <a:avLst/>
           </a:prstGeom>
           <a:solidFill>
-            <a:srgbClr val="52565B"/>
+            <a:srgbClr val="6554A4"/>
           </a:solidFill>
           <a:ln>
             <a:solidFill>
-              <a:srgbClr val="52565B"/>
+              <a:srgbClr val="6554A4"/>
             </a:solidFill>
           </a:ln>
         </p:spPr>
@@ -9543,13 +10669,13 @@
       </p:sp>
       <p:sp>
         <p:nvSpPr>
-          <p:cNvPr id="15" name="TextBox 14"/>
+          <p:cNvPr id="18" name="TextBox 17"/>
           <p:cNvSpPr txBox="1"/>
           <p:nvPr/>
         </p:nvSpPr>
         <p:spPr>
           <a:xfrm>
-            <a:off x="4562856" y="3758184"/>
+            <a:off x="4562856" y="4672584"/>
             <a:ext cx="3154680" cy="402336"/>
           </a:xfrm>
           <a:prstGeom prst="rect">
@@ -9567,24 +10693,24 @@
             <a:r>
               <a:rPr sz="2600" b="1">
                 <a:solidFill>
-                  <a:srgbClr val="52565B"/>
-                </a:solidFill>
-                <a:latin typeface="Malgun Gothic"/>
-              </a:rPr>
-              <a:t>447 / 452</a:t>
-            </a:r>
-          </a:p>
-        </p:txBody>
-      </p:sp>
-      <p:sp>
-        <p:nvSpPr>
-          <p:cNvPr id="16" name="TextBox 15"/>
+                  <a:srgbClr val="6554A4"/>
+                </a:solidFill>
+                <a:latin typeface="Malgun Gothic"/>
+              </a:rPr>
+              <a:t>4</a:t>
+            </a:r>
+          </a:p>
+        </p:txBody>
+      </p:sp>
+      <p:sp>
+        <p:nvSpPr>
+          <p:cNvPr id="19" name="TextBox 18"/>
           <p:cNvSpPr txBox="1"/>
           <p:nvPr/>
         </p:nvSpPr>
         <p:spPr>
           <a:xfrm>
-            <a:off x="4562856" y="4215384"/>
+            <a:off x="4562856" y="5129784"/>
             <a:ext cx="3154680" cy="237744"/>
           </a:xfrm>
           <a:prstGeom prst="rect">
@@ -9606,20 +10732,20 @@
                 </a:solidFill>
                 <a:latin typeface="Malgun Gothic"/>
               </a:rPr>
-              <a:t>same top score</a:t>
-            </a:r>
-          </a:p>
-        </p:txBody>
-      </p:sp>
-      <p:sp>
-        <p:nvSpPr>
-          <p:cNvPr id="17" name="Rounded Rectangle 16"/>
+              <a:t>carbonic anhydrase</a:t>
+            </a:r>
+          </a:p>
+        </p:txBody>
+      </p:sp>
+      <p:sp>
+        <p:nvSpPr>
+          <p:cNvPr id="20" name="Rounded Rectangle 19"/>
           <p:cNvSpPr/>
           <p:nvPr/>
         </p:nvSpPr>
         <p:spPr>
           <a:xfrm>
-            <a:off x="8010144" y="3611880"/>
+            <a:off x="8010144" y="4526280"/>
             <a:ext cx="3520440" cy="960120"/>
           </a:xfrm>
           <a:prstGeom prst="roundRect">
@@ -9658,24 +10784,24 @@
       </p:sp>
       <p:sp>
         <p:nvSpPr>
-          <p:cNvPr id="18" name="Rectangle 17"/>
+          <p:cNvPr id="21" name="Rectangle 20"/>
           <p:cNvSpPr/>
           <p:nvPr/>
         </p:nvSpPr>
         <p:spPr>
           <a:xfrm>
-            <a:off x="8010144" y="3611880"/>
+            <a:off x="8010144" y="4526280"/>
             <a:ext cx="82296" cy="960120"/>
           </a:xfrm>
           <a:prstGeom prst="rect">
             <a:avLst/>
           </a:prstGeom>
           <a:solidFill>
-            <a:srgbClr val="167C5A"/>
+            <a:srgbClr val="6554A4"/>
           </a:solidFill>
           <a:ln>
             <a:solidFill>
-              <a:srgbClr val="167C5A"/>
+              <a:srgbClr val="6554A4"/>
             </a:solidFill>
           </a:ln>
         </p:spPr>
@@ -9703,13 +10829,13 @@
       </p:sp>
       <p:sp>
         <p:nvSpPr>
-          <p:cNvPr id="19" name="TextBox 18"/>
+          <p:cNvPr id="22" name="TextBox 21"/>
           <p:cNvSpPr txBox="1"/>
           <p:nvPr/>
         </p:nvSpPr>
         <p:spPr>
           <a:xfrm>
-            <a:off x="8238744" y="3758184"/>
+            <a:off x="8238744" y="4672584"/>
             <a:ext cx="3154680" cy="402336"/>
           </a:xfrm>
           <a:prstGeom prst="rect">
@@ -9727,24 +10853,24 @@
             <a:r>
               <a:rPr sz="2600" b="1">
                 <a:solidFill>
-                  <a:srgbClr val="167C5A"/>
-                </a:solidFill>
-                <a:latin typeface="Malgun Gothic"/>
-              </a:rPr>
-              <a:t>0</a:t>
-            </a:r>
-          </a:p>
-        </p:txBody>
-      </p:sp>
-      <p:sp>
-        <p:nvSpPr>
-          <p:cNvPr id="20" name="TextBox 19"/>
+                  <a:srgbClr val="6554A4"/>
+                </a:solidFill>
+                <a:latin typeface="Malgun Gothic"/>
+              </a:rPr>
+              <a:t>5</a:t>
+            </a:r>
+          </a:p>
+        </p:txBody>
+      </p:sp>
+      <p:sp>
+        <p:nvSpPr>
+          <p:cNvPr id="23" name="TextBox 22"/>
           <p:cNvSpPr txBox="1"/>
           <p:nvPr/>
         </p:nvSpPr>
         <p:spPr>
           <a:xfrm>
-            <a:off x="8238744" y="4215384"/>
+            <a:off x="8238744" y="5129784"/>
             <a:ext cx="3154680" cy="237744"/>
           </a:xfrm>
           <a:prstGeom prst="rect">
@@ -9766,31 +10892,31 @@
                 </a:solidFill>
                 <a:latin typeface="Malgun Gothic"/>
               </a:rPr>
-              <a:t>provenance mismatches</a:t>
-            </a:r>
-          </a:p>
-        </p:txBody>
-      </p:sp>
-      <p:sp>
-        <p:nvSpPr>
-          <p:cNvPr id="21" name="Rounded Rectangle 20"/>
+              <a:t>superoxide dismutase</a:t>
+            </a:r>
+          </a:p>
+        </p:txBody>
+      </p:sp>
+      <p:sp>
+        <p:nvSpPr>
+          <p:cNvPr id="24" name="Rounded Rectangle 23"/>
           <p:cNvSpPr/>
           <p:nvPr/>
         </p:nvSpPr>
         <p:spPr>
           <a:xfrm>
-            <a:off x="658368" y="4892040"/>
-            <a:ext cx="10881360" cy="1051560"/>
+            <a:off x="658368" y="5715000"/>
+            <a:ext cx="10881360" cy="502920"/>
           </a:xfrm>
           <a:prstGeom prst="roundRect">
             <a:avLst/>
           </a:prstGeom>
           <a:solidFill>
-            <a:srgbClr val="FFF5DF"/>
+            <a:srgbClr val="EAF6F1"/>
           </a:solidFill>
           <a:ln w="12700">
             <a:solidFill>
-              <a:srgbClr val="FFF5DF"/>
+              <a:srgbClr val="EAF6F1"/>
             </a:solidFill>
           </a:ln>
         </p:spPr>
@@ -9818,14 +10944,14 @@
       </p:sp>
       <p:sp>
         <p:nvSpPr>
-          <p:cNvPr id="22" name="TextBox 21"/>
+          <p:cNvPr id="25" name="TextBox 24"/>
           <p:cNvSpPr txBox="1"/>
           <p:nvPr/>
         </p:nvSpPr>
         <p:spPr>
           <a:xfrm>
-            <a:off x="658368" y="5102352"/>
-            <a:ext cx="10881360" cy="310896"/>
+            <a:off x="658368" y="5852160"/>
+            <a:ext cx="10881360" cy="274320"/>
           </a:xfrm>
           <a:prstGeom prst="rect">
             <a:avLst/>
@@ -9840,48 +10966,13 @@
           <a:p>
             <a:pPr algn="ctr"/>
             <a:r>
-              <a:rPr sz="1700" b="1">
-                <a:solidFill>
-                  <a:srgbClr val="A76500"/>
-                </a:solidFill>
-                <a:latin typeface="Malgun Gothic"/>
-              </a:rPr>
-              <a:t>This is a correctness check, not an accuracy measurement</a:t>
-            </a:r>
-          </a:p>
-        </p:txBody>
-      </p:sp>
-      <p:sp>
-        <p:nvSpPr>
-          <p:cNvPr id="23" name="TextBox 22"/>
-          <p:cNvSpPr txBox="1"/>
-          <p:nvPr/>
-        </p:nvSpPr>
-        <p:spPr>
-          <a:xfrm>
-            <a:off x="658368" y="5468112"/>
-            <a:ext cx="10881360" cy="274320"/>
-          </a:xfrm>
-          <a:prstGeom prst="rect">
-            <a:avLst/>
-          </a:prstGeom>
-          <a:noFill/>
-        </p:spPr>
-        <p:txBody>
-          <a:bodyPr wrap="square" lIns="0" rIns="0" tIns="0" bIns="0" anchor="t">
-            <a:noAutofit/>
-          </a:bodyPr>
-          <a:lstStyle/>
-          <a:p>
-            <a:pPr algn="ctr"/>
-            <a:r>
-              <a:rPr sz="1350" b="0">
-                <a:solidFill>
-                  <a:srgbClr val="A76500"/>
-                </a:solidFill>
-                <a:latin typeface="Malgun Gothic"/>
-              </a:rPr>
-              <a:t>EC agreement was measured separately, on a narrow leakage-controlled slice</a:t>
+              <a:rPr sz="1350" b="1">
+                <a:solidFill>
+                  <a:srgbClr val="167C5A"/>
+                </a:solidFill>
+                <a:latin typeface="Malgun Gothic"/>
+              </a:rPr>
+              <a:t>A human Mn-SOD query matches only the Mn/Fe families, none of the Cu/Zn ones</a:t>
             </a:r>
           </a:p>
         </p:txBody>
@@ -9979,7 +11070,7 @@
                 </a:solidFill>
                 <a:latin typeface="Malgun Gothic"/>
               </a:rPr>
-              <a:t>Rebuilt on real Swiss-Prot and PDB data</a:t>
+              <a:t>Validation against the existing BLAST run</a:t>
             </a:r>
           </a:p>
         </p:txBody>
@@ -10027,7 +11118,202 @@
         </p:nvSpPr>
         <p:spPr>
           <a:xfrm>
-            <a:off x="658368" y="1508760"/>
+            <a:off x="658368" y="1554480"/>
+            <a:ext cx="10881360" cy="1691640"/>
+          </a:xfrm>
+          <a:prstGeom prst="roundRect">
+            <a:avLst/>
+          </a:prstGeom>
+          <a:solidFill>
+            <a:srgbClr val="EAF4F7"/>
+          </a:solidFill>
+          <a:ln w="12700">
+            <a:solidFill>
+              <a:srgbClr val="EAF4F7"/>
+            </a:solidFill>
+          </a:ln>
+        </p:spPr>
+        <p:style>
+          <a:lnRef idx="1">
+            <a:schemeClr val="accent1"/>
+          </a:lnRef>
+          <a:fillRef idx="3">
+            <a:schemeClr val="accent1"/>
+          </a:fillRef>
+          <a:effectRef idx="2">
+            <a:schemeClr val="accent1"/>
+          </a:effectRef>
+          <a:fontRef idx="minor">
+            <a:schemeClr val="lt1"/>
+          </a:fontRef>
+        </p:style>
+        <p:txBody>
+          <a:bodyPr rtlCol="0" anchor="ctr"/>
+          <a:lstStyle/>
+          <a:p>
+            <a:pPr algn="ctr"/>
+          </a:p>
+        </p:txBody>
+      </p:sp>
+      <p:sp>
+        <p:nvSpPr>
+          <p:cNvPr id="6" name="TextBox 5"/>
+          <p:cNvSpPr txBox="1"/>
+          <p:nvPr/>
+        </p:nvSpPr>
+        <p:spPr>
+          <a:xfrm>
+            <a:off x="1005840" y="1828800"/>
+            <a:ext cx="3840480" cy="822960"/>
+          </a:xfrm>
+          <a:prstGeom prst="rect">
+            <a:avLst/>
+          </a:prstGeom>
+          <a:noFill/>
+        </p:spPr>
+        <p:txBody>
+          <a:bodyPr wrap="square" lIns="0" rIns="0" tIns="0" bIns="0" anchor="t">
+            <a:noAutofit/>
+          </a:bodyPr>
+          <a:lstStyle/>
+          <a:p>
+            <a:pPr algn="l"/>
+            <a:r>
+              <a:rPr sz="5400" b="1">
+                <a:solidFill>
+                  <a:srgbClr val="176B87"/>
+                </a:solidFill>
+                <a:latin typeface="Malgun Gothic"/>
+              </a:rPr>
+              <a:t>452 / 452</a:t>
+            </a:r>
+          </a:p>
+        </p:txBody>
+      </p:sp>
+      <p:sp>
+        <p:nvSpPr>
+          <p:cNvPr id="7" name="TextBox 6"/>
+          <p:cNvSpPr txBox="1"/>
+          <p:nvPr/>
+        </p:nvSpPr>
+        <p:spPr>
+          <a:xfrm>
+            <a:off x="1051560" y="2670048"/>
+            <a:ext cx="3840480" cy="365760"/>
+          </a:xfrm>
+          <a:prstGeom prst="rect">
+            <a:avLst/>
+          </a:prstGeom>
+          <a:noFill/>
+        </p:spPr>
+        <p:txBody>
+          <a:bodyPr wrap="square" lIns="0" rIns="0" tIns="0" bIns="0" anchor="t">
+            <a:noAutofit/>
+          </a:bodyPr>
+          <a:lstStyle/>
+          <a:p>
+            <a:pPr algn="l"/>
+            <a:r>
+              <a:rPr sz="1700" b="1">
+                <a:solidFill>
+                  <a:srgbClr val="176B87"/>
+                </a:solidFill>
+                <a:latin typeface="Malgun Gothic"/>
+              </a:rPr>
+              <a:t>identical top hit</a:t>
+            </a:r>
+          </a:p>
+        </p:txBody>
+      </p:sp>
+      <p:sp>
+        <p:nvSpPr>
+          <p:cNvPr id="8" name="TextBox 7"/>
+          <p:cNvSpPr txBox="1"/>
+          <p:nvPr/>
+        </p:nvSpPr>
+        <p:spPr>
+          <a:xfrm>
+            <a:off x="5120640" y="1965960"/>
+            <a:ext cx="6217920" cy="1188720"/>
+          </a:xfrm>
+          <a:prstGeom prst="rect">
+            <a:avLst/>
+          </a:prstGeom>
+          <a:noFill/>
+        </p:spPr>
+        <p:txBody>
+          <a:bodyPr wrap="square" lIns="18288" rIns="18288" tIns="18288" bIns="18288">
+            <a:noAutofit/>
+          </a:bodyPr>
+          <a:lstStyle/>
+          <a:p>
+            <a:pPr>
+              <a:lnSpc>
+                <a:spcPct val="105000"/>
+              </a:lnSpc>
+              <a:spcAft>
+                <a:spcPts val="1000"/>
+              </a:spcAft>
+            </a:pPr>
+            <a:r>
+              <a:rPr sz="1500">
+                <a:solidFill>
+                  <a:srgbClr val="18212B"/>
+                </a:solidFill>
+                <a:latin typeface="Malgun Gothic"/>
+              </a:rPr>
+              <a:t>•  Beomsu's query set, his parameters</a:t>
+            </a:r>
+          </a:p>
+          <a:p>
+            <a:pPr>
+              <a:lnSpc>
+                <a:spcPct val="105000"/>
+              </a:lnSpc>
+              <a:spcAft>
+                <a:spcPts val="1000"/>
+              </a:spcAft>
+            </a:pPr>
+            <a:r>
+              <a:rPr sz="1500">
+                <a:solidFill>
+                  <a:srgbClr val="18212B"/>
+                </a:solidFill>
+                <a:latin typeface="Malgun Gothic"/>
+              </a:rPr>
+              <a:t>•  BLAST+ 2.5, evalue 1e-5, max_target_seqs 100</a:t>
+            </a:r>
+          </a:p>
+          <a:p>
+            <a:pPr>
+              <a:lnSpc>
+                <a:spcPct val="105000"/>
+              </a:lnSpc>
+              <a:spcAft>
+                <a:spcPts val="1000"/>
+              </a:spcAft>
+            </a:pPr>
+            <a:r>
+              <a:rPr sz="1500">
+                <a:solidFill>
+                  <a:srgbClr val="18212B"/>
+                </a:solidFill>
+                <a:latin typeface="Malgun Gothic"/>
+              </a:rPr>
+              <a:t>•  Confirms the pipeline reproduces the existing result</a:t>
+            </a:r>
+          </a:p>
+        </p:txBody>
+      </p:sp>
+      <p:sp>
+        <p:nvSpPr>
+          <p:cNvPr id="9" name="Rounded Rectangle 8"/>
+          <p:cNvSpPr/>
+          <p:nvPr/>
+        </p:nvSpPr>
+        <p:spPr>
+          <a:xfrm>
+            <a:off x="658368" y="3611880"/>
             <a:ext cx="3520440" cy="960120"/>
           </a:xfrm>
           <a:prstGeom prst="roundRect">
@@ -10066,24 +11352,24 @@
       </p:sp>
       <p:sp>
         <p:nvSpPr>
-          <p:cNvPr id="6" name="Rectangle 5"/>
+          <p:cNvPr id="10" name="Rectangle 9"/>
           <p:cNvSpPr/>
           <p:nvPr/>
         </p:nvSpPr>
         <p:spPr>
           <a:xfrm>
-            <a:off x="658368" y="1508760"/>
+            <a:off x="658368" y="3611880"/>
             <a:ext cx="82296" cy="960120"/>
           </a:xfrm>
           <a:prstGeom prst="rect">
             <a:avLst/>
           </a:prstGeom>
           <a:solidFill>
-            <a:srgbClr val="B71A1A"/>
+            <a:srgbClr val="52565B"/>
           </a:solidFill>
           <a:ln>
             <a:solidFill>
-              <a:srgbClr val="B71A1A"/>
+              <a:srgbClr val="52565B"/>
             </a:solidFill>
           </a:ln>
         </p:spPr>
@@ -10111,13 +11397,13 @@
       </p:sp>
       <p:sp>
         <p:nvSpPr>
-          <p:cNvPr id="7" name="TextBox 6"/>
+          <p:cNvPr id="11" name="TextBox 10"/>
           <p:cNvSpPr txBox="1"/>
           <p:nvPr/>
         </p:nvSpPr>
         <p:spPr>
           <a:xfrm>
-            <a:off x="886968" y="1655063"/>
+            <a:off x="886968" y="3758184"/>
             <a:ext cx="3154680" cy="402336"/>
           </a:xfrm>
           <a:prstGeom prst="rect">
@@ -10135,24 +11421,24 @@
             <a:r>
               <a:rPr sz="2600" b="1">
                 <a:solidFill>
-                  <a:srgbClr val="B71A1A"/>
-                </a:solidFill>
-                <a:latin typeface="Malgun Gothic"/>
-              </a:rPr>
-              <a:t>272,112</a:t>
-            </a:r>
-          </a:p>
-        </p:txBody>
-      </p:sp>
-      <p:sp>
-        <p:nvSpPr>
-          <p:cNvPr id="8" name="TextBox 7"/>
+                  <a:srgbClr val="52565B"/>
+                </a:solidFill>
+                <a:latin typeface="Malgun Gothic"/>
+              </a:rPr>
+              <a:t>450 / 452</a:t>
+            </a:r>
+          </a:p>
+        </p:txBody>
+      </p:sp>
+      <p:sp>
+        <p:nvSpPr>
+          <p:cNvPr id="12" name="TextBox 11"/>
           <p:cNvSpPr txBox="1"/>
           <p:nvPr/>
         </p:nvSpPr>
         <p:spPr>
           <a:xfrm>
-            <a:off x="886968" y="2112264"/>
+            <a:off x="886968" y="4215384"/>
             <a:ext cx="3154680" cy="237744"/>
           </a:xfrm>
           <a:prstGeom prst="rect">
@@ -10174,20 +11460,20 @@
                 </a:solidFill>
                 <a:latin typeface="Malgun Gothic"/>
               </a:rPr>
-              <a:t>references built</a:t>
-            </a:r>
-          </a:p>
-        </p:txBody>
-      </p:sp>
-      <p:sp>
-        <p:nvSpPr>
-          <p:cNvPr id="9" name="Rounded Rectangle 8"/>
+              <a:t>same top-25 subject set</a:t>
+            </a:r>
+          </a:p>
+        </p:txBody>
+      </p:sp>
+      <p:sp>
+        <p:nvSpPr>
+          <p:cNvPr id="13" name="Rounded Rectangle 12"/>
           <p:cNvSpPr/>
           <p:nvPr/>
         </p:nvSpPr>
         <p:spPr>
           <a:xfrm>
-            <a:off x="4334256" y="1508760"/>
+            <a:off x="4334256" y="3611880"/>
             <a:ext cx="3520440" cy="960120"/>
           </a:xfrm>
           <a:prstGeom prst="roundRect">
@@ -10226,13 +11512,13 @@
       </p:sp>
       <p:sp>
         <p:nvSpPr>
-          <p:cNvPr id="10" name="Rectangle 9"/>
+          <p:cNvPr id="14" name="Rectangle 13"/>
           <p:cNvSpPr/>
           <p:nvPr/>
         </p:nvSpPr>
         <p:spPr>
           <a:xfrm>
-            <a:off x="4334256" y="1508760"/>
+            <a:off x="4334256" y="3611880"/>
             <a:ext cx="82296" cy="960120"/>
           </a:xfrm>
           <a:prstGeom prst="rect">
@@ -10271,13 +11557,13 @@
       </p:sp>
       <p:sp>
         <p:nvSpPr>
-          <p:cNvPr id="11" name="TextBox 10"/>
+          <p:cNvPr id="15" name="TextBox 14"/>
           <p:cNvSpPr txBox="1"/>
           <p:nvPr/>
         </p:nvSpPr>
         <p:spPr>
           <a:xfrm>
-            <a:off x="4562856" y="1655063"/>
+            <a:off x="4562856" y="3758184"/>
             <a:ext cx="3154680" cy="402336"/>
           </a:xfrm>
           <a:prstGeom prst="rect">
@@ -10299,20 +11585,20 @@
                 </a:solidFill>
                 <a:latin typeface="Malgun Gothic"/>
               </a:rPr>
-              <a:t>4.5 min</a:t>
-            </a:r>
-          </a:p>
-        </p:txBody>
-      </p:sp>
-      <p:sp>
-        <p:nvSpPr>
-          <p:cNvPr id="12" name="TextBox 11"/>
+              <a:t>447 / 452</a:t>
+            </a:r>
+          </a:p>
+        </p:txBody>
+      </p:sp>
+      <p:sp>
+        <p:nvSpPr>
+          <p:cNvPr id="16" name="TextBox 15"/>
           <p:cNvSpPr txBox="1"/>
           <p:nvPr/>
         </p:nvSpPr>
         <p:spPr>
           <a:xfrm>
-            <a:off x="4562856" y="2112264"/>
+            <a:off x="4562856" y="4215384"/>
             <a:ext cx="3154680" cy="237744"/>
           </a:xfrm>
           <a:prstGeom prst="rect">
@@ -10334,20 +11620,20 @@
                 </a:solidFill>
                 <a:latin typeface="Malgun Gothic"/>
               </a:rPr>
-              <a:t>offline build</a:t>
-            </a:r>
-          </a:p>
-        </p:txBody>
-      </p:sp>
-      <p:sp>
-        <p:nvSpPr>
-          <p:cNvPr id="13" name="Rounded Rectangle 12"/>
+              <a:t>same top score</a:t>
+            </a:r>
+          </a:p>
+        </p:txBody>
+      </p:sp>
+      <p:sp>
+        <p:nvSpPr>
+          <p:cNvPr id="17" name="Rounded Rectangle 16"/>
           <p:cNvSpPr/>
           <p:nvPr/>
         </p:nvSpPr>
         <p:spPr>
           <a:xfrm>
-            <a:off x="8010144" y="1508760"/>
+            <a:off x="8010144" y="3611880"/>
             <a:ext cx="3520440" cy="960120"/>
           </a:xfrm>
           <a:prstGeom prst="roundRect">
@@ -10386,13 +11672,13 @@
       </p:sp>
       <p:sp>
         <p:nvSpPr>
-          <p:cNvPr id="14" name="Rectangle 13"/>
+          <p:cNvPr id="18" name="Rectangle 17"/>
           <p:cNvSpPr/>
           <p:nvPr/>
         </p:nvSpPr>
         <p:spPr>
           <a:xfrm>
-            <a:off x="8010144" y="1508760"/>
+            <a:off x="8010144" y="3611880"/>
             <a:ext cx="82296" cy="960120"/>
           </a:xfrm>
           <a:prstGeom prst="rect">
@@ -10431,13 +11717,13 @@
       </p:sp>
       <p:sp>
         <p:nvSpPr>
-          <p:cNvPr id="15" name="TextBox 14"/>
+          <p:cNvPr id="19" name="TextBox 18"/>
           <p:cNvSpPr txBox="1"/>
           <p:nvPr/>
         </p:nvSpPr>
         <p:spPr>
           <a:xfrm>
-            <a:off x="8238744" y="1655063"/>
+            <a:off x="8238744" y="3758184"/>
             <a:ext cx="3154680" cy="402336"/>
           </a:xfrm>
           <a:prstGeom prst="rect">
@@ -10466,13 +11752,13 @@
       </p:sp>
       <p:sp>
         <p:nvSpPr>
-          <p:cNvPr id="16" name="TextBox 15"/>
+          <p:cNvPr id="20" name="TextBox 19"/>
           <p:cNvSpPr txBox="1"/>
           <p:nvPr/>
         </p:nvSpPr>
         <p:spPr>
           <a:xfrm>
-            <a:off x="8238744" y="2112264"/>
+            <a:off x="8238744" y="4215384"/>
             <a:ext cx="3154680" cy="237744"/>
           </a:xfrm>
           <a:prstGeom prst="rect">
@@ -10494,56 +11780,21 @@
                 </a:solidFill>
                 <a:latin typeface="Malgun Gothic"/>
               </a:rPr>
-              <a:t>search code changes</a:t>
-            </a:r>
-          </a:p>
-        </p:txBody>
-      </p:sp>
-      <p:sp>
-        <p:nvSpPr>
-          <p:cNvPr id="17" name="TextBox 16"/>
-          <p:cNvSpPr txBox="1"/>
-          <p:nvPr/>
-        </p:nvSpPr>
-        <p:spPr>
-          <a:xfrm>
-            <a:off x="658368" y="2633472"/>
-            <a:ext cx="10881360" cy="274320"/>
-          </a:xfrm>
-          <a:prstGeom prst="rect">
-            <a:avLst/>
-          </a:prstGeom>
-          <a:noFill/>
-        </p:spPr>
-        <p:txBody>
-          <a:bodyPr wrap="square" lIns="0" rIns="0" tIns="0" bIns="0" anchor="t">
-            <a:noAutofit/>
-          </a:bodyPr>
-          <a:lstStyle/>
-          <a:p>
-            <a:pPr algn="ctr"/>
-            <a:r>
-              <a:rPr sz="1250" b="0">
-                <a:solidFill>
-                  <a:srgbClr val="667085"/>
-                </a:solidFill>
-                <a:latin typeface="Malgun Gothic"/>
-              </a:rPr>
-              <a:t>231,577 Swiss-Prot  ·  40,535 PDB  ·  blastp 1.8 s and phmmer 7.1 s per query</a:t>
-            </a:r>
-          </a:p>
-        </p:txBody>
-      </p:sp>
-      <p:sp>
-        <p:nvSpPr>
-          <p:cNvPr id="18" name="Rounded Rectangle 17"/>
+              <a:t>provenance mismatches</a:t>
+            </a:r>
+          </a:p>
+        </p:txBody>
+      </p:sp>
+      <p:sp>
+        <p:nvSpPr>
+          <p:cNvPr id="21" name="Rounded Rectangle 20"/>
           <p:cNvSpPr/>
           <p:nvPr/>
         </p:nvSpPr>
         <p:spPr>
           <a:xfrm>
-            <a:off x="658368" y="3063240"/>
-            <a:ext cx="5285232" cy="2788920"/>
+            <a:off x="658368" y="4892040"/>
+            <a:ext cx="10881360" cy="1051560"/>
           </a:xfrm>
           <a:prstGeom prst="roundRect">
             <a:avLst/>
@@ -10581,14 +11832,14 @@
       </p:sp>
       <p:sp>
         <p:nvSpPr>
-          <p:cNvPr id="19" name="TextBox 18"/>
+          <p:cNvPr id="22" name="TextBox 21"/>
           <p:cNvSpPr txBox="1"/>
           <p:nvPr/>
         </p:nvSpPr>
         <p:spPr>
           <a:xfrm>
-            <a:off x="932688" y="3319272"/>
-            <a:ext cx="4736592" cy="365760"/>
+            <a:off x="658368" y="5102352"/>
+            <a:ext cx="10881360" cy="310896"/>
           </a:xfrm>
           <a:prstGeom prst="rect">
             <a:avLst/>
@@ -10601,173 +11852,29 @@
           </a:bodyPr>
           <a:lstStyle/>
           <a:p>
-            <a:pPr algn="l"/>
-            <a:r>
-              <a:rPr sz="2000" b="1">
+            <a:pPr algn="ctr"/>
+            <a:r>
+              <a:rPr sz="1700" b="1">
                 <a:solidFill>
                   <a:srgbClr val="A76500"/>
                 </a:solidFill>
                 <a:latin typeface="Malgun Gothic"/>
               </a:rPr>
-              <a:t>What real data exposed</a:t>
-            </a:r>
-          </a:p>
-        </p:txBody>
-      </p:sp>
-      <p:sp>
-        <p:nvSpPr>
-          <p:cNvPr id="20" name="TextBox 19"/>
+              <a:t>This is a correctness check, not an accuracy measurement</a:t>
+            </a:r>
+          </a:p>
+        </p:txBody>
+      </p:sp>
+      <p:sp>
+        <p:nvSpPr>
+          <p:cNvPr id="23" name="TextBox 22"/>
           <p:cNvSpPr txBox="1"/>
           <p:nvPr/>
         </p:nvSpPr>
         <p:spPr>
           <a:xfrm>
-            <a:off x="932688" y="3840480"/>
-            <a:ext cx="4736592" cy="1783079"/>
-          </a:xfrm>
-          <a:prstGeom prst="rect">
-            <a:avLst/>
-          </a:prstGeom>
-          <a:noFill/>
-        </p:spPr>
-        <p:txBody>
-          <a:bodyPr wrap="square" lIns="18288" rIns="18288" tIns="18288" bIns="18288">
-            <a:noAutofit/>
-          </a:bodyPr>
-          <a:lstStyle/>
-          <a:p>
-            <a:pPr>
-              <a:lnSpc>
-                <a:spcPct val="105000"/>
-              </a:lnSpc>
-              <a:spcAft>
-                <a:spcPts val="1100"/>
-              </a:spcAft>
-            </a:pPr>
-            <a:r>
-              <a:rPr sz="1450">
-                <a:solidFill>
-                  <a:srgbClr val="18212B"/>
-                </a:solidFill>
-                <a:latin typeface="Malgun Gothic"/>
-              </a:rPr>
-              <a:t>•  GFP is not an enzyme, but returns 25 hits</a:t>
-            </a:r>
-          </a:p>
-          <a:p>
-            <a:pPr>
-              <a:lnSpc>
-                <a:spcPct val="105000"/>
-              </a:lnSpc>
-              <a:spcAft>
-                <a:spcPts val="1100"/>
-              </a:spcAft>
-            </a:pPr>
-            <a:r>
-              <a:rPr sz="1450">
-                <a:solidFill>
-                  <a:srgbClr val="18212B"/>
-                </a:solidFill>
-                <a:latin typeface="Malgun Gothic"/>
-              </a:rPr>
-              <a:t>•  All are PDB fusion constructs</a:t>
-            </a:r>
-          </a:p>
-          <a:p>
-            <a:pPr>
-              <a:lnSpc>
-                <a:spcPct val="105000"/>
-              </a:lnSpc>
-              <a:spcAft>
-                <a:spcPts val="1100"/>
-              </a:spcAft>
-            </a:pPr>
-            <a:r>
-              <a:rPr sz="1450">
-                <a:solidFill>
-                  <a:srgbClr val="18212B"/>
-                </a:solidFill>
-                <a:latin typeface="Malgun Gothic"/>
-              </a:rPr>
-              <a:t>•  15 carry an EC, 8 different values</a:t>
-            </a:r>
-          </a:p>
-          <a:p>
-            <a:pPr>
-              <a:lnSpc>
-                <a:spcPct val="105000"/>
-              </a:lnSpc>
-              <a:spcAft>
-                <a:spcPts val="1100"/>
-              </a:spcAft>
-            </a:pPr>
-            <a:r>
-              <a:rPr sz="1450">
-                <a:solidFill>
-                  <a:srgbClr val="18212B"/>
-                </a:solidFill>
-                <a:latin typeface="Malgun Gothic"/>
-              </a:rPr>
-              <a:t>•  None of them belong to GFP</a:t>
-            </a:r>
-          </a:p>
-        </p:txBody>
-      </p:sp>
-      <p:sp>
-        <p:nvSpPr>
-          <p:cNvPr id="21" name="Rounded Rectangle 20"/>
-          <p:cNvSpPr/>
-          <p:nvPr/>
-        </p:nvSpPr>
-        <p:spPr>
-          <a:xfrm>
-            <a:off x="6245352" y="3063240"/>
-            <a:ext cx="5294376" cy="2788920"/>
-          </a:xfrm>
-          <a:prstGeom prst="roundRect">
-            <a:avLst/>
-          </a:prstGeom>
-          <a:solidFill>
-            <a:srgbClr val="EAF4F7"/>
-          </a:solidFill>
-          <a:ln w="12700">
-            <a:solidFill>
-              <a:srgbClr val="EAF4F7"/>
-            </a:solidFill>
-          </a:ln>
-        </p:spPr>
-        <p:style>
-          <a:lnRef idx="1">
-            <a:schemeClr val="accent1"/>
-          </a:lnRef>
-          <a:fillRef idx="3">
-            <a:schemeClr val="accent1"/>
-          </a:fillRef>
-          <a:effectRef idx="2">
-            <a:schemeClr val="accent1"/>
-          </a:effectRef>
-          <a:fontRef idx="minor">
-            <a:schemeClr val="lt1"/>
-          </a:fontRef>
-        </p:style>
-        <p:txBody>
-          <a:bodyPr rtlCol="0" anchor="ctr"/>
-          <a:lstStyle/>
-          <a:p>
-            <a:pPr algn="ctr"/>
-          </a:p>
-        </p:txBody>
-      </p:sp>
-      <p:sp>
-        <p:nvSpPr>
-          <p:cNvPr id="22" name="TextBox 21"/>
-          <p:cNvSpPr txBox="1"/>
-          <p:nvPr/>
-        </p:nvSpPr>
-        <p:spPr>
-          <a:xfrm>
-            <a:off x="6519672" y="3319272"/>
-            <a:ext cx="4745736" cy="365760"/>
+            <a:off x="658368" y="5468112"/>
+            <a:ext cx="10881360" cy="274320"/>
           </a:xfrm>
           <a:prstGeom prst="rect">
             <a:avLst/>
@@ -10780,114 +11887,15 @@
           </a:bodyPr>
           <a:lstStyle/>
           <a:p>
-            <a:pPr algn="l"/>
-            <a:r>
-              <a:rPr sz="2000" b="1">
-                <a:solidFill>
-                  <a:srgbClr val="176B87"/>
-                </a:solidFill>
-                <a:latin typeface="Malgun Gothic"/>
-              </a:rPr>
-              <a:t>What already catches it</a:t>
-            </a:r>
-          </a:p>
-        </p:txBody>
-      </p:sp>
-      <p:sp>
-        <p:nvSpPr>
-          <p:cNvPr id="23" name="TextBox 22"/>
-          <p:cNvSpPr txBox="1"/>
-          <p:nvPr/>
-        </p:nvSpPr>
-        <p:spPr>
-          <a:xfrm>
-            <a:off x="6519672" y="3840480"/>
-            <a:ext cx="4745736" cy="1783079"/>
-          </a:xfrm>
-          <a:prstGeom prst="rect">
-            <a:avLst/>
-          </a:prstGeom>
-          <a:noFill/>
-        </p:spPr>
-        <p:txBody>
-          <a:bodyPr wrap="square" lIns="18288" rIns="18288" tIns="18288" bIns="18288">
-            <a:noAutofit/>
-          </a:bodyPr>
-          <a:lstStyle/>
-          <a:p>
-            <a:pPr>
-              <a:lnSpc>
-                <a:spcPct val="105000"/>
-              </a:lnSpc>
-              <a:spcAft>
-                <a:spcPts val="1100"/>
-              </a:spcAft>
-            </a:pPr>
-            <a:r>
-              <a:rPr sz="1450">
-                <a:solidFill>
-                  <a:srgbClr val="18212B"/>
-                </a:solidFill>
-                <a:latin typeface="Malgun Gothic"/>
-              </a:rPr>
-              <a:t>•  Query coverage 1.00, subject coverage 0.55</a:t>
-            </a:r>
-          </a:p>
-          <a:p>
-            <a:pPr>
-              <a:lnSpc>
-                <a:spcPct val="105000"/>
-              </a:lnSpc>
-              <a:spcAft>
-                <a:spcPts val="1100"/>
-              </a:spcAft>
-            </a:pPr>
-            <a:r>
-              <a:rPr sz="1450">
-                <a:solidFill>
-                  <a:srgbClr val="18212B"/>
-                </a:solidFill>
-                <a:latin typeface="Malgun Gothic"/>
-              </a:rPr>
-              <a:t>•  The gap is the fusion signature</a:t>
-            </a:r>
-          </a:p>
-          <a:p>
-            <a:pPr>
-              <a:lnSpc>
-                <a:spcPct val="105000"/>
-              </a:lnSpc>
-              <a:spcAft>
-                <a:spcPts val="1100"/>
-              </a:spcAft>
-            </a:pPr>
-            <a:r>
-              <a:rPr sz="1450">
-                <a:solidFill>
-                  <a:srgbClr val="18212B"/>
-                </a:solidFill>
-                <a:latin typeface="Malgun Gothic"/>
-              </a:rPr>
-              <a:t>•  Computed from merged HSP intervals</a:t>
-            </a:r>
-          </a:p>
-          <a:p>
-            <a:pPr>
-              <a:lnSpc>
-                <a:spcPct val="105000"/>
-              </a:lnSpc>
-              <a:spcAft>
-                <a:spcPts val="1100"/>
-              </a:spcAft>
-            </a:pPr>
-            <a:r>
-              <a:rPr sz="1450">
-                <a:solidFill>
-                  <a:srgbClr val="18212B"/>
-                </a:solidFill>
-                <a:latin typeface="Malgun Gothic"/>
-              </a:rPr>
-              <a:t>•  BLAST+ has no subject-coverage field</a:t>
+            <a:pPr algn="ctr"/>
+            <a:r>
+              <a:rPr sz="1350" b="0">
+                <a:solidFill>
+                  <a:srgbClr val="A76500"/>
+                </a:solidFill>
+                <a:latin typeface="Malgun Gothic"/>
+              </a:rPr>
+              <a:t>EC agreement was measured separately, on a narrow leakage-controlled slice</a:t>
             </a:r>
           </a:p>
         </p:txBody>
@@ -10985,7 +11993,7 @@
                 </a:solidFill>
                 <a:latin typeface="Malgun Gothic"/>
               </a:rPr>
-              <a:t>What I need, and what comes next</a:t>
+              <a:t>Rebuilt on real Swiss-Prot and PDB data</a:t>
             </a:r>
           </a:p>
         </p:txBody>
@@ -11021,6 +12029,1012 @@
                 <a:latin typeface="Malgun Gothic"/>
               </a:rPr>
               <a:t>8</a:t>
+            </a:r>
+          </a:p>
+        </p:txBody>
+      </p:sp>
+      <p:sp>
+        <p:nvSpPr>
+          <p:cNvPr id="5" name="Rounded Rectangle 4"/>
+          <p:cNvSpPr/>
+          <p:nvPr/>
+        </p:nvSpPr>
+        <p:spPr>
+          <a:xfrm>
+            <a:off x="658368" y="1508760"/>
+            <a:ext cx="3520440" cy="960120"/>
+          </a:xfrm>
+          <a:prstGeom prst="roundRect">
+            <a:avLst/>
+          </a:prstGeom>
+          <a:solidFill>
+            <a:srgbClr val="FFFFFF"/>
+          </a:solidFill>
+          <a:ln w="12700">
+            <a:solidFill>
+              <a:srgbClr val="D9DEE7"/>
+            </a:solidFill>
+          </a:ln>
+        </p:spPr>
+        <p:style>
+          <a:lnRef idx="1">
+            <a:schemeClr val="accent1"/>
+          </a:lnRef>
+          <a:fillRef idx="3">
+            <a:schemeClr val="accent1"/>
+          </a:fillRef>
+          <a:effectRef idx="2">
+            <a:schemeClr val="accent1"/>
+          </a:effectRef>
+          <a:fontRef idx="minor">
+            <a:schemeClr val="lt1"/>
+          </a:fontRef>
+        </p:style>
+        <p:txBody>
+          <a:bodyPr rtlCol="0" anchor="ctr"/>
+          <a:lstStyle/>
+          <a:p>
+            <a:pPr algn="ctr"/>
+          </a:p>
+        </p:txBody>
+      </p:sp>
+      <p:sp>
+        <p:nvSpPr>
+          <p:cNvPr id="6" name="Rectangle 5"/>
+          <p:cNvSpPr/>
+          <p:nvPr/>
+        </p:nvSpPr>
+        <p:spPr>
+          <a:xfrm>
+            <a:off x="658368" y="1508760"/>
+            <a:ext cx="82296" cy="960120"/>
+          </a:xfrm>
+          <a:prstGeom prst="rect">
+            <a:avLst/>
+          </a:prstGeom>
+          <a:solidFill>
+            <a:srgbClr val="B71A1A"/>
+          </a:solidFill>
+          <a:ln>
+            <a:solidFill>
+              <a:srgbClr val="B71A1A"/>
+            </a:solidFill>
+          </a:ln>
+        </p:spPr>
+        <p:style>
+          <a:lnRef idx="1">
+            <a:schemeClr val="accent1"/>
+          </a:lnRef>
+          <a:fillRef idx="3">
+            <a:schemeClr val="accent1"/>
+          </a:fillRef>
+          <a:effectRef idx="2">
+            <a:schemeClr val="accent1"/>
+          </a:effectRef>
+          <a:fontRef idx="minor">
+            <a:schemeClr val="lt1"/>
+          </a:fontRef>
+        </p:style>
+        <p:txBody>
+          <a:bodyPr rtlCol="0" anchor="ctr"/>
+          <a:lstStyle/>
+          <a:p>
+            <a:pPr algn="ctr"/>
+          </a:p>
+        </p:txBody>
+      </p:sp>
+      <p:sp>
+        <p:nvSpPr>
+          <p:cNvPr id="7" name="TextBox 6"/>
+          <p:cNvSpPr txBox="1"/>
+          <p:nvPr/>
+        </p:nvSpPr>
+        <p:spPr>
+          <a:xfrm>
+            <a:off x="886968" y="1655063"/>
+            <a:ext cx="3154680" cy="402336"/>
+          </a:xfrm>
+          <a:prstGeom prst="rect">
+            <a:avLst/>
+          </a:prstGeom>
+          <a:noFill/>
+        </p:spPr>
+        <p:txBody>
+          <a:bodyPr wrap="square" lIns="0" rIns="0" tIns="0" bIns="0" anchor="t">
+            <a:noAutofit/>
+          </a:bodyPr>
+          <a:lstStyle/>
+          <a:p>
+            <a:pPr algn="l"/>
+            <a:r>
+              <a:rPr sz="2600" b="1">
+                <a:solidFill>
+                  <a:srgbClr val="B71A1A"/>
+                </a:solidFill>
+                <a:latin typeface="Malgun Gothic"/>
+              </a:rPr>
+              <a:t>272,112</a:t>
+            </a:r>
+          </a:p>
+        </p:txBody>
+      </p:sp>
+      <p:sp>
+        <p:nvSpPr>
+          <p:cNvPr id="8" name="TextBox 7"/>
+          <p:cNvSpPr txBox="1"/>
+          <p:nvPr/>
+        </p:nvSpPr>
+        <p:spPr>
+          <a:xfrm>
+            <a:off x="886968" y="2112264"/>
+            <a:ext cx="3154680" cy="237744"/>
+          </a:xfrm>
+          <a:prstGeom prst="rect">
+            <a:avLst/>
+          </a:prstGeom>
+          <a:noFill/>
+        </p:spPr>
+        <p:txBody>
+          <a:bodyPr wrap="square" lIns="0" rIns="0" tIns="0" bIns="0" anchor="t">
+            <a:noAutofit/>
+          </a:bodyPr>
+          <a:lstStyle/>
+          <a:p>
+            <a:pPr algn="l"/>
+            <a:r>
+              <a:rPr sz="1150" b="0">
+                <a:solidFill>
+                  <a:srgbClr val="52565B"/>
+                </a:solidFill>
+                <a:latin typeface="Malgun Gothic"/>
+              </a:rPr>
+              <a:t>references built</a:t>
+            </a:r>
+          </a:p>
+        </p:txBody>
+      </p:sp>
+      <p:sp>
+        <p:nvSpPr>
+          <p:cNvPr id="9" name="Rounded Rectangle 8"/>
+          <p:cNvSpPr/>
+          <p:nvPr/>
+        </p:nvSpPr>
+        <p:spPr>
+          <a:xfrm>
+            <a:off x="4334256" y="1508760"/>
+            <a:ext cx="3520440" cy="960120"/>
+          </a:xfrm>
+          <a:prstGeom prst="roundRect">
+            <a:avLst/>
+          </a:prstGeom>
+          <a:solidFill>
+            <a:srgbClr val="FFFFFF"/>
+          </a:solidFill>
+          <a:ln w="12700">
+            <a:solidFill>
+              <a:srgbClr val="D9DEE7"/>
+            </a:solidFill>
+          </a:ln>
+        </p:spPr>
+        <p:style>
+          <a:lnRef idx="1">
+            <a:schemeClr val="accent1"/>
+          </a:lnRef>
+          <a:fillRef idx="3">
+            <a:schemeClr val="accent1"/>
+          </a:fillRef>
+          <a:effectRef idx="2">
+            <a:schemeClr val="accent1"/>
+          </a:effectRef>
+          <a:fontRef idx="minor">
+            <a:schemeClr val="lt1"/>
+          </a:fontRef>
+        </p:style>
+        <p:txBody>
+          <a:bodyPr rtlCol="0" anchor="ctr"/>
+          <a:lstStyle/>
+          <a:p>
+            <a:pPr algn="ctr"/>
+          </a:p>
+        </p:txBody>
+      </p:sp>
+      <p:sp>
+        <p:nvSpPr>
+          <p:cNvPr id="10" name="Rectangle 9"/>
+          <p:cNvSpPr/>
+          <p:nvPr/>
+        </p:nvSpPr>
+        <p:spPr>
+          <a:xfrm>
+            <a:off x="4334256" y="1508760"/>
+            <a:ext cx="82296" cy="960120"/>
+          </a:xfrm>
+          <a:prstGeom prst="rect">
+            <a:avLst/>
+          </a:prstGeom>
+          <a:solidFill>
+            <a:srgbClr val="52565B"/>
+          </a:solidFill>
+          <a:ln>
+            <a:solidFill>
+              <a:srgbClr val="52565B"/>
+            </a:solidFill>
+          </a:ln>
+        </p:spPr>
+        <p:style>
+          <a:lnRef idx="1">
+            <a:schemeClr val="accent1"/>
+          </a:lnRef>
+          <a:fillRef idx="3">
+            <a:schemeClr val="accent1"/>
+          </a:fillRef>
+          <a:effectRef idx="2">
+            <a:schemeClr val="accent1"/>
+          </a:effectRef>
+          <a:fontRef idx="minor">
+            <a:schemeClr val="lt1"/>
+          </a:fontRef>
+        </p:style>
+        <p:txBody>
+          <a:bodyPr rtlCol="0" anchor="ctr"/>
+          <a:lstStyle/>
+          <a:p>
+            <a:pPr algn="ctr"/>
+          </a:p>
+        </p:txBody>
+      </p:sp>
+      <p:sp>
+        <p:nvSpPr>
+          <p:cNvPr id="11" name="TextBox 10"/>
+          <p:cNvSpPr txBox="1"/>
+          <p:nvPr/>
+        </p:nvSpPr>
+        <p:spPr>
+          <a:xfrm>
+            <a:off x="4562856" y="1655063"/>
+            <a:ext cx="3154680" cy="402336"/>
+          </a:xfrm>
+          <a:prstGeom prst="rect">
+            <a:avLst/>
+          </a:prstGeom>
+          <a:noFill/>
+        </p:spPr>
+        <p:txBody>
+          <a:bodyPr wrap="square" lIns="0" rIns="0" tIns="0" bIns="0" anchor="t">
+            <a:noAutofit/>
+          </a:bodyPr>
+          <a:lstStyle/>
+          <a:p>
+            <a:pPr algn="l"/>
+            <a:r>
+              <a:rPr sz="2600" b="1">
+                <a:solidFill>
+                  <a:srgbClr val="52565B"/>
+                </a:solidFill>
+                <a:latin typeface="Malgun Gothic"/>
+              </a:rPr>
+              <a:t>4.5 min</a:t>
+            </a:r>
+          </a:p>
+        </p:txBody>
+      </p:sp>
+      <p:sp>
+        <p:nvSpPr>
+          <p:cNvPr id="12" name="TextBox 11"/>
+          <p:cNvSpPr txBox="1"/>
+          <p:nvPr/>
+        </p:nvSpPr>
+        <p:spPr>
+          <a:xfrm>
+            <a:off x="4562856" y="2112264"/>
+            <a:ext cx="3154680" cy="237744"/>
+          </a:xfrm>
+          <a:prstGeom prst="rect">
+            <a:avLst/>
+          </a:prstGeom>
+          <a:noFill/>
+        </p:spPr>
+        <p:txBody>
+          <a:bodyPr wrap="square" lIns="0" rIns="0" tIns="0" bIns="0" anchor="t">
+            <a:noAutofit/>
+          </a:bodyPr>
+          <a:lstStyle/>
+          <a:p>
+            <a:pPr algn="l"/>
+            <a:r>
+              <a:rPr sz="1150" b="0">
+                <a:solidFill>
+                  <a:srgbClr val="52565B"/>
+                </a:solidFill>
+                <a:latin typeface="Malgun Gothic"/>
+              </a:rPr>
+              <a:t>offline build</a:t>
+            </a:r>
+          </a:p>
+        </p:txBody>
+      </p:sp>
+      <p:sp>
+        <p:nvSpPr>
+          <p:cNvPr id="13" name="Rounded Rectangle 12"/>
+          <p:cNvSpPr/>
+          <p:nvPr/>
+        </p:nvSpPr>
+        <p:spPr>
+          <a:xfrm>
+            <a:off x="8010144" y="1508760"/>
+            <a:ext cx="3520440" cy="960120"/>
+          </a:xfrm>
+          <a:prstGeom prst="roundRect">
+            <a:avLst/>
+          </a:prstGeom>
+          <a:solidFill>
+            <a:srgbClr val="FFFFFF"/>
+          </a:solidFill>
+          <a:ln w="12700">
+            <a:solidFill>
+              <a:srgbClr val="D9DEE7"/>
+            </a:solidFill>
+          </a:ln>
+        </p:spPr>
+        <p:style>
+          <a:lnRef idx="1">
+            <a:schemeClr val="accent1"/>
+          </a:lnRef>
+          <a:fillRef idx="3">
+            <a:schemeClr val="accent1"/>
+          </a:fillRef>
+          <a:effectRef idx="2">
+            <a:schemeClr val="accent1"/>
+          </a:effectRef>
+          <a:fontRef idx="minor">
+            <a:schemeClr val="lt1"/>
+          </a:fontRef>
+        </p:style>
+        <p:txBody>
+          <a:bodyPr rtlCol="0" anchor="ctr"/>
+          <a:lstStyle/>
+          <a:p>
+            <a:pPr algn="ctr"/>
+          </a:p>
+        </p:txBody>
+      </p:sp>
+      <p:sp>
+        <p:nvSpPr>
+          <p:cNvPr id="14" name="Rectangle 13"/>
+          <p:cNvSpPr/>
+          <p:nvPr/>
+        </p:nvSpPr>
+        <p:spPr>
+          <a:xfrm>
+            <a:off x="8010144" y="1508760"/>
+            <a:ext cx="82296" cy="960120"/>
+          </a:xfrm>
+          <a:prstGeom prst="rect">
+            <a:avLst/>
+          </a:prstGeom>
+          <a:solidFill>
+            <a:srgbClr val="167C5A"/>
+          </a:solidFill>
+          <a:ln>
+            <a:solidFill>
+              <a:srgbClr val="167C5A"/>
+            </a:solidFill>
+          </a:ln>
+        </p:spPr>
+        <p:style>
+          <a:lnRef idx="1">
+            <a:schemeClr val="accent1"/>
+          </a:lnRef>
+          <a:fillRef idx="3">
+            <a:schemeClr val="accent1"/>
+          </a:fillRef>
+          <a:effectRef idx="2">
+            <a:schemeClr val="accent1"/>
+          </a:effectRef>
+          <a:fontRef idx="minor">
+            <a:schemeClr val="lt1"/>
+          </a:fontRef>
+        </p:style>
+        <p:txBody>
+          <a:bodyPr rtlCol="0" anchor="ctr"/>
+          <a:lstStyle/>
+          <a:p>
+            <a:pPr algn="ctr"/>
+          </a:p>
+        </p:txBody>
+      </p:sp>
+      <p:sp>
+        <p:nvSpPr>
+          <p:cNvPr id="15" name="TextBox 14"/>
+          <p:cNvSpPr txBox="1"/>
+          <p:nvPr/>
+        </p:nvSpPr>
+        <p:spPr>
+          <a:xfrm>
+            <a:off x="8238744" y="1655063"/>
+            <a:ext cx="3154680" cy="402336"/>
+          </a:xfrm>
+          <a:prstGeom prst="rect">
+            <a:avLst/>
+          </a:prstGeom>
+          <a:noFill/>
+        </p:spPr>
+        <p:txBody>
+          <a:bodyPr wrap="square" lIns="0" rIns="0" tIns="0" bIns="0" anchor="t">
+            <a:noAutofit/>
+          </a:bodyPr>
+          <a:lstStyle/>
+          <a:p>
+            <a:pPr algn="l"/>
+            <a:r>
+              <a:rPr sz="2600" b="1">
+                <a:solidFill>
+                  <a:srgbClr val="167C5A"/>
+                </a:solidFill>
+                <a:latin typeface="Malgun Gothic"/>
+              </a:rPr>
+              <a:t>0</a:t>
+            </a:r>
+          </a:p>
+        </p:txBody>
+      </p:sp>
+      <p:sp>
+        <p:nvSpPr>
+          <p:cNvPr id="16" name="TextBox 15"/>
+          <p:cNvSpPr txBox="1"/>
+          <p:nvPr/>
+        </p:nvSpPr>
+        <p:spPr>
+          <a:xfrm>
+            <a:off x="8238744" y="2112264"/>
+            <a:ext cx="3154680" cy="237744"/>
+          </a:xfrm>
+          <a:prstGeom prst="rect">
+            <a:avLst/>
+          </a:prstGeom>
+          <a:noFill/>
+        </p:spPr>
+        <p:txBody>
+          <a:bodyPr wrap="square" lIns="0" rIns="0" tIns="0" bIns="0" anchor="t">
+            <a:noAutofit/>
+          </a:bodyPr>
+          <a:lstStyle/>
+          <a:p>
+            <a:pPr algn="l"/>
+            <a:r>
+              <a:rPr sz="1150" b="0">
+                <a:solidFill>
+                  <a:srgbClr val="52565B"/>
+                </a:solidFill>
+                <a:latin typeface="Malgun Gothic"/>
+              </a:rPr>
+              <a:t>search code changes</a:t>
+            </a:r>
+          </a:p>
+        </p:txBody>
+      </p:sp>
+      <p:sp>
+        <p:nvSpPr>
+          <p:cNvPr id="17" name="TextBox 16"/>
+          <p:cNvSpPr txBox="1"/>
+          <p:nvPr/>
+        </p:nvSpPr>
+        <p:spPr>
+          <a:xfrm>
+            <a:off x="658368" y="2633472"/>
+            <a:ext cx="10881360" cy="274320"/>
+          </a:xfrm>
+          <a:prstGeom prst="rect">
+            <a:avLst/>
+          </a:prstGeom>
+          <a:noFill/>
+        </p:spPr>
+        <p:txBody>
+          <a:bodyPr wrap="square" lIns="0" rIns="0" tIns="0" bIns="0" anchor="t">
+            <a:noAutofit/>
+          </a:bodyPr>
+          <a:lstStyle/>
+          <a:p>
+            <a:pPr algn="ctr"/>
+            <a:r>
+              <a:rPr sz="1250" b="0">
+                <a:solidFill>
+                  <a:srgbClr val="667085"/>
+                </a:solidFill>
+                <a:latin typeface="Malgun Gothic"/>
+              </a:rPr>
+              <a:t>231,577 Swiss-Prot  ·  40,535 PDB  ·  blastp 1.8 s and phmmer 7.1 s per query</a:t>
+            </a:r>
+          </a:p>
+        </p:txBody>
+      </p:sp>
+      <p:sp>
+        <p:nvSpPr>
+          <p:cNvPr id="18" name="Rounded Rectangle 17"/>
+          <p:cNvSpPr/>
+          <p:nvPr/>
+        </p:nvSpPr>
+        <p:spPr>
+          <a:xfrm>
+            <a:off x="658368" y="3063240"/>
+            <a:ext cx="5285232" cy="2788920"/>
+          </a:xfrm>
+          <a:prstGeom prst="roundRect">
+            <a:avLst/>
+          </a:prstGeom>
+          <a:solidFill>
+            <a:srgbClr val="FFF5DF"/>
+          </a:solidFill>
+          <a:ln w="12700">
+            <a:solidFill>
+              <a:srgbClr val="FFF5DF"/>
+            </a:solidFill>
+          </a:ln>
+        </p:spPr>
+        <p:style>
+          <a:lnRef idx="1">
+            <a:schemeClr val="accent1"/>
+          </a:lnRef>
+          <a:fillRef idx="3">
+            <a:schemeClr val="accent1"/>
+          </a:fillRef>
+          <a:effectRef idx="2">
+            <a:schemeClr val="accent1"/>
+          </a:effectRef>
+          <a:fontRef idx="minor">
+            <a:schemeClr val="lt1"/>
+          </a:fontRef>
+        </p:style>
+        <p:txBody>
+          <a:bodyPr rtlCol="0" anchor="ctr"/>
+          <a:lstStyle/>
+          <a:p>
+            <a:pPr algn="ctr"/>
+          </a:p>
+        </p:txBody>
+      </p:sp>
+      <p:sp>
+        <p:nvSpPr>
+          <p:cNvPr id="19" name="TextBox 18"/>
+          <p:cNvSpPr txBox="1"/>
+          <p:nvPr/>
+        </p:nvSpPr>
+        <p:spPr>
+          <a:xfrm>
+            <a:off x="932688" y="3319272"/>
+            <a:ext cx="4736592" cy="365760"/>
+          </a:xfrm>
+          <a:prstGeom prst="rect">
+            <a:avLst/>
+          </a:prstGeom>
+          <a:noFill/>
+        </p:spPr>
+        <p:txBody>
+          <a:bodyPr wrap="square" lIns="0" rIns="0" tIns="0" bIns="0" anchor="t">
+            <a:noAutofit/>
+          </a:bodyPr>
+          <a:lstStyle/>
+          <a:p>
+            <a:pPr algn="l"/>
+            <a:r>
+              <a:rPr sz="2000" b="1">
+                <a:solidFill>
+                  <a:srgbClr val="A76500"/>
+                </a:solidFill>
+                <a:latin typeface="Malgun Gothic"/>
+              </a:rPr>
+              <a:t>What real data exposed</a:t>
+            </a:r>
+          </a:p>
+        </p:txBody>
+      </p:sp>
+      <p:sp>
+        <p:nvSpPr>
+          <p:cNvPr id="20" name="TextBox 19"/>
+          <p:cNvSpPr txBox="1"/>
+          <p:nvPr/>
+        </p:nvSpPr>
+        <p:spPr>
+          <a:xfrm>
+            <a:off x="932688" y="3840480"/>
+            <a:ext cx="4736592" cy="1783079"/>
+          </a:xfrm>
+          <a:prstGeom prst="rect">
+            <a:avLst/>
+          </a:prstGeom>
+          <a:noFill/>
+        </p:spPr>
+        <p:txBody>
+          <a:bodyPr wrap="square" lIns="18288" rIns="18288" tIns="18288" bIns="18288">
+            <a:noAutofit/>
+          </a:bodyPr>
+          <a:lstStyle/>
+          <a:p>
+            <a:pPr>
+              <a:lnSpc>
+                <a:spcPct val="105000"/>
+              </a:lnSpc>
+              <a:spcAft>
+                <a:spcPts val="1100"/>
+              </a:spcAft>
+            </a:pPr>
+            <a:r>
+              <a:rPr sz="1450">
+                <a:solidFill>
+                  <a:srgbClr val="18212B"/>
+                </a:solidFill>
+                <a:latin typeface="Malgun Gothic"/>
+              </a:rPr>
+              <a:t>•  GFP is not an enzyme, but returns 25 hits</a:t>
+            </a:r>
+          </a:p>
+          <a:p>
+            <a:pPr>
+              <a:lnSpc>
+                <a:spcPct val="105000"/>
+              </a:lnSpc>
+              <a:spcAft>
+                <a:spcPts val="1100"/>
+              </a:spcAft>
+            </a:pPr>
+            <a:r>
+              <a:rPr sz="1450">
+                <a:solidFill>
+                  <a:srgbClr val="18212B"/>
+                </a:solidFill>
+                <a:latin typeface="Malgun Gothic"/>
+              </a:rPr>
+              <a:t>•  All are PDB fusion constructs</a:t>
+            </a:r>
+          </a:p>
+          <a:p>
+            <a:pPr>
+              <a:lnSpc>
+                <a:spcPct val="105000"/>
+              </a:lnSpc>
+              <a:spcAft>
+                <a:spcPts val="1100"/>
+              </a:spcAft>
+            </a:pPr>
+            <a:r>
+              <a:rPr sz="1450">
+                <a:solidFill>
+                  <a:srgbClr val="18212B"/>
+                </a:solidFill>
+                <a:latin typeface="Malgun Gothic"/>
+              </a:rPr>
+              <a:t>•  15 carry an EC, 8 different values</a:t>
+            </a:r>
+          </a:p>
+          <a:p>
+            <a:pPr>
+              <a:lnSpc>
+                <a:spcPct val="105000"/>
+              </a:lnSpc>
+              <a:spcAft>
+                <a:spcPts val="1100"/>
+              </a:spcAft>
+            </a:pPr>
+            <a:r>
+              <a:rPr sz="1450">
+                <a:solidFill>
+                  <a:srgbClr val="18212B"/>
+                </a:solidFill>
+                <a:latin typeface="Malgun Gothic"/>
+              </a:rPr>
+              <a:t>•  None of them belong to GFP</a:t>
+            </a:r>
+          </a:p>
+        </p:txBody>
+      </p:sp>
+      <p:sp>
+        <p:nvSpPr>
+          <p:cNvPr id="21" name="Rounded Rectangle 20"/>
+          <p:cNvSpPr/>
+          <p:nvPr/>
+        </p:nvSpPr>
+        <p:spPr>
+          <a:xfrm>
+            <a:off x="6245352" y="3063240"/>
+            <a:ext cx="5294376" cy="2788920"/>
+          </a:xfrm>
+          <a:prstGeom prst="roundRect">
+            <a:avLst/>
+          </a:prstGeom>
+          <a:solidFill>
+            <a:srgbClr val="EAF4F7"/>
+          </a:solidFill>
+          <a:ln w="12700">
+            <a:solidFill>
+              <a:srgbClr val="EAF4F7"/>
+            </a:solidFill>
+          </a:ln>
+        </p:spPr>
+        <p:style>
+          <a:lnRef idx="1">
+            <a:schemeClr val="accent1"/>
+          </a:lnRef>
+          <a:fillRef idx="3">
+            <a:schemeClr val="accent1"/>
+          </a:fillRef>
+          <a:effectRef idx="2">
+            <a:schemeClr val="accent1"/>
+          </a:effectRef>
+          <a:fontRef idx="minor">
+            <a:schemeClr val="lt1"/>
+          </a:fontRef>
+        </p:style>
+        <p:txBody>
+          <a:bodyPr rtlCol="0" anchor="ctr"/>
+          <a:lstStyle/>
+          <a:p>
+            <a:pPr algn="ctr"/>
+          </a:p>
+        </p:txBody>
+      </p:sp>
+      <p:sp>
+        <p:nvSpPr>
+          <p:cNvPr id="22" name="TextBox 21"/>
+          <p:cNvSpPr txBox="1"/>
+          <p:nvPr/>
+        </p:nvSpPr>
+        <p:spPr>
+          <a:xfrm>
+            <a:off x="6519672" y="3319272"/>
+            <a:ext cx="4745736" cy="365760"/>
+          </a:xfrm>
+          <a:prstGeom prst="rect">
+            <a:avLst/>
+          </a:prstGeom>
+          <a:noFill/>
+        </p:spPr>
+        <p:txBody>
+          <a:bodyPr wrap="square" lIns="0" rIns="0" tIns="0" bIns="0" anchor="t">
+            <a:noAutofit/>
+          </a:bodyPr>
+          <a:lstStyle/>
+          <a:p>
+            <a:pPr algn="l"/>
+            <a:r>
+              <a:rPr sz="2000" b="1">
+                <a:solidFill>
+                  <a:srgbClr val="176B87"/>
+                </a:solidFill>
+                <a:latin typeface="Malgun Gothic"/>
+              </a:rPr>
+              <a:t>What already catches it</a:t>
+            </a:r>
+          </a:p>
+        </p:txBody>
+      </p:sp>
+      <p:sp>
+        <p:nvSpPr>
+          <p:cNvPr id="23" name="TextBox 22"/>
+          <p:cNvSpPr txBox="1"/>
+          <p:nvPr/>
+        </p:nvSpPr>
+        <p:spPr>
+          <a:xfrm>
+            <a:off x="6519672" y="3840480"/>
+            <a:ext cx="4745736" cy="1783079"/>
+          </a:xfrm>
+          <a:prstGeom prst="rect">
+            <a:avLst/>
+          </a:prstGeom>
+          <a:noFill/>
+        </p:spPr>
+        <p:txBody>
+          <a:bodyPr wrap="square" lIns="18288" rIns="18288" tIns="18288" bIns="18288">
+            <a:noAutofit/>
+          </a:bodyPr>
+          <a:lstStyle/>
+          <a:p>
+            <a:pPr>
+              <a:lnSpc>
+                <a:spcPct val="105000"/>
+              </a:lnSpc>
+              <a:spcAft>
+                <a:spcPts val="1100"/>
+              </a:spcAft>
+            </a:pPr>
+            <a:r>
+              <a:rPr sz="1450">
+                <a:solidFill>
+                  <a:srgbClr val="18212B"/>
+                </a:solidFill>
+                <a:latin typeface="Malgun Gothic"/>
+              </a:rPr>
+              <a:t>•  Query coverage 1.00, subject coverage 0.55</a:t>
+            </a:r>
+          </a:p>
+          <a:p>
+            <a:pPr>
+              <a:lnSpc>
+                <a:spcPct val="105000"/>
+              </a:lnSpc>
+              <a:spcAft>
+                <a:spcPts val="1100"/>
+              </a:spcAft>
+            </a:pPr>
+            <a:r>
+              <a:rPr sz="1450">
+                <a:solidFill>
+                  <a:srgbClr val="18212B"/>
+                </a:solidFill>
+                <a:latin typeface="Malgun Gothic"/>
+              </a:rPr>
+              <a:t>•  The gap is the fusion signature</a:t>
+            </a:r>
+          </a:p>
+          <a:p>
+            <a:pPr>
+              <a:lnSpc>
+                <a:spcPct val="105000"/>
+              </a:lnSpc>
+              <a:spcAft>
+                <a:spcPts val="1100"/>
+              </a:spcAft>
+            </a:pPr>
+            <a:r>
+              <a:rPr sz="1450">
+                <a:solidFill>
+                  <a:srgbClr val="18212B"/>
+                </a:solidFill>
+                <a:latin typeface="Malgun Gothic"/>
+              </a:rPr>
+              <a:t>•  Computed from merged HSP intervals</a:t>
+            </a:r>
+          </a:p>
+          <a:p>
+            <a:pPr>
+              <a:lnSpc>
+                <a:spcPct val="105000"/>
+              </a:lnSpc>
+              <a:spcAft>
+                <a:spcPts val="1100"/>
+              </a:spcAft>
+            </a:pPr>
+            <a:r>
+              <a:rPr sz="1450">
+                <a:solidFill>
+                  <a:srgbClr val="18212B"/>
+                </a:solidFill>
+                <a:latin typeface="Malgun Gothic"/>
+              </a:rPr>
+              <a:t>•  BLAST+ has no subject-coverage field</a:t>
+            </a:r>
+          </a:p>
+        </p:txBody>
+      </p:sp>
+    </p:spTree>
+  </p:cSld>
+  <p:clrMapOvr>
+    <a:masterClrMapping/>
+  </p:clrMapOvr>
+</p:sld>
+</file>
+
+<file path=ppt/slides/slide9.xml><?xml version="1.0" encoding="utf-8"?>
+<p:sld xmlns:a="http://schemas.openxmlformats.org/drawingml/2006/main" xmlns:p="http://schemas.openxmlformats.org/presentationml/2006/main" xmlns:r="http://schemas.openxmlformats.org/officeDocument/2006/relationships">
+  <p:cSld>
+    <p:spTree>
+      <p:nvGrpSpPr>
+        <p:cNvPr id="1" name=""/>
+        <p:cNvGrpSpPr/>
+        <p:nvPr/>
+      </p:nvGrpSpPr>
+      <p:grpSpPr/>
+      <p:sp>
+        <p:nvSpPr>
+          <p:cNvPr id="2" name="Rectangle 1"/>
+          <p:cNvSpPr/>
+          <p:nvPr/>
+        </p:nvSpPr>
+        <p:spPr>
+          <a:xfrm>
+            <a:off x="0" y="0"/>
+            <a:ext cx="12191695" cy="73152"/>
+          </a:xfrm>
+          <a:prstGeom prst="rect">
+            <a:avLst/>
+          </a:prstGeom>
+          <a:solidFill>
+            <a:srgbClr val="B71A1A"/>
+          </a:solidFill>
+          <a:ln>
+            <a:solidFill>
+              <a:srgbClr val="B71A1A"/>
+            </a:solidFill>
+          </a:ln>
+        </p:spPr>
+        <p:style>
+          <a:lnRef idx="1">
+            <a:schemeClr val="accent1"/>
+          </a:lnRef>
+          <a:fillRef idx="3">
+            <a:schemeClr val="accent1"/>
+          </a:fillRef>
+          <a:effectRef idx="2">
+            <a:schemeClr val="accent1"/>
+          </a:effectRef>
+          <a:fontRef idx="minor">
+            <a:schemeClr val="lt1"/>
+          </a:fontRef>
+        </p:style>
+        <p:txBody>
+          <a:bodyPr rtlCol="0" anchor="ctr"/>
+          <a:lstStyle/>
+          <a:p>
+            <a:pPr algn="ctr"/>
+          </a:p>
+        </p:txBody>
+      </p:sp>
+      <p:sp>
+        <p:nvSpPr>
+          <p:cNvPr id="3" name="TextBox 2"/>
+          <p:cNvSpPr txBox="1"/>
+          <p:nvPr/>
+        </p:nvSpPr>
+        <p:spPr>
+          <a:xfrm>
+            <a:off x="658368" y="457200"/>
+            <a:ext cx="10515600" cy="566928"/>
+          </a:xfrm>
+          <a:prstGeom prst="rect">
+            <a:avLst/>
+          </a:prstGeom>
+          <a:noFill/>
+        </p:spPr>
+        <p:txBody>
+          <a:bodyPr wrap="square" lIns="0" rIns="0" tIns="0" bIns="0" anchor="t">
+            <a:noAutofit/>
+          </a:bodyPr>
+          <a:lstStyle/>
+          <a:p>
+            <a:pPr algn="l"/>
+            <a:r>
+              <a:rPr sz="3000" b="1">
+                <a:solidFill>
+                  <a:srgbClr val="18212B"/>
+                </a:solidFill>
+                <a:latin typeface="Malgun Gothic"/>
+              </a:rPr>
+              <a:t>What I need, and what comes next</a:t>
+            </a:r>
+          </a:p>
+        </p:txBody>
+      </p:sp>
+      <p:sp>
+        <p:nvSpPr>
+          <p:cNvPr id="4" name="TextBox 3"/>
+          <p:cNvSpPr txBox="1"/>
+          <p:nvPr/>
+        </p:nvSpPr>
+        <p:spPr>
+          <a:xfrm>
+            <a:off x="11247120" y="566928"/>
+            <a:ext cx="320040" cy="228600"/>
+          </a:xfrm>
+          <a:prstGeom prst="rect">
+            <a:avLst/>
+          </a:prstGeom>
+          <a:noFill/>
+        </p:spPr>
+        <p:txBody>
+          <a:bodyPr wrap="square" lIns="0" rIns="0" tIns="0" bIns="0" anchor="t">
+            <a:noAutofit/>
+          </a:bodyPr>
+          <a:lstStyle/>
+          <a:p>
+            <a:pPr algn="r"/>
+            <a:r>
+              <a:rPr sz="1100" b="0">
+                <a:solidFill>
+                  <a:srgbClr val="667085"/>
+                </a:solidFill>
+                <a:latin typeface="Malgun Gothic"/>
+              </a:rPr>
+              <a:t>9</a:t>
             </a:r>
           </a:p>
         </p:txBody>

--- a/docs/presentations/EnzymeX_BLAST_HMMER_update.pptx
+++ b/docs/presentations/EnzymeX_BLAST_HMMER_update.pptx
@@ -580,7 +580,7 @@
           <a:lstStyle/>
           <a:p>
             <a:r>
-              <a:t>Standalone test server. The search core is a library, so EnzymeX can call run_search from its existing scheduled job without taking any of the web code.</a:t>
+              <a:t>Steps 1 and 2 are the reference build. Steps 3 to 5 are one user request. The search code between them is a plain function with no web framework in it, so EnzymeX calls it from its existing scheduled job rather than taking any of my web layer.</a:t>
             </a:r>
           </a:p>
         </p:txBody>
@@ -4618,7 +4618,7 @@
                 </a:solidFill>
                 <a:latin typeface="Malgun Gothic"/>
               </a:rPr>
-              <a:t>Overview</a:t>
+              <a:t>Workflow: what happens, and where</a:t>
             </a:r>
           </a:p>
         </p:txBody>
@@ -4666,8 +4666,8 @@
         </p:nvSpPr>
         <p:spPr>
           <a:xfrm>
-            <a:off x="658368" y="1600200"/>
-            <a:ext cx="1874519" cy="960120"/>
+            <a:off x="658368" y="1481328"/>
+            <a:ext cx="2048256" cy="2487168"/>
           </a:xfrm>
           <a:prstGeom prst="roundRect">
             <a:avLst/>
@@ -4705,14 +4705,59 @@
       </p:sp>
       <p:sp>
         <p:nvSpPr>
-          <p:cNvPr id="6" name="TextBox 5"/>
+          <p:cNvPr id="6" name="Rectangle 5"/>
+          <p:cNvSpPr/>
+          <p:nvPr/>
+        </p:nvSpPr>
+        <p:spPr>
+          <a:xfrm>
+            <a:off x="658368" y="1481328"/>
+            <a:ext cx="2048256" cy="420624"/>
+          </a:xfrm>
+          <a:prstGeom prst="rect">
+            <a:avLst/>
+          </a:prstGeom>
+          <a:solidFill>
+            <a:srgbClr val="B71A1A"/>
+          </a:solidFill>
+          <a:ln>
+            <a:solidFill>
+              <a:srgbClr val="B71A1A"/>
+            </a:solidFill>
+          </a:ln>
+        </p:spPr>
+        <p:style>
+          <a:lnRef idx="1">
+            <a:schemeClr val="accent1"/>
+          </a:lnRef>
+          <a:fillRef idx="3">
+            <a:schemeClr val="accent1"/>
+          </a:fillRef>
+          <a:effectRef idx="2">
+            <a:schemeClr val="accent1"/>
+          </a:effectRef>
+          <a:fontRef idx="minor">
+            <a:schemeClr val="lt1"/>
+          </a:fontRef>
+        </p:style>
+        <p:txBody>
+          <a:bodyPr rtlCol="0" anchor="ctr"/>
+          <a:lstStyle/>
+          <a:p>
+            <a:pPr algn="ctr"/>
+          </a:p>
+        </p:txBody>
+      </p:sp>
+      <p:sp>
+        <p:nvSpPr>
+          <p:cNvPr id="7" name="TextBox 6"/>
           <p:cNvSpPr txBox="1"/>
           <p:nvPr/>
         </p:nvSpPr>
         <p:spPr>
           <a:xfrm>
-            <a:off x="841247" y="1810512"/>
-            <a:ext cx="1554480" cy="274320"/>
+            <a:off x="841247" y="1572768"/>
+            <a:ext cx="1737360" cy="256032"/>
           </a:xfrm>
           <a:prstGeom prst="rect">
             <a:avLst/>
@@ -4727,27 +4772,27 @@
           <a:p>
             <a:pPr algn="l"/>
             <a:r>
-              <a:rPr sz="1350" b="1">
-                <a:solidFill>
-                  <a:srgbClr val="18212B"/>
-                </a:solidFill>
-                <a:latin typeface="Malgun Gothic"/>
-              </a:rPr>
-              <a:t>Copied DB</a:t>
-            </a:r>
-          </a:p>
-        </p:txBody>
-      </p:sp>
-      <p:sp>
-        <p:nvSpPr>
-          <p:cNvPr id="7" name="TextBox 6"/>
+              <a:rPr sz="1400" b="1">
+                <a:solidFill>
+                  <a:srgbClr val="FFFFFF"/>
+                </a:solidFill>
+                <a:latin typeface="Malgun Gothic"/>
+              </a:rPr>
+              <a:t>1   Export</a:t>
+            </a:r>
+          </a:p>
+        </p:txBody>
+      </p:sp>
+      <p:sp>
+        <p:nvSpPr>
+          <p:cNvPr id="8" name="TextBox 7"/>
           <p:cNvSpPr txBox="1"/>
           <p:nvPr/>
         </p:nvSpPr>
         <p:spPr>
           <a:xfrm>
-            <a:off x="841247" y="2139696"/>
-            <a:ext cx="1554480" cy="237744"/>
+            <a:off x="841247" y="2048256"/>
+            <a:ext cx="1700784" cy="1234440"/>
           </a:xfrm>
           <a:prstGeom prst="rect">
             <a:avLst/>
@@ -4760,29 +4805,103 @@
           </a:bodyPr>
           <a:lstStyle/>
           <a:p>
+            <a:pPr algn="l">
+              <a:lnSpc>
+                <a:spcPct val="112000"/>
+              </a:lnSpc>
+            </a:pPr>
+            <a:r>
+              <a:rPr sz="1150" b="0">
+                <a:solidFill>
+                  <a:srgbClr val="18212B"/>
+                </a:solidFill>
+                <a:latin typeface="Malgun Gothic"/>
+              </a:rPr>
+              <a:t>Read the copied table once. Keep Swiss-Prot and PDB, drop bad rows, remove duplicates.</a:t>
+            </a:r>
+          </a:p>
+        </p:txBody>
+      </p:sp>
+      <p:cxnSp>
+        <p:nvCxnSpPr>
+          <p:cNvPr id="9" name="Connector 8"/>
+          <p:cNvCxnSpPr/>
+          <p:nvPr/>
+        </p:nvCxnSpPr>
+        <p:spPr>
+          <a:xfrm>
+            <a:off x="841247" y="3310128"/>
+            <a:ext cx="1682497" cy="0"/>
+          </a:xfrm>
+          <a:prstGeom prst="line">
+            <a:avLst/>
+          </a:prstGeom>
+          <a:ln w="12700">
+            <a:solidFill>
+              <a:srgbClr val="D9DEE7"/>
+            </a:solidFill>
+          </a:ln>
+        </p:spPr>
+        <p:style>
+          <a:lnRef idx="2">
+            <a:schemeClr val="accent1"/>
+          </a:lnRef>
+          <a:fillRef idx="0">
+            <a:schemeClr val="accent1"/>
+          </a:fillRef>
+          <a:effectRef idx="1">
+            <a:schemeClr val="accent1"/>
+          </a:effectRef>
+          <a:fontRef idx="minor">
+            <a:schemeClr val="tx1"/>
+          </a:fontRef>
+        </p:style>
+      </p:cxnSp>
+      <p:sp>
+        <p:nvSpPr>
+          <p:cNvPr id="10" name="TextBox 9"/>
+          <p:cNvSpPr txBox="1"/>
+          <p:nvPr/>
+        </p:nvSpPr>
+        <p:spPr>
+          <a:xfrm>
+            <a:off x="841247" y="3401568"/>
+            <a:ext cx="1737360" cy="457200"/>
+          </a:xfrm>
+          <a:prstGeom prst="rect">
+            <a:avLst/>
+          </a:prstGeom>
+          <a:noFill/>
+        </p:spPr>
+        <p:txBody>
+          <a:bodyPr wrap="square" lIns="0" rIns="0" tIns="0" bIns="0" anchor="t">
+            <a:noAutofit/>
+          </a:bodyPr>
+          <a:lstStyle/>
+          <a:p>
             <a:pPr algn="l"/>
             <a:r>
-              <a:rPr sz="1050" b="0">
+              <a:rPr sz="950" b="0">
                 <a:solidFill>
                   <a:srgbClr val="667085"/>
                 </a:solidFill>
-                <a:latin typeface="Malgun Gothic"/>
-              </a:rPr>
-              <a:t>read-only</a:t>
-            </a:r>
-          </a:p>
-        </p:txBody>
-      </p:sp>
-      <p:sp>
-        <p:nvSpPr>
-          <p:cNvPr id="8" name="Right Arrow 7"/>
+                <a:latin typeface="Consolas"/>
+              </a:rPr>
+              <a:t>PyMySQL  -&gt;  FASTA</a:t>
+            </a:r>
+          </a:p>
+        </p:txBody>
+      </p:sp>
+      <p:sp>
+        <p:nvSpPr>
+          <p:cNvPr id="11" name="Right Arrow 10"/>
           <p:cNvSpPr/>
           <p:nvPr/>
         </p:nvSpPr>
         <p:spPr>
           <a:xfrm>
-            <a:off x="2596896" y="1938528"/>
-            <a:ext cx="219456" cy="292608"/>
+            <a:off x="2729484" y="2596896"/>
+            <a:ext cx="137160" cy="219456"/>
           </a:xfrm>
           <a:prstGeom prst="rightArrow">
             <a:avLst/>
@@ -4820,14 +4939,14 @@
       </p:sp>
       <p:sp>
         <p:nvSpPr>
-          <p:cNvPr id="9" name="Rounded Rectangle 8"/>
+          <p:cNvPr id="12" name="Rounded Rectangle 11"/>
           <p:cNvSpPr/>
           <p:nvPr/>
         </p:nvSpPr>
         <p:spPr>
           <a:xfrm>
-            <a:off x="2871215" y="1600200"/>
-            <a:ext cx="1874519" cy="960120"/>
+            <a:off x="2871215" y="1481328"/>
+            <a:ext cx="2048256" cy="2487168"/>
           </a:xfrm>
           <a:prstGeom prst="roundRect">
             <a:avLst/>
@@ -4865,14 +4984,59 @@
       </p:sp>
       <p:sp>
         <p:nvSpPr>
-          <p:cNvPr id="10" name="TextBox 9"/>
+          <p:cNvPr id="13" name="Rectangle 12"/>
+          <p:cNvSpPr/>
+          <p:nvPr/>
+        </p:nvSpPr>
+        <p:spPr>
+          <a:xfrm>
+            <a:off x="2871215" y="1481328"/>
+            <a:ext cx="2048256" cy="420624"/>
+          </a:xfrm>
+          <a:prstGeom prst="rect">
+            <a:avLst/>
+          </a:prstGeom>
+          <a:solidFill>
+            <a:srgbClr val="B71A1A"/>
+          </a:solidFill>
+          <a:ln>
+            <a:solidFill>
+              <a:srgbClr val="B71A1A"/>
+            </a:solidFill>
+          </a:ln>
+        </p:spPr>
+        <p:style>
+          <a:lnRef idx="1">
+            <a:schemeClr val="accent1"/>
+          </a:lnRef>
+          <a:fillRef idx="3">
+            <a:schemeClr val="accent1"/>
+          </a:fillRef>
+          <a:effectRef idx="2">
+            <a:schemeClr val="accent1"/>
+          </a:effectRef>
+          <a:fontRef idx="minor">
+            <a:schemeClr val="lt1"/>
+          </a:fontRef>
+        </p:style>
+        <p:txBody>
+          <a:bodyPr rtlCol="0" anchor="ctr"/>
+          <a:lstStyle/>
+          <a:p>
+            <a:pPr algn="ctr"/>
+          </a:p>
+        </p:txBody>
+      </p:sp>
+      <p:sp>
+        <p:nvSpPr>
+          <p:cNvPr id="14" name="TextBox 13"/>
           <p:cNvSpPr txBox="1"/>
           <p:nvPr/>
         </p:nvSpPr>
         <p:spPr>
           <a:xfrm>
-            <a:off x="3054096" y="1810512"/>
-            <a:ext cx="1554480" cy="274320"/>
+            <a:off x="3054096" y="1572768"/>
+            <a:ext cx="1737360" cy="256032"/>
           </a:xfrm>
           <a:prstGeom prst="rect">
             <a:avLst/>
@@ -4887,27 +5051,27 @@
           <a:p>
             <a:pPr algn="l"/>
             <a:r>
-              <a:rPr sz="1350" b="1">
-                <a:solidFill>
-                  <a:srgbClr val="18212B"/>
-                </a:solidFill>
-                <a:latin typeface="Malgun Gothic"/>
-              </a:rPr>
-              <a:t>Offline build</a:t>
-            </a:r>
-          </a:p>
-        </p:txBody>
-      </p:sp>
-      <p:sp>
-        <p:nvSpPr>
-          <p:cNvPr id="11" name="TextBox 10"/>
+              <a:rPr sz="1400" b="1">
+                <a:solidFill>
+                  <a:srgbClr val="FFFFFF"/>
+                </a:solidFill>
+                <a:latin typeface="Malgun Gothic"/>
+              </a:rPr>
+              <a:t>2   Index</a:t>
+            </a:r>
+          </a:p>
+        </p:txBody>
+      </p:sp>
+      <p:sp>
+        <p:nvSpPr>
+          <p:cNvPr id="15" name="TextBox 14"/>
           <p:cNvSpPr txBox="1"/>
           <p:nvPr/>
         </p:nvSpPr>
         <p:spPr>
           <a:xfrm>
-            <a:off x="3054096" y="2139696"/>
-            <a:ext cx="1554480" cy="237744"/>
+            <a:off x="3054096" y="2048256"/>
+            <a:ext cx="1700784" cy="1234440"/>
           </a:xfrm>
           <a:prstGeom prst="rect">
             <a:avLst/>
@@ -4920,29 +5084,113 @@
           </a:bodyPr>
           <a:lstStyle/>
           <a:p>
+            <a:pPr algn="l">
+              <a:lnSpc>
+                <a:spcPct val="112000"/>
+              </a:lnSpc>
+            </a:pPr>
+            <a:r>
+              <a:rPr sz="1150" b="0">
+                <a:solidFill>
+                  <a:srgbClr val="18212B"/>
+                </a:solidFill>
+                <a:latin typeface="Malgun Gothic"/>
+              </a:rPr>
+              <a:t>Turn that FASTA into files searchable in milliseconds, and cluster it into families.</a:t>
+            </a:r>
+          </a:p>
+        </p:txBody>
+      </p:sp>
+      <p:cxnSp>
+        <p:nvCxnSpPr>
+          <p:cNvPr id="16" name="Connector 15"/>
+          <p:cNvCxnSpPr/>
+          <p:nvPr/>
+        </p:nvCxnSpPr>
+        <p:spPr>
+          <a:xfrm>
+            <a:off x="3054096" y="3310128"/>
+            <a:ext cx="1682496" cy="0"/>
+          </a:xfrm>
+          <a:prstGeom prst="line">
+            <a:avLst/>
+          </a:prstGeom>
+          <a:ln w="12700">
+            <a:solidFill>
+              <a:srgbClr val="D9DEE7"/>
+            </a:solidFill>
+          </a:ln>
+        </p:spPr>
+        <p:style>
+          <a:lnRef idx="2">
+            <a:schemeClr val="accent1"/>
+          </a:lnRef>
+          <a:fillRef idx="0">
+            <a:schemeClr val="accent1"/>
+          </a:fillRef>
+          <a:effectRef idx="1">
+            <a:schemeClr val="accent1"/>
+          </a:effectRef>
+          <a:fontRef idx="minor">
+            <a:schemeClr val="tx1"/>
+          </a:fontRef>
+        </p:style>
+      </p:cxnSp>
+      <p:sp>
+        <p:nvSpPr>
+          <p:cNvPr id="17" name="TextBox 16"/>
+          <p:cNvSpPr txBox="1"/>
+          <p:nvPr/>
+        </p:nvSpPr>
+        <p:spPr>
+          <a:xfrm>
+            <a:off x="3054096" y="3401568"/>
+            <a:ext cx="1737360" cy="457200"/>
+          </a:xfrm>
+          <a:prstGeom prst="rect">
+            <a:avLst/>
+          </a:prstGeom>
+          <a:noFill/>
+        </p:spPr>
+        <p:txBody>
+          <a:bodyPr wrap="square" lIns="0" rIns="0" tIns="0" bIns="0" anchor="t">
+            <a:noAutofit/>
+          </a:bodyPr>
+          <a:lstStyle/>
+          <a:p>
             <a:pPr algn="l"/>
             <a:r>
-              <a:rPr sz="1050" b="0">
+              <a:rPr sz="950" b="0">
                 <a:solidFill>
                   <a:srgbClr val="667085"/>
                 </a:solidFill>
-                <a:latin typeface="Malgun Gothic"/>
-              </a:rPr>
-              <a:t>FASTA + indexes</a:t>
-            </a:r>
-          </a:p>
-        </p:txBody>
-      </p:sp>
-      <p:sp>
-        <p:nvSpPr>
-          <p:cNvPr id="12" name="Right Arrow 11"/>
+                <a:latin typeface="Consolas"/>
+              </a:rPr>
+              <a:t>makeblastdb, MMseqs2,</a:t>
+            </a:r>
+            <a:br/>
+            <a:r>
+              <a:rPr sz="950" b="0">
+                <a:solidFill>
+                  <a:srgbClr val="667085"/>
+                </a:solidFill>
+                <a:latin typeface="Consolas"/>
+              </a:rPr>
+              <a:t>MAFFT, hmmbuild</a:t>
+            </a:r>
+          </a:p>
+        </p:txBody>
+      </p:sp>
+      <p:sp>
+        <p:nvSpPr>
+          <p:cNvPr id="18" name="Right Arrow 17"/>
           <p:cNvSpPr/>
           <p:nvPr/>
         </p:nvSpPr>
         <p:spPr>
           <a:xfrm>
-            <a:off x="4809744" y="1938528"/>
-            <a:ext cx="219456" cy="292608"/>
+            <a:off x="4942331" y="2596896"/>
+            <a:ext cx="137160" cy="219456"/>
           </a:xfrm>
           <a:prstGeom prst="rightArrow">
             <a:avLst/>
@@ -4980,14 +5228,14 @@
       </p:sp>
       <p:sp>
         <p:nvSpPr>
-          <p:cNvPr id="13" name="Rounded Rectangle 12"/>
+          <p:cNvPr id="19" name="Rounded Rectangle 18"/>
           <p:cNvSpPr/>
           <p:nvPr/>
         </p:nvSpPr>
         <p:spPr>
           <a:xfrm>
-            <a:off x="5084064" y="1600200"/>
-            <a:ext cx="1874519" cy="960120"/>
+            <a:off x="5084064" y="1481328"/>
+            <a:ext cx="2048256" cy="2487168"/>
           </a:xfrm>
           <a:prstGeom prst="roundRect">
             <a:avLst/>
@@ -5025,14 +5273,59 @@
       </p:sp>
       <p:sp>
         <p:nvSpPr>
-          <p:cNvPr id="14" name="TextBox 13"/>
+          <p:cNvPr id="20" name="Rectangle 19"/>
+          <p:cNvSpPr/>
+          <p:nvPr/>
+        </p:nvSpPr>
+        <p:spPr>
+          <a:xfrm>
+            <a:off x="5084064" y="1481328"/>
+            <a:ext cx="2048256" cy="420624"/>
+          </a:xfrm>
+          <a:prstGeom prst="rect">
+            <a:avLst/>
+          </a:prstGeom>
+          <a:solidFill>
+            <a:srgbClr val="176B87"/>
+          </a:solidFill>
+          <a:ln>
+            <a:solidFill>
+              <a:srgbClr val="176B87"/>
+            </a:solidFill>
+          </a:ln>
+        </p:spPr>
+        <p:style>
+          <a:lnRef idx="1">
+            <a:schemeClr val="accent1"/>
+          </a:lnRef>
+          <a:fillRef idx="3">
+            <a:schemeClr val="accent1"/>
+          </a:fillRef>
+          <a:effectRef idx="2">
+            <a:schemeClr val="accent1"/>
+          </a:effectRef>
+          <a:fontRef idx="minor">
+            <a:schemeClr val="lt1"/>
+          </a:fontRef>
+        </p:style>
+        <p:txBody>
+          <a:bodyPr rtlCol="0" anchor="ctr"/>
+          <a:lstStyle/>
+          <a:p>
+            <a:pPr algn="ctr"/>
+          </a:p>
+        </p:txBody>
+      </p:sp>
+      <p:sp>
+        <p:nvSpPr>
+          <p:cNvPr id="21" name="TextBox 20"/>
           <p:cNvSpPr txBox="1"/>
           <p:nvPr/>
         </p:nvSpPr>
         <p:spPr>
           <a:xfrm>
-            <a:off x="5266944" y="1810512"/>
-            <a:ext cx="1554480" cy="274320"/>
+            <a:off x="5266944" y="1572768"/>
+            <a:ext cx="1737360" cy="256032"/>
           </a:xfrm>
           <a:prstGeom prst="rect">
             <a:avLst/>
@@ -5047,27 +5340,27 @@
           <a:p>
             <a:pPr algn="l"/>
             <a:r>
-              <a:rPr sz="1350" b="1">
-                <a:solidFill>
-                  <a:srgbClr val="18212B"/>
-                </a:solidFill>
-                <a:latin typeface="Malgun Gothic"/>
-              </a:rPr>
-              <a:t>Sequence in</a:t>
-            </a:r>
-          </a:p>
-        </p:txBody>
-      </p:sp>
-      <p:sp>
-        <p:nvSpPr>
-          <p:cNvPr id="15" name="TextBox 14"/>
+              <a:rPr sz="1400" b="1">
+                <a:solidFill>
+                  <a:srgbClr val="FFFFFF"/>
+                </a:solidFill>
+                <a:latin typeface="Malgun Gothic"/>
+              </a:rPr>
+              <a:t>3   Submit</a:t>
+            </a:r>
+          </a:p>
+        </p:txBody>
+      </p:sp>
+      <p:sp>
+        <p:nvSpPr>
+          <p:cNvPr id="22" name="TextBox 21"/>
           <p:cNvSpPr txBox="1"/>
           <p:nvPr/>
         </p:nvSpPr>
         <p:spPr>
           <a:xfrm>
-            <a:off x="5266944" y="2139696"/>
-            <a:ext cx="1554480" cy="237744"/>
+            <a:off x="5266944" y="2048256"/>
+            <a:ext cx="1700784" cy="1234440"/>
           </a:xfrm>
           <a:prstGeom prst="rect">
             <a:avLst/>
@@ -5080,29 +5373,103 @@
           </a:bodyPr>
           <a:lstStyle/>
           <a:p>
+            <a:pPr algn="l">
+              <a:lnSpc>
+                <a:spcPct val="112000"/>
+              </a:lnSpc>
+            </a:pPr>
+            <a:r>
+              <a:rPr sz="1150" b="0">
+                <a:solidFill>
+                  <a:srgbClr val="18212B"/>
+                </a:solidFill>
+                <a:latin typeface="Malgun Gothic"/>
+              </a:rPr>
+              <a:t>A user pastes a sequence. It is parsed and checked before anything runs.</a:t>
+            </a:r>
+          </a:p>
+        </p:txBody>
+      </p:sp>
+      <p:cxnSp>
+        <p:nvCxnSpPr>
+          <p:cNvPr id="23" name="Connector 22"/>
+          <p:cNvCxnSpPr/>
+          <p:nvPr/>
+        </p:nvCxnSpPr>
+        <p:spPr>
+          <a:xfrm>
+            <a:off x="5266944" y="3310128"/>
+            <a:ext cx="1682496" cy="0"/>
+          </a:xfrm>
+          <a:prstGeom prst="line">
+            <a:avLst/>
+          </a:prstGeom>
+          <a:ln w="12700">
+            <a:solidFill>
+              <a:srgbClr val="D9DEE7"/>
+            </a:solidFill>
+          </a:ln>
+        </p:spPr>
+        <p:style>
+          <a:lnRef idx="2">
+            <a:schemeClr val="accent1"/>
+          </a:lnRef>
+          <a:fillRef idx="0">
+            <a:schemeClr val="accent1"/>
+          </a:fillRef>
+          <a:effectRef idx="1">
+            <a:schemeClr val="accent1"/>
+          </a:effectRef>
+          <a:fontRef idx="minor">
+            <a:schemeClr val="tx1"/>
+          </a:fontRef>
+        </p:style>
+      </p:cxnSp>
+      <p:sp>
+        <p:nvSpPr>
+          <p:cNvPr id="24" name="TextBox 23"/>
+          <p:cNvSpPr txBox="1"/>
+          <p:nvPr/>
+        </p:nvSpPr>
+        <p:spPr>
+          <a:xfrm>
+            <a:off x="5266944" y="3401568"/>
+            <a:ext cx="1737360" cy="457200"/>
+          </a:xfrm>
+          <a:prstGeom prst="rect">
+            <a:avLst/>
+          </a:prstGeom>
+          <a:noFill/>
+        </p:spPr>
+        <p:txBody>
+          <a:bodyPr wrap="square" lIns="0" rIns="0" tIns="0" bIns="0" anchor="t">
+            <a:noAutofit/>
+          </a:bodyPr>
+          <a:lstStyle/>
+          <a:p>
             <a:pPr algn="l"/>
             <a:r>
-              <a:rPr sz="1050" b="0">
+              <a:rPr sz="950" b="0">
                 <a:solidFill>
                   <a:srgbClr val="667085"/>
                 </a:solidFill>
-                <a:latin typeface="Malgun Gothic"/>
-              </a:rPr>
-              <a:t>web form</a:t>
-            </a:r>
-          </a:p>
-        </p:txBody>
-      </p:sp>
-      <p:sp>
-        <p:nvSpPr>
-          <p:cNvPr id="16" name="Right Arrow 15"/>
+                <a:latin typeface="Consolas"/>
+              </a:rPr>
+              <a:t>web form  -&gt;  FASTA</a:t>
+            </a:r>
+          </a:p>
+        </p:txBody>
+      </p:sp>
+      <p:sp>
+        <p:nvSpPr>
+          <p:cNvPr id="25" name="Right Arrow 24"/>
           <p:cNvSpPr/>
           <p:nvPr/>
         </p:nvSpPr>
         <p:spPr>
           <a:xfrm>
-            <a:off x="7022592" y="1938528"/>
-            <a:ext cx="219456" cy="292608"/>
+            <a:off x="7155179" y="2596896"/>
+            <a:ext cx="137160" cy="219456"/>
           </a:xfrm>
           <a:prstGeom prst="rightArrow">
             <a:avLst/>
@@ -5140,14 +5507,14 @@
       </p:sp>
       <p:sp>
         <p:nvSpPr>
-          <p:cNvPr id="17" name="Rounded Rectangle 16"/>
+          <p:cNvPr id="26" name="Rounded Rectangle 25"/>
           <p:cNvSpPr/>
           <p:nvPr/>
         </p:nvSpPr>
         <p:spPr>
           <a:xfrm>
-            <a:off x="7296912" y="1600200"/>
-            <a:ext cx="1874519" cy="960120"/>
+            <a:off x="7296912" y="1481328"/>
+            <a:ext cx="2048256" cy="2487168"/>
           </a:xfrm>
           <a:prstGeom prst="roundRect">
             <a:avLst/>
@@ -5185,14 +5552,59 @@
       </p:sp>
       <p:sp>
         <p:nvSpPr>
-          <p:cNvPr id="18" name="TextBox 17"/>
+          <p:cNvPr id="27" name="Rectangle 26"/>
+          <p:cNvSpPr/>
+          <p:nvPr/>
+        </p:nvSpPr>
+        <p:spPr>
+          <a:xfrm>
+            <a:off x="7296912" y="1481328"/>
+            <a:ext cx="2048256" cy="420624"/>
+          </a:xfrm>
+          <a:prstGeom prst="rect">
+            <a:avLst/>
+          </a:prstGeom>
+          <a:solidFill>
+            <a:srgbClr val="176B87"/>
+          </a:solidFill>
+          <a:ln>
+            <a:solidFill>
+              <a:srgbClr val="176B87"/>
+            </a:solidFill>
+          </a:ln>
+        </p:spPr>
+        <p:style>
+          <a:lnRef idx="1">
+            <a:schemeClr val="accent1"/>
+          </a:lnRef>
+          <a:fillRef idx="3">
+            <a:schemeClr val="accent1"/>
+          </a:fillRef>
+          <a:effectRef idx="2">
+            <a:schemeClr val="accent1"/>
+          </a:effectRef>
+          <a:fontRef idx="minor">
+            <a:schemeClr val="lt1"/>
+          </a:fontRef>
+        </p:style>
+        <p:txBody>
+          <a:bodyPr rtlCol="0" anchor="ctr"/>
+          <a:lstStyle/>
+          <a:p>
+            <a:pPr algn="ctr"/>
+          </a:p>
+        </p:txBody>
+      </p:sp>
+      <p:sp>
+        <p:nvSpPr>
+          <p:cNvPr id="28" name="TextBox 27"/>
           <p:cNvSpPr txBox="1"/>
           <p:nvPr/>
         </p:nvSpPr>
         <p:spPr>
           <a:xfrm>
-            <a:off x="7479792" y="1810512"/>
-            <a:ext cx="1554480" cy="274320"/>
+            <a:off x="7479792" y="1572768"/>
+            <a:ext cx="1737360" cy="256032"/>
           </a:xfrm>
           <a:prstGeom prst="rect">
             <a:avLst/>
@@ -5207,27 +5619,27 @@
           <a:p>
             <a:pPr algn="l"/>
             <a:r>
-              <a:rPr sz="1350" b="1">
-                <a:solidFill>
-                  <a:srgbClr val="18212B"/>
-                </a:solidFill>
-                <a:latin typeface="Malgun Gothic"/>
-              </a:rPr>
-              <a:t>Three searches</a:t>
-            </a:r>
-          </a:p>
-        </p:txBody>
-      </p:sp>
-      <p:sp>
-        <p:nvSpPr>
-          <p:cNvPr id="19" name="TextBox 18"/>
+              <a:rPr sz="1400" b="1">
+                <a:solidFill>
+                  <a:srgbClr val="FFFFFF"/>
+                </a:solidFill>
+                <a:latin typeface="Malgun Gothic"/>
+              </a:rPr>
+              <a:t>4   Search</a:t>
+            </a:r>
+          </a:p>
+        </p:txBody>
+      </p:sp>
+      <p:sp>
+        <p:nvSpPr>
+          <p:cNvPr id="29" name="TextBox 28"/>
           <p:cNvSpPr txBox="1"/>
           <p:nvPr/>
         </p:nvSpPr>
         <p:spPr>
           <a:xfrm>
-            <a:off x="7479792" y="2139696"/>
-            <a:ext cx="1554480" cy="237744"/>
+            <a:off x="7479792" y="2048256"/>
+            <a:ext cx="1700784" cy="1234440"/>
           </a:xfrm>
           <a:prstGeom prst="rect">
             <a:avLst/>
@@ -5240,29 +5652,103 @@
           </a:bodyPr>
           <a:lstStyle/>
           <a:p>
+            <a:pPr algn="l">
+              <a:lnSpc>
+                <a:spcPct val="112000"/>
+              </a:lnSpc>
+            </a:pPr>
+            <a:r>
+              <a:rPr sz="1150" b="0">
+                <a:solidFill>
+                  <a:srgbClr val="18212B"/>
+                </a:solidFill>
+                <a:latin typeface="Malgun Gothic"/>
+              </a:rPr>
+              <a:t>All three searches run against the built files. No database is touched.</a:t>
+            </a:r>
+          </a:p>
+        </p:txBody>
+      </p:sp>
+      <p:cxnSp>
+        <p:nvCxnSpPr>
+          <p:cNvPr id="30" name="Connector 29"/>
+          <p:cNvCxnSpPr/>
+          <p:nvPr/>
+        </p:nvCxnSpPr>
+        <p:spPr>
+          <a:xfrm>
+            <a:off x="7479792" y="3310128"/>
+            <a:ext cx="1682496" cy="0"/>
+          </a:xfrm>
+          <a:prstGeom prst="line">
+            <a:avLst/>
+          </a:prstGeom>
+          <a:ln w="12700">
+            <a:solidFill>
+              <a:srgbClr val="D9DEE7"/>
+            </a:solidFill>
+          </a:ln>
+        </p:spPr>
+        <p:style>
+          <a:lnRef idx="2">
+            <a:schemeClr val="accent1"/>
+          </a:lnRef>
+          <a:fillRef idx="0">
+            <a:schemeClr val="accent1"/>
+          </a:fillRef>
+          <a:effectRef idx="1">
+            <a:schemeClr val="accent1"/>
+          </a:effectRef>
+          <a:fontRef idx="minor">
+            <a:schemeClr val="tx1"/>
+          </a:fontRef>
+        </p:style>
+      </p:cxnSp>
+      <p:sp>
+        <p:nvSpPr>
+          <p:cNvPr id="31" name="TextBox 30"/>
+          <p:cNvSpPr txBox="1"/>
+          <p:nvPr/>
+        </p:nvSpPr>
+        <p:spPr>
+          <a:xfrm>
+            <a:off x="7479792" y="3401568"/>
+            <a:ext cx="1737360" cy="457200"/>
+          </a:xfrm>
+          <a:prstGeom prst="rect">
+            <a:avLst/>
+          </a:prstGeom>
+          <a:noFill/>
+        </p:spPr>
+        <p:txBody>
+          <a:bodyPr wrap="square" lIns="0" rIns="0" tIns="0" bIns="0" anchor="t">
+            <a:noAutofit/>
+          </a:bodyPr>
+          <a:lstStyle/>
+          <a:p>
             <a:pPr algn="l"/>
             <a:r>
-              <a:rPr sz="1050" b="0">
+              <a:rPr sz="950" b="0">
                 <a:solidFill>
                   <a:srgbClr val="667085"/>
                 </a:solidFill>
-                <a:latin typeface="Malgun Gothic"/>
-              </a:rPr>
-              <a:t>BLAST + HMMER</a:t>
-            </a:r>
-          </a:p>
-        </p:txBody>
-      </p:sp>
-      <p:sp>
-        <p:nvSpPr>
-          <p:cNvPr id="20" name="Right Arrow 19"/>
+                <a:latin typeface="Consolas"/>
+              </a:rPr>
+              <a:t>blastp, phmmer, hmmscan</a:t>
+            </a:r>
+          </a:p>
+        </p:txBody>
+      </p:sp>
+      <p:sp>
+        <p:nvSpPr>
+          <p:cNvPr id="32" name="Right Arrow 31"/>
           <p:cNvSpPr/>
           <p:nvPr/>
         </p:nvSpPr>
         <p:spPr>
           <a:xfrm>
-            <a:off x="9235440" y="1938528"/>
-            <a:ext cx="219456" cy="292608"/>
+            <a:off x="9368028" y="2596896"/>
+            <a:ext cx="137160" cy="219456"/>
           </a:xfrm>
           <a:prstGeom prst="rightArrow">
             <a:avLst/>
@@ -5300,14 +5786,14 @@
       </p:sp>
       <p:sp>
         <p:nvSpPr>
-          <p:cNvPr id="21" name="Rounded Rectangle 20"/>
+          <p:cNvPr id="33" name="Rounded Rectangle 32"/>
           <p:cNvSpPr/>
           <p:nvPr/>
         </p:nvSpPr>
         <p:spPr>
           <a:xfrm>
-            <a:off x="9509760" y="1600200"/>
-            <a:ext cx="1874519" cy="960120"/>
+            <a:off x="9509760" y="1481328"/>
+            <a:ext cx="2048256" cy="2487168"/>
           </a:xfrm>
           <a:prstGeom prst="roundRect">
             <a:avLst/>
@@ -5345,14 +5831,59 @@
       </p:sp>
       <p:sp>
         <p:nvSpPr>
-          <p:cNvPr id="22" name="TextBox 21"/>
+          <p:cNvPr id="34" name="Rectangle 33"/>
+          <p:cNvSpPr/>
+          <p:nvPr/>
+        </p:nvSpPr>
+        <p:spPr>
+          <a:xfrm>
+            <a:off x="9509760" y="1481328"/>
+            <a:ext cx="2048256" cy="420624"/>
+          </a:xfrm>
+          <a:prstGeom prst="rect">
+            <a:avLst/>
+          </a:prstGeom>
+          <a:solidFill>
+            <a:srgbClr val="176B87"/>
+          </a:solidFill>
+          <a:ln>
+            <a:solidFill>
+              <a:srgbClr val="176B87"/>
+            </a:solidFill>
+          </a:ln>
+        </p:spPr>
+        <p:style>
+          <a:lnRef idx="1">
+            <a:schemeClr val="accent1"/>
+          </a:lnRef>
+          <a:fillRef idx="3">
+            <a:schemeClr val="accent1"/>
+          </a:fillRef>
+          <a:effectRef idx="2">
+            <a:schemeClr val="accent1"/>
+          </a:effectRef>
+          <a:fontRef idx="minor">
+            <a:schemeClr val="lt1"/>
+          </a:fontRef>
+        </p:style>
+        <p:txBody>
+          <a:bodyPr rtlCol="0" anchor="ctr"/>
+          <a:lstStyle/>
+          <a:p>
+            <a:pPr algn="ctr"/>
+          </a:p>
+        </p:txBody>
+      </p:sp>
+      <p:sp>
+        <p:nvSpPr>
+          <p:cNvPr id="35" name="TextBox 34"/>
           <p:cNvSpPr txBox="1"/>
           <p:nvPr/>
         </p:nvSpPr>
         <p:spPr>
           <a:xfrm>
-            <a:off x="9692640" y="1810512"/>
-            <a:ext cx="1554480" cy="274320"/>
+            <a:off x="9692640" y="1572768"/>
+            <a:ext cx="1737360" cy="256032"/>
           </a:xfrm>
           <a:prstGeom prst="rect">
             <a:avLst/>
@@ -5367,27 +5898,27 @@
           <a:p>
             <a:pPr algn="l"/>
             <a:r>
-              <a:rPr sz="1350" b="1">
-                <a:solidFill>
-                  <a:srgbClr val="18212B"/>
-                </a:solidFill>
-                <a:latin typeface="Malgun Gothic"/>
-              </a:rPr>
-              <a:t>Result page</a:t>
-            </a:r>
-          </a:p>
-        </p:txBody>
-      </p:sp>
-      <p:sp>
-        <p:nvSpPr>
-          <p:cNvPr id="23" name="TextBox 22"/>
+              <a:rPr sz="1400" b="1">
+                <a:solidFill>
+                  <a:srgbClr val="FFFFFF"/>
+                </a:solidFill>
+                <a:latin typeface="Malgun Gothic"/>
+              </a:rPr>
+              <a:t>5   Show</a:t>
+            </a:r>
+          </a:p>
+        </p:txBody>
+      </p:sp>
+      <p:sp>
+        <p:nvSpPr>
+          <p:cNvPr id="36" name="TextBox 35"/>
           <p:cNvSpPr txBox="1"/>
           <p:nvPr/>
         </p:nvSpPr>
         <p:spPr>
           <a:xfrm>
-            <a:off x="9692640" y="2139696"/>
-            <a:ext cx="1554480" cy="237744"/>
+            <a:off x="9692640" y="2048256"/>
+            <a:ext cx="1700784" cy="1234440"/>
           </a:xfrm>
           <a:prstGeom prst="rect">
             <a:avLst/>
@@ -5400,29 +5931,403 @@
           </a:bodyPr>
           <a:lstStyle/>
           <a:p>
+            <a:pPr algn="l">
+              <a:lnSpc>
+                <a:spcPct val="112000"/>
+              </a:lnSpc>
+            </a:pPr>
+            <a:r>
+              <a:rPr sz="1150" b="0">
+                <a:solidFill>
+                  <a:srgbClr val="18212B"/>
+                </a:solidFill>
+                <a:latin typeface="Malgun Gothic"/>
+              </a:rPr>
+              <a:t>Attach EC, source and description to each hit, then render the tables.</a:t>
+            </a:r>
+          </a:p>
+        </p:txBody>
+      </p:sp>
+      <p:cxnSp>
+        <p:nvCxnSpPr>
+          <p:cNvPr id="37" name="Connector 36"/>
+          <p:cNvCxnSpPr/>
+          <p:nvPr/>
+        </p:nvCxnSpPr>
+        <p:spPr>
+          <a:xfrm>
+            <a:off x="9692640" y="3310128"/>
+            <a:ext cx="1682496" cy="0"/>
+          </a:xfrm>
+          <a:prstGeom prst="line">
+            <a:avLst/>
+          </a:prstGeom>
+          <a:ln w="12700">
+            <a:solidFill>
+              <a:srgbClr val="D9DEE7"/>
+            </a:solidFill>
+          </a:ln>
+        </p:spPr>
+        <p:style>
+          <a:lnRef idx="2">
+            <a:schemeClr val="accent1"/>
+          </a:lnRef>
+          <a:fillRef idx="0">
+            <a:schemeClr val="accent1"/>
+          </a:fillRef>
+          <a:effectRef idx="1">
+            <a:schemeClr val="accent1"/>
+          </a:effectRef>
+          <a:fontRef idx="minor">
+            <a:schemeClr val="tx1"/>
+          </a:fontRef>
+        </p:style>
+      </p:cxnSp>
+      <p:sp>
+        <p:nvSpPr>
+          <p:cNvPr id="38" name="TextBox 37"/>
+          <p:cNvSpPr txBox="1"/>
+          <p:nvPr/>
+        </p:nvSpPr>
+        <p:spPr>
+          <a:xfrm>
+            <a:off x="9692640" y="3401568"/>
+            <a:ext cx="1737360" cy="457200"/>
+          </a:xfrm>
+          <a:prstGeom prst="rect">
+            <a:avLst/>
+          </a:prstGeom>
+          <a:noFill/>
+        </p:spPr>
+        <p:txBody>
+          <a:bodyPr wrap="square" lIns="0" rIns="0" tIns="0" bIns="0" anchor="t">
+            <a:noAutofit/>
+          </a:bodyPr>
+          <a:lstStyle/>
+          <a:p>
             <a:pPr algn="l"/>
             <a:r>
-              <a:rPr sz="1050" b="0">
+              <a:rPr sz="950" b="0">
                 <a:solidFill>
                   <a:srgbClr val="667085"/>
                 </a:solidFill>
-                <a:latin typeface="Malgun Gothic"/>
-              </a:rPr>
-              <a:t>HTML, CSV, JSON</a:t>
-            </a:r>
-          </a:p>
-        </p:txBody>
-      </p:sp>
-      <p:sp>
-        <p:nvSpPr>
-          <p:cNvPr id="24" name="Rounded Rectangle 23"/>
+                <a:latin typeface="Consolas"/>
+              </a:rPr>
+              <a:t>SQLite  -&gt;  HTML, CSV, JSON</a:t>
+            </a:r>
+          </a:p>
+        </p:txBody>
+      </p:sp>
+      <p:sp>
+        <p:nvSpPr>
+          <p:cNvPr id="39" name="Rounded Rectangle 38"/>
           <p:cNvSpPr/>
           <p:nvPr/>
         </p:nvSpPr>
         <p:spPr>
           <a:xfrm>
-            <a:off x="658368" y="3017520"/>
-            <a:ext cx="3474720" cy="2240280"/>
+            <a:off x="658368" y="4169663"/>
+            <a:ext cx="4261104" cy="1170432"/>
+          </a:xfrm>
+          <a:prstGeom prst="roundRect">
+            <a:avLst/>
+          </a:prstGeom>
+          <a:solidFill>
+            <a:srgbClr val="FBECEC"/>
+          </a:solidFill>
+          <a:ln w="12700">
+            <a:solidFill>
+              <a:srgbClr val="FBECEC"/>
+            </a:solidFill>
+          </a:ln>
+        </p:spPr>
+        <p:style>
+          <a:lnRef idx="1">
+            <a:schemeClr val="accent1"/>
+          </a:lnRef>
+          <a:fillRef idx="3">
+            <a:schemeClr val="accent1"/>
+          </a:fillRef>
+          <a:effectRef idx="2">
+            <a:schemeClr val="accent1"/>
+          </a:effectRef>
+          <a:fontRef idx="minor">
+            <a:schemeClr val="lt1"/>
+          </a:fontRef>
+        </p:style>
+        <p:txBody>
+          <a:bodyPr rtlCol="0" anchor="ctr"/>
+          <a:lstStyle/>
+          <a:p>
+            <a:pPr algn="ctr"/>
+          </a:p>
+        </p:txBody>
+      </p:sp>
+      <p:sp>
+        <p:nvSpPr>
+          <p:cNvPr id="40" name="TextBox 39"/>
+          <p:cNvSpPr txBox="1"/>
+          <p:nvPr/>
+        </p:nvSpPr>
+        <p:spPr>
+          <a:xfrm>
+            <a:off x="932688" y="4352544"/>
+            <a:ext cx="1828800" cy="292608"/>
+          </a:xfrm>
+          <a:prstGeom prst="rect">
+            <a:avLst/>
+          </a:prstGeom>
+          <a:noFill/>
+        </p:spPr>
+        <p:txBody>
+          <a:bodyPr wrap="square" lIns="0" rIns="0" tIns="0" bIns="0" anchor="t">
+            <a:noAutofit/>
+          </a:bodyPr>
+          <a:lstStyle/>
+          <a:p>
+            <a:pPr algn="l"/>
+            <a:r>
+              <a:rPr sz="1500" b="1">
+                <a:solidFill>
+                  <a:srgbClr val="B71A1A"/>
+                </a:solidFill>
+                <a:latin typeface="Malgun Gothic"/>
+              </a:rPr>
+              <a:t>OFFLINE</a:t>
+            </a:r>
+          </a:p>
+        </p:txBody>
+      </p:sp>
+      <p:sp>
+        <p:nvSpPr>
+          <p:cNvPr id="41" name="TextBox 40"/>
+          <p:cNvSpPr txBox="1"/>
+          <p:nvPr/>
+        </p:nvSpPr>
+        <p:spPr>
+          <a:xfrm>
+            <a:off x="3547872" y="4370832"/>
+            <a:ext cx="1097280" cy="256032"/>
+          </a:xfrm>
+          <a:prstGeom prst="rect">
+            <a:avLst/>
+          </a:prstGeom>
+          <a:noFill/>
+        </p:spPr>
+        <p:txBody>
+          <a:bodyPr wrap="square" lIns="0" rIns="0" tIns="0" bIns="0" anchor="t">
+            <a:noAutofit/>
+          </a:bodyPr>
+          <a:lstStyle/>
+          <a:p>
+            <a:pPr algn="r"/>
+            <a:r>
+              <a:rPr sz="1300" b="1">
+                <a:solidFill>
+                  <a:srgbClr val="B71A1A"/>
+                </a:solidFill>
+                <a:latin typeface="Malgun Gothic"/>
+              </a:rPr>
+              <a:t>minutes</a:t>
+            </a:r>
+          </a:p>
+        </p:txBody>
+      </p:sp>
+      <p:sp>
+        <p:nvSpPr>
+          <p:cNvPr id="42" name="TextBox 41"/>
+          <p:cNvSpPr txBox="1"/>
+          <p:nvPr/>
+        </p:nvSpPr>
+        <p:spPr>
+          <a:xfrm>
+            <a:off x="932688" y="4754880"/>
+            <a:ext cx="3712464" cy="384048"/>
+          </a:xfrm>
+          <a:prstGeom prst="rect">
+            <a:avLst/>
+          </a:prstGeom>
+          <a:noFill/>
+        </p:spPr>
+        <p:txBody>
+          <a:bodyPr wrap="square" lIns="0" rIns="0" tIns="0" bIns="0" anchor="t">
+            <a:noAutofit/>
+          </a:bodyPr>
+          <a:lstStyle/>
+          <a:p>
+            <a:pPr algn="l"/>
+            <a:r>
+              <a:rPr sz="1300" b="0">
+                <a:solidFill>
+                  <a:srgbClr val="18212B"/>
+                </a:solidFill>
+                <a:latin typeface="Malgun Gothic"/>
+              </a:rPr>
+              <a:t>Runs on a schedule after each database refresh</a:t>
+            </a:r>
+          </a:p>
+        </p:txBody>
+      </p:sp>
+      <p:sp>
+        <p:nvSpPr>
+          <p:cNvPr id="43" name="Rounded Rectangle 42"/>
+          <p:cNvSpPr/>
+          <p:nvPr/>
+        </p:nvSpPr>
+        <p:spPr>
+          <a:xfrm>
+            <a:off x="5084064" y="4169663"/>
+            <a:ext cx="6455664" cy="1170432"/>
+          </a:xfrm>
+          <a:prstGeom prst="roundRect">
+            <a:avLst/>
+          </a:prstGeom>
+          <a:solidFill>
+            <a:srgbClr val="EAF4F7"/>
+          </a:solidFill>
+          <a:ln w="12700">
+            <a:solidFill>
+              <a:srgbClr val="EAF4F7"/>
+            </a:solidFill>
+          </a:ln>
+        </p:spPr>
+        <p:style>
+          <a:lnRef idx="1">
+            <a:schemeClr val="accent1"/>
+          </a:lnRef>
+          <a:fillRef idx="3">
+            <a:schemeClr val="accent1"/>
+          </a:fillRef>
+          <a:effectRef idx="2">
+            <a:schemeClr val="accent1"/>
+          </a:effectRef>
+          <a:fontRef idx="minor">
+            <a:schemeClr val="lt1"/>
+          </a:fontRef>
+        </p:style>
+        <p:txBody>
+          <a:bodyPr rtlCol="0" anchor="ctr"/>
+          <a:lstStyle/>
+          <a:p>
+            <a:pPr algn="ctr"/>
+          </a:p>
+        </p:txBody>
+      </p:sp>
+      <p:sp>
+        <p:nvSpPr>
+          <p:cNvPr id="44" name="TextBox 43"/>
+          <p:cNvSpPr txBox="1"/>
+          <p:nvPr/>
+        </p:nvSpPr>
+        <p:spPr>
+          <a:xfrm>
+            <a:off x="5358383" y="4352544"/>
+            <a:ext cx="1828800" cy="292608"/>
+          </a:xfrm>
+          <a:prstGeom prst="rect">
+            <a:avLst/>
+          </a:prstGeom>
+          <a:noFill/>
+        </p:spPr>
+        <p:txBody>
+          <a:bodyPr wrap="square" lIns="0" rIns="0" tIns="0" bIns="0" anchor="t">
+            <a:noAutofit/>
+          </a:bodyPr>
+          <a:lstStyle/>
+          <a:p>
+            <a:pPr algn="l"/>
+            <a:r>
+              <a:rPr sz="1500" b="1">
+                <a:solidFill>
+                  <a:srgbClr val="176B87"/>
+                </a:solidFill>
+                <a:latin typeface="Malgun Gothic"/>
+              </a:rPr>
+              <a:t>ONLINE</a:t>
+            </a:r>
+          </a:p>
+        </p:txBody>
+      </p:sp>
+      <p:sp>
+        <p:nvSpPr>
+          <p:cNvPr id="45" name="TextBox 44"/>
+          <p:cNvSpPr txBox="1"/>
+          <p:nvPr/>
+        </p:nvSpPr>
+        <p:spPr>
+          <a:xfrm>
+            <a:off x="10168128" y="4370832"/>
+            <a:ext cx="1097280" cy="256032"/>
+          </a:xfrm>
+          <a:prstGeom prst="rect">
+            <a:avLst/>
+          </a:prstGeom>
+          <a:noFill/>
+        </p:spPr>
+        <p:txBody>
+          <a:bodyPr wrap="square" lIns="0" rIns="0" tIns="0" bIns="0" anchor="t">
+            <a:noAutofit/>
+          </a:bodyPr>
+          <a:lstStyle/>
+          <a:p>
+            <a:pPr algn="r"/>
+            <a:r>
+              <a:rPr sz="1300" b="1">
+                <a:solidFill>
+                  <a:srgbClr val="176B87"/>
+                </a:solidFill>
+                <a:latin typeface="Malgun Gothic"/>
+              </a:rPr>
+              <a:t>seconds</a:t>
+            </a:r>
+          </a:p>
+        </p:txBody>
+      </p:sp>
+      <p:sp>
+        <p:nvSpPr>
+          <p:cNvPr id="46" name="TextBox 45"/>
+          <p:cNvSpPr txBox="1"/>
+          <p:nvPr/>
+        </p:nvSpPr>
+        <p:spPr>
+          <a:xfrm>
+            <a:off x="5358383" y="4754880"/>
+            <a:ext cx="5907024" cy="384048"/>
+          </a:xfrm>
+          <a:prstGeom prst="rect">
+            <a:avLst/>
+          </a:prstGeom>
+          <a:noFill/>
+        </p:spPr>
+        <p:txBody>
+          <a:bodyPr wrap="square" lIns="0" rIns="0" tIns="0" bIns="0" anchor="t">
+            <a:noAutofit/>
+          </a:bodyPr>
+          <a:lstStyle/>
+          <a:p>
+            <a:pPr algn="l"/>
+            <a:r>
+              <a:rPr sz="1300" b="0">
+                <a:solidFill>
+                  <a:srgbClr val="18212B"/>
+                </a:solidFill>
+                <a:latin typeface="Malgun Gothic"/>
+              </a:rPr>
+              <a:t>Runs per user request, inside the existing job queue</a:t>
+            </a:r>
+          </a:p>
+        </p:txBody>
+      </p:sp>
+      <p:sp>
+        <p:nvSpPr>
+          <p:cNvPr id="47" name="Rounded Rectangle 46"/>
+          <p:cNvSpPr/>
+          <p:nvPr/>
+        </p:nvSpPr>
+        <p:spPr>
+          <a:xfrm>
+            <a:off x="658368" y="5577840"/>
+            <a:ext cx="10881360" cy="566928"/>
           </a:xfrm>
           <a:prstGeom prst="roundRect">
             <a:avLst/>
@@ -5460,59 +6365,14 @@
       </p:sp>
       <p:sp>
         <p:nvSpPr>
-          <p:cNvPr id="25" name="Rectangle 24"/>
-          <p:cNvSpPr/>
-          <p:nvPr/>
-        </p:nvSpPr>
-        <p:spPr>
-          <a:xfrm>
-            <a:off x="658368" y="3017520"/>
-            <a:ext cx="3474720" cy="100584"/>
-          </a:xfrm>
-          <a:prstGeom prst="rect">
-            <a:avLst/>
-          </a:prstGeom>
-          <a:solidFill>
-            <a:srgbClr val="B71A1A"/>
-          </a:solidFill>
-          <a:ln>
-            <a:solidFill>
-              <a:srgbClr val="B71A1A"/>
-            </a:solidFill>
-          </a:ln>
-        </p:spPr>
-        <p:style>
-          <a:lnRef idx="1">
-            <a:schemeClr val="accent1"/>
-          </a:lnRef>
-          <a:fillRef idx="3">
-            <a:schemeClr val="accent1"/>
-          </a:fillRef>
-          <a:effectRef idx="2">
-            <a:schemeClr val="accent1"/>
-          </a:effectRef>
-          <a:fontRef idx="minor">
-            <a:schemeClr val="lt1"/>
-          </a:fontRef>
-        </p:style>
-        <p:txBody>
-          <a:bodyPr rtlCol="0" anchor="ctr"/>
-          <a:lstStyle/>
-          <a:p>
-            <a:pPr algn="ctr"/>
-          </a:p>
-        </p:txBody>
-      </p:sp>
-      <p:sp>
-        <p:nvSpPr>
-          <p:cNvPr id="26" name="TextBox 25"/>
+          <p:cNvPr id="48" name="TextBox 47"/>
           <p:cNvSpPr txBox="1"/>
           <p:nvPr/>
         </p:nvSpPr>
         <p:spPr>
           <a:xfrm>
-            <a:off x="914400" y="3310128"/>
-            <a:ext cx="3017520" cy="329184"/>
+            <a:off x="658368" y="5742432"/>
+            <a:ext cx="10881360" cy="274320"/>
           </a:xfrm>
           <a:prstGeom prst="rect">
             <a:avLst/>
@@ -5525,505 +6385,15 @@
           </a:bodyPr>
           <a:lstStyle/>
           <a:p>
-            <a:pPr algn="l"/>
-            <a:r>
-              <a:rPr sz="1800" b="1">
-                <a:solidFill>
-                  <a:srgbClr val="B71A1A"/>
-                </a:solidFill>
-                <a:latin typeface="Malgun Gothic"/>
-              </a:rPr>
-              <a:t>Reference builder</a:t>
-            </a:r>
-          </a:p>
-        </p:txBody>
-      </p:sp>
-      <p:sp>
-        <p:nvSpPr>
-          <p:cNvPr id="27" name="TextBox 26"/>
-          <p:cNvSpPr txBox="1"/>
-          <p:nvPr/>
-        </p:nvSpPr>
-        <p:spPr>
-          <a:xfrm>
-            <a:off x="914400" y="3840480"/>
-            <a:ext cx="3017520" cy="1737360"/>
-          </a:xfrm>
-          <a:prstGeom prst="rect">
-            <a:avLst/>
-          </a:prstGeom>
-          <a:noFill/>
-        </p:spPr>
-        <p:txBody>
-          <a:bodyPr wrap="square" lIns="18288" rIns="18288" tIns="18288" bIns="18288">
-            <a:noAutofit/>
-          </a:bodyPr>
-          <a:lstStyle/>
-          <a:p>
-            <a:pPr>
-              <a:lnSpc>
-                <a:spcPct val="105000"/>
-              </a:lnSpc>
-              <a:spcAft>
-                <a:spcPts val="1000"/>
-              </a:spcAft>
-            </a:pPr>
-            <a:r>
-              <a:rPr sz="1350">
-                <a:solidFill>
-                  <a:srgbClr val="18212B"/>
-                </a:solidFill>
-                <a:latin typeface="Malgun Gothic"/>
-              </a:rPr>
-              <a:t>•  Reads the copied DB once</a:t>
-            </a:r>
-          </a:p>
-          <a:p>
-            <a:pPr>
-              <a:lnSpc>
-                <a:spcPct val="105000"/>
-              </a:lnSpc>
-              <a:spcAft>
-                <a:spcPts val="1000"/>
-              </a:spcAft>
-            </a:pPr>
-            <a:r>
-              <a:rPr sz="1350">
-                <a:solidFill>
-                  <a:srgbClr val="18212B"/>
-                </a:solidFill>
-                <a:latin typeface="Malgun Gothic"/>
-              </a:rPr>
-              <a:t>•  Swiss-Prot and PDB rows</a:t>
-            </a:r>
-          </a:p>
-          <a:p>
-            <a:pPr>
-              <a:lnSpc>
-                <a:spcPct val="105000"/>
-              </a:lnSpc>
-              <a:spcAft>
-                <a:spcPts val="1000"/>
-              </a:spcAft>
-            </a:pPr>
-            <a:r>
-              <a:rPr sz="1350">
-                <a:solidFill>
-                  <a:srgbClr val="18212B"/>
-                </a:solidFill>
-                <a:latin typeface="Malgun Gothic"/>
-              </a:rPr>
-              <a:t>•  Writes FASTA, indexes, profiles</a:t>
-            </a:r>
-          </a:p>
-        </p:txBody>
-      </p:sp>
-      <p:sp>
-        <p:nvSpPr>
-          <p:cNvPr id="28" name="Rounded Rectangle 27"/>
-          <p:cNvSpPr/>
-          <p:nvPr/>
-        </p:nvSpPr>
-        <p:spPr>
-          <a:xfrm>
-            <a:off x="4334255" y="3017520"/>
-            <a:ext cx="3474720" cy="2240280"/>
-          </a:xfrm>
-          <a:prstGeom prst="roundRect">
-            <a:avLst/>
-          </a:prstGeom>
-          <a:solidFill>
-            <a:srgbClr val="F5F7FA"/>
-          </a:solidFill>
-          <a:ln w="12700">
-            <a:solidFill>
-              <a:srgbClr val="D9DEE7"/>
-            </a:solidFill>
-          </a:ln>
-        </p:spPr>
-        <p:style>
-          <a:lnRef idx="1">
-            <a:schemeClr val="accent1"/>
-          </a:lnRef>
-          <a:fillRef idx="3">
-            <a:schemeClr val="accent1"/>
-          </a:fillRef>
-          <a:effectRef idx="2">
-            <a:schemeClr val="accent1"/>
-          </a:effectRef>
-          <a:fontRef idx="minor">
-            <a:schemeClr val="lt1"/>
-          </a:fontRef>
-        </p:style>
-        <p:txBody>
-          <a:bodyPr rtlCol="0" anchor="ctr"/>
-          <a:lstStyle/>
-          <a:p>
             <a:pPr algn="ctr"/>
-          </a:p>
-        </p:txBody>
-      </p:sp>
-      <p:sp>
-        <p:nvSpPr>
-          <p:cNvPr id="29" name="Rectangle 28"/>
-          <p:cNvSpPr/>
-          <p:nvPr/>
-        </p:nvSpPr>
-        <p:spPr>
-          <a:xfrm>
-            <a:off x="4334255" y="3017520"/>
-            <a:ext cx="3474720" cy="100584"/>
-          </a:xfrm>
-          <a:prstGeom prst="rect">
-            <a:avLst/>
-          </a:prstGeom>
-          <a:solidFill>
-            <a:srgbClr val="176B87"/>
-          </a:solidFill>
-          <a:ln>
-            <a:solidFill>
-              <a:srgbClr val="176B87"/>
-            </a:solidFill>
-          </a:ln>
-        </p:spPr>
-        <p:style>
-          <a:lnRef idx="1">
-            <a:schemeClr val="accent1"/>
-          </a:lnRef>
-          <a:fillRef idx="3">
-            <a:schemeClr val="accent1"/>
-          </a:fillRef>
-          <a:effectRef idx="2">
-            <a:schemeClr val="accent1"/>
-          </a:effectRef>
-          <a:fontRef idx="minor">
-            <a:schemeClr val="lt1"/>
-          </a:fontRef>
-        </p:style>
-        <p:txBody>
-          <a:bodyPr rtlCol="0" anchor="ctr"/>
-          <a:lstStyle/>
-          <a:p>
-            <a:pPr algn="ctr"/>
-          </a:p>
-        </p:txBody>
-      </p:sp>
-      <p:sp>
-        <p:nvSpPr>
-          <p:cNvPr id="30" name="TextBox 29"/>
-          <p:cNvSpPr txBox="1"/>
-          <p:nvPr/>
-        </p:nvSpPr>
-        <p:spPr>
-          <a:xfrm>
-            <a:off x="4590288" y="3310128"/>
-            <a:ext cx="3017520" cy="329184"/>
-          </a:xfrm>
-          <a:prstGeom prst="rect">
-            <a:avLst/>
-          </a:prstGeom>
-          <a:noFill/>
-        </p:spPr>
-        <p:txBody>
-          <a:bodyPr wrap="square" lIns="0" rIns="0" tIns="0" bIns="0" anchor="t">
-            <a:noAutofit/>
-          </a:bodyPr>
-          <a:lstStyle/>
-          <a:p>
-            <a:pPr algn="l"/>
-            <a:r>
-              <a:rPr sz="1800" b="1">
-                <a:solidFill>
-                  <a:srgbClr val="176B87"/>
-                </a:solidFill>
-                <a:latin typeface="Malgun Gothic"/>
-              </a:rPr>
-              <a:t>Search service</a:t>
-            </a:r>
-          </a:p>
-        </p:txBody>
-      </p:sp>
-      <p:sp>
-        <p:nvSpPr>
-          <p:cNvPr id="31" name="TextBox 30"/>
-          <p:cNvSpPr txBox="1"/>
-          <p:nvPr/>
-        </p:nvSpPr>
-        <p:spPr>
-          <a:xfrm>
-            <a:off x="4590288" y="3840480"/>
-            <a:ext cx="3017520" cy="1737360"/>
-          </a:xfrm>
-          <a:prstGeom prst="rect">
-            <a:avLst/>
-          </a:prstGeom>
-          <a:noFill/>
-        </p:spPr>
-        <p:txBody>
-          <a:bodyPr wrap="square" lIns="18288" rIns="18288" tIns="18288" bIns="18288">
-            <a:noAutofit/>
-          </a:bodyPr>
-          <a:lstStyle/>
-          <a:p>
-            <a:pPr>
-              <a:lnSpc>
-                <a:spcPct val="105000"/>
-              </a:lnSpc>
-              <a:spcAft>
-                <a:spcPts val="1000"/>
-              </a:spcAft>
-            </a:pPr>
-            <a:r>
-              <a:rPr sz="1350">
-                <a:solidFill>
-                  <a:srgbClr val="18212B"/>
-                </a:solidFill>
-                <a:latin typeface="Malgun Gothic"/>
-              </a:rPr>
-              <a:t>•  blastp, phmmer, hmmscan</a:t>
-            </a:r>
-          </a:p>
-          <a:p>
-            <a:pPr>
-              <a:lnSpc>
-                <a:spcPct val="105000"/>
-              </a:lnSpc>
-              <a:spcAft>
-                <a:spcPts val="1000"/>
-              </a:spcAft>
-            </a:pPr>
-            <a:r>
-              <a:rPr sz="1350">
-                <a:solidFill>
-                  <a:srgbClr val="18212B"/>
-                </a:solidFill>
-                <a:latin typeface="Malgun Gothic"/>
-              </a:rPr>
-              <a:t>•  Plain function, no web framework</a:t>
-            </a:r>
-          </a:p>
-          <a:p>
-            <a:pPr>
-              <a:lnSpc>
-                <a:spcPct val="105000"/>
-              </a:lnSpc>
-              <a:spcAft>
-                <a:spcPts val="1000"/>
-              </a:spcAft>
-            </a:pPr>
-            <a:r>
-              <a:rPr sz="1350">
-                <a:solidFill>
-                  <a:srgbClr val="18212B"/>
-                </a:solidFill>
-                <a:latin typeface="Malgun Gothic"/>
-              </a:rPr>
-              <a:t>•  Callable from the EnzymeX scheduler</a:t>
-            </a:r>
-          </a:p>
-        </p:txBody>
-      </p:sp>
-      <p:sp>
-        <p:nvSpPr>
-          <p:cNvPr id="32" name="Rounded Rectangle 31"/>
-          <p:cNvSpPr/>
-          <p:nvPr/>
-        </p:nvSpPr>
-        <p:spPr>
-          <a:xfrm>
-            <a:off x="8010144" y="3017520"/>
-            <a:ext cx="3474720" cy="2240280"/>
-          </a:xfrm>
-          <a:prstGeom prst="roundRect">
-            <a:avLst/>
-          </a:prstGeom>
-          <a:solidFill>
-            <a:srgbClr val="F5F7FA"/>
-          </a:solidFill>
-          <a:ln w="12700">
-            <a:solidFill>
-              <a:srgbClr val="D9DEE7"/>
-            </a:solidFill>
-          </a:ln>
-        </p:spPr>
-        <p:style>
-          <a:lnRef idx="1">
-            <a:schemeClr val="accent1"/>
-          </a:lnRef>
-          <a:fillRef idx="3">
-            <a:schemeClr val="accent1"/>
-          </a:fillRef>
-          <a:effectRef idx="2">
-            <a:schemeClr val="accent1"/>
-          </a:effectRef>
-          <a:fontRef idx="minor">
-            <a:schemeClr val="lt1"/>
-          </a:fontRef>
-        </p:style>
-        <p:txBody>
-          <a:bodyPr rtlCol="0" anchor="ctr"/>
-          <a:lstStyle/>
-          <a:p>
-            <a:pPr algn="ctr"/>
-          </a:p>
-        </p:txBody>
-      </p:sp>
-      <p:sp>
-        <p:nvSpPr>
-          <p:cNvPr id="33" name="Rectangle 32"/>
-          <p:cNvSpPr/>
-          <p:nvPr/>
-        </p:nvSpPr>
-        <p:spPr>
-          <a:xfrm>
-            <a:off x="8010144" y="3017520"/>
-            <a:ext cx="3474720" cy="100584"/>
-          </a:xfrm>
-          <a:prstGeom prst="rect">
-            <a:avLst/>
-          </a:prstGeom>
-          <a:solidFill>
-            <a:srgbClr val="167C5A"/>
-          </a:solidFill>
-          <a:ln>
-            <a:solidFill>
-              <a:srgbClr val="167C5A"/>
-            </a:solidFill>
-          </a:ln>
-        </p:spPr>
-        <p:style>
-          <a:lnRef idx="1">
-            <a:schemeClr val="accent1"/>
-          </a:lnRef>
-          <a:fillRef idx="3">
-            <a:schemeClr val="accent1"/>
-          </a:fillRef>
-          <a:effectRef idx="2">
-            <a:schemeClr val="accent1"/>
-          </a:effectRef>
-          <a:fontRef idx="minor">
-            <a:schemeClr val="lt1"/>
-          </a:fontRef>
-        </p:style>
-        <p:txBody>
-          <a:bodyPr rtlCol="0" anchor="ctr"/>
-          <a:lstStyle/>
-          <a:p>
-            <a:pPr algn="ctr"/>
-          </a:p>
-        </p:txBody>
-      </p:sp>
-      <p:sp>
-        <p:nvSpPr>
-          <p:cNvPr id="34" name="TextBox 33"/>
-          <p:cNvSpPr txBox="1"/>
-          <p:nvPr/>
-        </p:nvSpPr>
-        <p:spPr>
-          <a:xfrm>
-            <a:off x="8266175" y="3310128"/>
-            <a:ext cx="3017520" cy="329184"/>
-          </a:xfrm>
-          <a:prstGeom prst="rect">
-            <a:avLst/>
-          </a:prstGeom>
-          <a:noFill/>
-        </p:spPr>
-        <p:txBody>
-          <a:bodyPr wrap="square" lIns="0" rIns="0" tIns="0" bIns="0" anchor="t">
-            <a:noAutofit/>
-          </a:bodyPr>
-          <a:lstStyle/>
-          <a:p>
-            <a:pPr algn="l"/>
-            <a:r>
-              <a:rPr sz="1800" b="1">
-                <a:solidFill>
-                  <a:srgbClr val="167C5A"/>
-                </a:solidFill>
-                <a:latin typeface="Malgun Gothic"/>
-              </a:rPr>
-              <a:t>Result page</a:t>
-            </a:r>
-          </a:p>
-        </p:txBody>
-      </p:sp>
-      <p:sp>
-        <p:nvSpPr>
-          <p:cNvPr id="35" name="TextBox 34"/>
-          <p:cNvSpPr txBox="1"/>
-          <p:nvPr/>
-        </p:nvSpPr>
-        <p:spPr>
-          <a:xfrm>
-            <a:off x="8266175" y="3840480"/>
-            <a:ext cx="3017520" cy="1737360"/>
-          </a:xfrm>
-          <a:prstGeom prst="rect">
-            <a:avLst/>
-          </a:prstGeom>
-          <a:noFill/>
-        </p:spPr>
-        <p:txBody>
-          <a:bodyPr wrap="square" lIns="18288" rIns="18288" tIns="18288" bIns="18288">
-            <a:noAutofit/>
-          </a:bodyPr>
-          <a:lstStyle/>
-          <a:p>
-            <a:pPr>
-              <a:lnSpc>
-                <a:spcPct val="105000"/>
-              </a:lnSpc>
-              <a:spcAft>
-                <a:spcPts val="1000"/>
-              </a:spcAft>
-            </a:pPr>
-            <a:r>
-              <a:rPr sz="1350">
-                <a:solidFill>
-                  <a:srgbClr val="18212B"/>
-                </a:solidFill>
-                <a:latin typeface="Malgun Gothic"/>
-              </a:rPr>
-              <a:t>•  One table per method</a:t>
-            </a:r>
-          </a:p>
-          <a:p>
-            <a:pPr>
-              <a:lnSpc>
-                <a:spcPct val="105000"/>
-              </a:lnSpc>
-              <a:spcAft>
-                <a:spcPts val="1000"/>
-              </a:spcAft>
-            </a:pPr>
-            <a:r>
-              <a:rPr sz="1350">
-                <a:solidFill>
-                  <a:srgbClr val="18212B"/>
-                </a:solidFill>
-                <a:latin typeface="Malgun Gothic"/>
-              </a:rPr>
-              <a:t>•  EC, source, description per hit</a:t>
-            </a:r>
-          </a:p>
-          <a:p>
-            <a:pPr>
-              <a:lnSpc>
-                <a:spcPct val="105000"/>
-              </a:lnSpc>
-              <a:spcAft>
-                <a:spcPts val="1000"/>
-              </a:spcAft>
-            </a:pPr>
-            <a:r>
-              <a:rPr sz="1350">
-                <a:solidFill>
-                  <a:srgbClr val="18212B"/>
-                </a:solidFill>
-                <a:latin typeface="Malgun Gothic"/>
-              </a:rPr>
-              <a:t>•  CSV and JSON export</a:t>
+            <a:r>
+              <a:rPr sz="1350" b="1">
+                <a:solidFill>
+                  <a:srgbClr val="52565B"/>
+                </a:solidFill>
+                <a:latin typeface="Malgun Gothic"/>
+              </a:rPr>
+              <a:t>Step 1 is the only database connection in the entire flow. Everything after it reads files written by step 2.</a:t>
             </a:r>
           </a:p>
         </p:txBody>

--- a/docs/presentations/EnzymeX_BLAST_HMMER_update.pptx
+++ b/docs/presentations/EnzymeX_BLAST_HMMER_update.pptx
@@ -4182,48 +4182,13 @@
       </p:sp>
       <p:sp>
         <p:nvSpPr>
-          <p:cNvPr id="5" name="TextBox 4"/>
-          <p:cNvSpPr txBox="1"/>
-          <p:nvPr/>
-        </p:nvSpPr>
-        <p:spPr>
-          <a:xfrm>
-            <a:off x="941832" y="3493008"/>
-            <a:ext cx="10058400" cy="457200"/>
-          </a:xfrm>
-          <a:prstGeom prst="rect">
-            <a:avLst/>
-          </a:prstGeom>
-          <a:noFill/>
-        </p:spPr>
-        <p:txBody>
-          <a:bodyPr wrap="square" lIns="0" rIns="0" tIns="0" bIns="0" anchor="t">
-            <a:noAutofit/>
-          </a:bodyPr>
-          <a:lstStyle/>
-          <a:p>
-            <a:pPr algn="l"/>
-            <a:r>
-              <a:rPr sz="2000" b="0">
-                <a:solidFill>
-                  <a:srgbClr val="52565B"/>
-                </a:solidFill>
-                <a:latin typeface="Malgun Gothic"/>
-              </a:rPr>
-              <a:t>Sequence similarity search for the result page</a:t>
-            </a:r>
-          </a:p>
-        </p:txBody>
-      </p:sp>
-      <p:sp>
-        <p:nvSpPr>
-          <p:cNvPr id="6" name="Rounded Rectangle 5"/>
+          <p:cNvPr id="5" name="Rounded Rectangle 4"/>
           <p:cNvSpPr/>
           <p:nvPr/>
         </p:nvSpPr>
         <p:spPr>
           <a:xfrm>
-            <a:off x="941832" y="4206240"/>
+            <a:off x="941832" y="3611880"/>
             <a:ext cx="1024128" cy="310896"/>
           </a:xfrm>
           <a:prstGeom prst="roundRect">
@@ -4262,13 +4227,13 @@
       </p:sp>
       <p:sp>
         <p:nvSpPr>
-          <p:cNvPr id="7" name="TextBox 6"/>
+          <p:cNvPr id="6" name="TextBox 5"/>
           <p:cNvSpPr txBox="1"/>
           <p:nvPr/>
         </p:nvSpPr>
         <p:spPr>
           <a:xfrm>
-            <a:off x="978408" y="4215383"/>
+            <a:off x="978408" y="3621024"/>
             <a:ext cx="950976" cy="256032"/>
           </a:xfrm>
           <a:prstGeom prst="rect">
@@ -4297,13 +4262,13 @@
       </p:sp>
       <p:sp>
         <p:nvSpPr>
-          <p:cNvPr id="8" name="Rounded Rectangle 7"/>
+          <p:cNvPr id="7" name="Rounded Rectangle 6"/>
           <p:cNvSpPr/>
           <p:nvPr/>
         </p:nvSpPr>
         <p:spPr>
           <a:xfrm>
-            <a:off x="2103120" y="4206240"/>
+            <a:off x="2103120" y="3611880"/>
             <a:ext cx="1115568" cy="310896"/>
           </a:xfrm>
           <a:prstGeom prst="roundRect">
@@ -4342,13 +4307,13 @@
       </p:sp>
       <p:sp>
         <p:nvSpPr>
-          <p:cNvPr id="9" name="TextBox 8"/>
+          <p:cNvPr id="8" name="TextBox 7"/>
           <p:cNvSpPr txBox="1"/>
           <p:nvPr/>
         </p:nvSpPr>
         <p:spPr>
           <a:xfrm>
-            <a:off x="2139696" y="4215383"/>
+            <a:off x="2139696" y="3621024"/>
             <a:ext cx="1042415" cy="256032"/>
           </a:xfrm>
           <a:prstGeom prst="rect">
@@ -4377,13 +4342,13 @@
       </p:sp>
       <p:sp>
         <p:nvSpPr>
-          <p:cNvPr id="10" name="Rounded Rectangle 9"/>
+          <p:cNvPr id="9" name="Rounded Rectangle 8"/>
           <p:cNvSpPr/>
           <p:nvPr/>
         </p:nvSpPr>
         <p:spPr>
           <a:xfrm>
-            <a:off x="3355848" y="4206240"/>
+            <a:off x="3355848" y="3611880"/>
             <a:ext cx="1188720" cy="310896"/>
           </a:xfrm>
           <a:prstGeom prst="roundRect">
@@ -4422,47 +4387,47 @@
       </p:sp>
       <p:sp>
         <p:nvSpPr>
+          <p:cNvPr id="10" name="TextBox 9"/>
+          <p:cNvSpPr txBox="1"/>
+          <p:nvPr/>
+        </p:nvSpPr>
+        <p:spPr>
+          <a:xfrm>
+            <a:off x="3392424" y="3621024"/>
+            <a:ext cx="1115568" cy="256032"/>
+          </a:xfrm>
+          <a:prstGeom prst="rect">
+            <a:avLst/>
+          </a:prstGeom>
+          <a:noFill/>
+        </p:spPr>
+        <p:txBody>
+          <a:bodyPr wrap="square" lIns="0" rIns="0" tIns="0" bIns="0" anchor="ctr">
+            <a:noAutofit/>
+          </a:bodyPr>
+          <a:lstStyle/>
+          <a:p>
+            <a:pPr algn="ctr"/>
+            <a:r>
+              <a:rPr sz="1050" b="1">
+                <a:solidFill>
+                  <a:srgbClr val="6554A4"/>
+                </a:solidFill>
+                <a:latin typeface="Malgun Gothic"/>
+              </a:rPr>
+              <a:t>hmmscan</a:t>
+            </a:r>
+          </a:p>
+        </p:txBody>
+      </p:sp>
+      <p:sp>
+        <p:nvSpPr>
           <p:cNvPr id="11" name="TextBox 10"/>
           <p:cNvSpPr txBox="1"/>
           <p:nvPr/>
         </p:nvSpPr>
         <p:spPr>
           <a:xfrm>
-            <a:off x="3392424" y="4215383"/>
-            <a:ext cx="1115568" cy="256032"/>
-          </a:xfrm>
-          <a:prstGeom prst="rect">
-            <a:avLst/>
-          </a:prstGeom>
-          <a:noFill/>
-        </p:spPr>
-        <p:txBody>
-          <a:bodyPr wrap="square" lIns="0" rIns="0" tIns="0" bIns="0" anchor="ctr">
-            <a:noAutofit/>
-          </a:bodyPr>
-          <a:lstStyle/>
-          <a:p>
-            <a:pPr algn="ctr"/>
-            <a:r>
-              <a:rPr sz="1050" b="1">
-                <a:solidFill>
-                  <a:srgbClr val="6554A4"/>
-                </a:solidFill>
-                <a:latin typeface="Malgun Gothic"/>
-              </a:rPr>
-              <a:t>hmmscan</a:t>
-            </a:r>
-          </a:p>
-        </p:txBody>
-      </p:sp>
-      <p:sp>
-        <p:nvSpPr>
-          <p:cNvPr id="12" name="TextBox 11"/>
-          <p:cNvSpPr txBox="1"/>
-          <p:nvPr/>
-        </p:nvSpPr>
-        <p:spPr>
-          <a:xfrm>
             <a:off x="941832" y="5806440"/>
             <a:ext cx="5486400" cy="320040"/>
           </a:xfrm>
@@ -4492,7 +4457,7 @@
       </p:sp>
       <p:sp>
         <p:nvSpPr>
-          <p:cNvPr id="13" name="TextBox 12"/>
+          <p:cNvPr id="12" name="TextBox 11"/>
           <p:cNvSpPr txBox="1"/>
           <p:nvPr/>
         </p:nvSpPr>
@@ -6393,7 +6358,7 @@
                 </a:solidFill>
                 <a:latin typeface="Malgun Gothic"/>
               </a:rPr>
-              <a:t>Step 1 is the only database connection in the entire flow. Everything after it reads files written by step 2.</a:t>
+              <a:t>Step 1 is the only database connection in the entire flow.</a:t>
             </a:r>
           </a:p>
         </p:txBody>
@@ -8261,86 +8226,6 @@
           </a:p>
         </p:txBody>
       </p:sp>
-      <p:sp>
-        <p:nvSpPr>
-          <p:cNvPr id="51" name="Rounded Rectangle 50"/>
-          <p:cNvSpPr/>
-          <p:nvPr/>
-        </p:nvSpPr>
-        <p:spPr>
-          <a:xfrm>
-            <a:off x="658368" y="5806440"/>
-            <a:ext cx="10881360" cy="566928"/>
-          </a:xfrm>
-          <a:prstGeom prst="roundRect">
-            <a:avLst/>
-          </a:prstGeom>
-          <a:solidFill>
-            <a:srgbClr val="F5F7FA"/>
-          </a:solidFill>
-          <a:ln w="12700">
-            <a:solidFill>
-              <a:srgbClr val="D9DEE7"/>
-            </a:solidFill>
-          </a:ln>
-        </p:spPr>
-        <p:style>
-          <a:lnRef idx="1">
-            <a:schemeClr val="accent1"/>
-          </a:lnRef>
-          <a:fillRef idx="3">
-            <a:schemeClr val="accent1"/>
-          </a:fillRef>
-          <a:effectRef idx="2">
-            <a:schemeClr val="accent1"/>
-          </a:effectRef>
-          <a:fontRef idx="minor">
-            <a:schemeClr val="lt1"/>
-          </a:fontRef>
-        </p:style>
-        <p:txBody>
-          <a:bodyPr rtlCol="0" anchor="ctr"/>
-          <a:lstStyle/>
-          <a:p>
-            <a:pPr algn="ctr"/>
-          </a:p>
-        </p:txBody>
-      </p:sp>
-      <p:sp>
-        <p:nvSpPr>
-          <p:cNvPr id="52" name="TextBox 51"/>
-          <p:cNvSpPr txBox="1"/>
-          <p:nvPr/>
-        </p:nvSpPr>
-        <p:spPr>
-          <a:xfrm>
-            <a:off x="658368" y="5971032"/>
-            <a:ext cx="10881360" cy="274320"/>
-          </a:xfrm>
-          <a:prstGeom prst="rect">
-            <a:avLst/>
-          </a:prstGeom>
-          <a:noFill/>
-        </p:spPr>
-        <p:txBody>
-          <a:bodyPr wrap="square" lIns="0" rIns="0" tIns="0" bIns="0" anchor="t">
-            <a:noAutofit/>
-          </a:bodyPr>
-          <a:lstStyle/>
-          <a:p>
-            <a:pPr algn="ctr"/>
-            <a:r>
-              <a:rPr sz="1350" b="1">
-                <a:solidFill>
-                  <a:srgbClr val="52565B"/>
-                </a:solidFill>
-                <a:latin typeface="Malgun Gothic"/>
-              </a:rPr>
-              <a:t>Same language, same database engine. The integration point is one function call from the existing scheduler.</a:t>
-            </a:r>
-          </a:p>
-        </p:txBody>
-      </p:sp>
     </p:spTree>
   </p:cSld>
   <p:clrMapOvr>
@@ -11603,7 +11488,7 @@
         </p:nvSpPr>
         <p:spPr>
           <a:xfrm>
-            <a:off x="5120640" y="1965960"/>
+            <a:off x="5120640" y="2148840"/>
             <a:ext cx="6217920" cy="1188720"/>
           </a:xfrm>
           <a:prstGeom prst="rect">
@@ -11652,25 +11537,6 @@
                 <a:latin typeface="Malgun Gothic"/>
               </a:rPr>
               <a:t>•  BLAST+ 2.5, evalue 1e-5, max_target_seqs 100</a:t>
-            </a:r>
-          </a:p>
-          <a:p>
-            <a:pPr>
-              <a:lnSpc>
-                <a:spcPct val="105000"/>
-              </a:lnSpc>
-              <a:spcAft>
-                <a:spcPts val="1000"/>
-              </a:spcAft>
-            </a:pPr>
-            <a:r>
-              <a:rPr sz="1500">
-                <a:solidFill>
-                  <a:srgbClr val="18212B"/>
-                </a:solidFill>
-                <a:latin typeface="Malgun Gothic"/>
-              </a:rPr>
-              <a:t>•  Confirms the pipeline reproduces the existing result</a:t>
             </a:r>
           </a:p>
         </p:txBody>
